--- a/materials/Week6_教學簡報.pptx
+++ b/materials/Week6_教學簡報.pptx
@@ -21,6 +21,8 @@
     <p:sldId xmlns:ns0="http://schemas.openxmlformats.org/officeDocument/2006/relationships" id="291" ns0:id="rId41"/>
     <p:sldId xmlns:ns0="http://schemas.openxmlformats.org/officeDocument/2006/relationships" id="292" ns0:id="rId42"/>
     <p:sldId xmlns:ns0="http://schemas.openxmlformats.org/officeDocument/2006/relationships" id="293" ns0:id="rId43"/>
+    <p:sldId xmlns:ns0="http://schemas.openxmlformats.org/officeDocument/2006/relationships" id="294" ns0:id="rId44"/>
+    <p:sldId xmlns:ns0="http://schemas.openxmlformats.org/officeDocument/2006/relationships" id="295" ns0:id="rId45"/>
   </p:sldIdLst>
   <p:sldSz cx="12192000" cy="6858000"/>
   <p:notesSz cx="6858000" cy="9144000"/>
@@ -1199,7 +1201,7 @@
                 <a:ea typeface="PingFang TC"/>
                 <a:cs typeface="PingFang TC"/>
               </a:rPr>
-              <a:t>01 / 13</a:t>
+              <a:t>01 / 15</a:t>
             </a:r>
           </a:p>
         </p:txBody>
@@ -1912,7 +1914,7 @@
                 <a:ea typeface="PingFang TC"/>
                 <a:cs typeface="PingFang TC"/>
               </a:rPr>
-              <a:t>02 / 13</a:t>
+              <a:t>02 / 15</a:t>
             </a:r>
           </a:p>
         </p:txBody>
@@ -3286,7 +3288,7 @@
                 <a:ea typeface="PingFang TC"/>
                 <a:cs typeface="PingFang TC"/>
               </a:rPr>
-              <a:t>03 / 13</a:t>
+              <a:t>03 / 15</a:t>
             </a:r>
           </a:p>
         </p:txBody>
@@ -4462,7 +4464,7 @@
                 <a:ea typeface="PingFang TC"/>
                 <a:cs typeface="PingFang TC"/>
               </a:rPr>
-              <a:t>04 / 13</a:t>
+              <a:t>04 / 15</a:t>
             </a:r>
           </a:p>
         </p:txBody>
@@ -4672,7 +4674,7 @@
                 <a:ea typeface="PingFang TC"/>
                 <a:cs typeface="PingFang TC"/>
               </a:rPr>
-              <a:t>OpenAI 在 Q1 募 1,220 億美元，史上最大的一輪；同季 Anthropic 300 億、xAI 200 億。</a:t>
+              <a:t>Q1 最大的幾輪都給了大模型公司，單輪動輒數百億美元；2026 上半年，前兩大模型公司合計就募了約 2,170 億美元。</a:t>
             </a:r>
           </a:p>
         </p:txBody>
@@ -5607,7 +5609,7 @@
                 <a:ea typeface="PingFang TC"/>
                 <a:cs typeface="PingFang TC"/>
               </a:rPr>
-              <a:t>05 / 13</a:t>
+              <a:t>05 / 15</a:t>
             </a:r>
           </a:p>
         </p:txBody>
@@ -7156,7 +7158,7 @@
                 <a:ea typeface="PingFang TC"/>
                 <a:cs typeface="PingFang TC"/>
               </a:rPr>
-              <a:t>06 / 13</a:t>
+              <a:t>06 / 15</a:t>
             </a:r>
           </a:p>
         </p:txBody>
@@ -8226,7 +8228,7 @@
                 <a:ea typeface="PingFang TC"/>
                 <a:cs typeface="PingFang TC"/>
               </a:rPr>
-              <a:t>島 8 實體 AI、島 9 國防 AI、島 10 AI for Science</a:t>
+              <a:t>島 8 實體 AI、島 9 世界模型、島 10 AI for Science</a:t>
             </a:r>
           </a:p>
         </p:txBody>
@@ -8640,7 +8642,7 @@
                 <a:ea typeface="PingFang TC"/>
                 <a:cs typeface="PingFang TC"/>
               </a:rPr>
-              <a:t>07 / 13</a:t>
+              <a:t>07 / 15</a:t>
             </a:r>
           </a:p>
         </p:txBody>
@@ -8745,7 +8747,7 @@
                 <a:ea typeface="PingFang TC"/>
                 <a:cs typeface="PingFang TC"/>
               </a:rPr>
-              <a:t>• OpenAI：ChatGPT</a:t>
+              <a:t>• Anthropic：Claude</a:t>
             </a:r>
           </a:p>
           <a:p>
@@ -8758,7 +8760,7 @@
                 <a:ea typeface="PingFang TC"/>
                 <a:cs typeface="PingFang TC"/>
               </a:rPr>
-              <a:t>• Anthropic：Claude</a:t>
+              <a:t>• Safe Superintelligence（SSI）：新的模型實驗室</a:t>
             </a:r>
           </a:p>
           <a:p>
@@ -8771,7 +8773,7 @@
                 <a:ea typeface="PingFang TC"/>
                 <a:cs typeface="PingFang TC"/>
               </a:rPr>
-              <a:t>• xAI：Grok（已併入 SpaceX）</a:t>
+              <a:t>• Reflection AI：開源模型</a:t>
             </a:r>
           </a:p>
           <a:p>
@@ -8784,7 +8786,7 @@
                 <a:ea typeface="PingFang TC"/>
                 <a:cs typeface="PingFang TC"/>
               </a:rPr>
-              <a:t>• 2026 Q1 這三家合計募了 1,820 億美元</a:t>
+              <a:t>• 每一輪募資都是數十億到數百億美元</a:t>
             </a:r>
           </a:p>
         </p:txBody>
@@ -8925,7 +8927,7 @@
                 <a:ea typeface="PingFang TC"/>
                 <a:cs typeface="PingFang TC"/>
               </a:rPr>
-              <a:t>• Mistral AI（法國）：歐洲自己的模型</a:t>
+              <a:t>• Mistral AI（法國）：歐洲自己的模型，遊戲示範題</a:t>
             </a:r>
           </a:p>
           <a:p>
@@ -8938,7 +8940,7 @@
                 <a:ea typeface="PingFang TC"/>
                 <a:cs typeface="PingFang TC"/>
               </a:rPr>
-              <a:t>• DeepSeek（中國）</a:t>
+              <a:t>• Cohere＋Aleph Alpha（加拿大＋德國）：合併中</a:t>
             </a:r>
           </a:p>
           <a:p>
@@ -8951,7 +8953,7 @@
                 <a:ea typeface="PingFang TC"/>
                 <a:cs typeface="PingFang TC"/>
               </a:rPr>
-              <a:t>• Moonshot AI（中國）</a:t>
+              <a:t>• DeepSeek（中國）：開源模型</a:t>
             </a:r>
           </a:p>
           <a:p>
@@ -9402,7 +9404,7 @@
                 <a:ea typeface="PingFang TC"/>
                 <a:cs typeface="PingFang TC"/>
               </a:rPr>
-              <a:t>08 / 13</a:t>
+              <a:t>08 / 15</a:t>
             </a:r>
           </a:p>
         </p:txBody>
@@ -9858,7 +9860,7 @@
                 <a:ea typeface="PingFang TC"/>
                 <a:cs typeface="PingFang TC"/>
               </a:rPr>
-              <a:t>讓 App 和 AI 有地方放資料。例：Databricks、Supabase——我們課程 app 的資料庫就是 Supabase。</a:t>
+              <a:t>讓 App 和 AI 有地方放資料。例：Supabase（我們課程 app 的資料庫就是它）、Databricks。</a:t>
             </a:r>
           </a:p>
         </p:txBody>
@@ -10104,7 +10106,7 @@
                 <a:ea typeface="PingFang TC"/>
                 <a:cs typeface="PingFang TC"/>
               </a:rPr>
-              <a:t>讓 agent 能被打造、測試、管住、不洩密。例：LangChain、Cyera。</a:t>
+              <a:t>打造、串接、管住 agent 的工具。例：LangChain（美）、n8n（德）、Daytona（美）。</a:t>
             </a:r>
           </a:p>
         </p:txBody>
@@ -10198,7 +10200,7 @@
                 <a:ea typeface="PingFang TC"/>
                 <a:cs typeface="PingFang TC"/>
               </a:rPr>
-              <a:t>11/27 會讓你猜：這些公司向誰收錢、怎麼收、取代了誰。今天先記住名字和「做什麼」。</a:t>
+              <a:t>11/27 遊戲會讓你判斷：這些公司向誰收錢、怎麼收、取代了誰。今天先記住名字和「做什麼」。</a:t>
             </a:r>
           </a:p>
         </p:txBody>
@@ -10578,7 +10580,7 @@
                 <a:ea typeface="PingFang TC"/>
                 <a:cs typeface="PingFang TC"/>
               </a:rPr>
-              <a:t>09 / 13</a:t>
+              <a:t>09 / 15</a:t>
             </a:r>
           </a:p>
         </p:txBody>
@@ -10788,7 +10790,7 @@
                 <a:ea typeface="PingFang TC"/>
                 <a:cs typeface="PingFang TC"/>
               </a:rPr>
-              <a:t>不會寫程式的人也能做出網站和 App。例：Cursor、Lovable（瑞典）、Replit。</a:t>
+              <a:t>AI 幫你寫程式、做 App。例：Lovable（瑞典）、Cognition（Devin，美）、Replit。</a:t>
             </a:r>
           </a:p>
         </p:txBody>
@@ -11034,7 +11036,7 @@
                 <a:ea typeface="PingFang TC"/>
                 <a:cs typeface="PingFang TC"/>
               </a:rPr>
-              <a:t>專做一行的 AI 員工。例：Harvey（法律）、Sierra（客服）、Owner（獨立餐廳）。</a:t>
+              <a:t>專做一行的 AI 員工。例：Owner（餐廳）、Gorgias（網拍賣家）、EliseAI（租屋）、Sierra（大企業客服）。</a:t>
             </a:r>
           </a:p>
         </p:txBody>
@@ -11280,7 +11282,7 @@
                 <a:ea typeface="PingFang TC"/>
                 <a:cs typeface="PingFang TC"/>
               </a:rPr>
-              <a:t>一般人直接用的 AI。例：Perplexity（搜尋）、ElevenLabs（聲音）、Suno（音樂）。</a:t>
+              <a:t>一般人直接用的 AI。例：ElevenLabs（聲音，英）、Suno（音樂，美）、Runway（影片）。</a:t>
             </a:r>
           </a:p>
         </p:txBody>
@@ -11374,7 +11376,7 @@
                 <a:ea typeface="PingFang TC"/>
                 <a:cs typeface="PingFang TC"/>
               </a:rPr>
-              <a:t>想一想：你的產業線（餐飲、網拍、旅宿……）在島 6 會長什麼樣子？</a:t>
+              <a:t>島 6 裡有班上產業線的「對照組」：你這一行在美國、歐洲是誰在做？</a:t>
             </a:r>
           </a:p>
         </p:txBody>
@@ -11544,7 +11546,7 @@
                 <a:ea typeface="PingFang TC"/>
                 <a:cs typeface="PingFang TC"/>
               </a:rPr>
-              <a:t>AI 進入實體世界：AI 有了手和腳</a:t>
+              <a:t>AI 進入實體世界：AI 有了手、腳和眼睛</a:t>
             </a:r>
           </a:p>
         </p:txBody>
@@ -11602,7 +11604,7 @@
                 <a:ea typeface="PingFang TC"/>
                 <a:cs typeface="PingFang TC"/>
               </a:rPr>
-              <a:t>三座島；最燒錢、最慢賺錢的一區</a:t>
+              <a:t>三座島；最燒錢、最慢賺錢、但最新的一區</a:t>
             </a:r>
           </a:p>
         </p:txBody>
@@ -11754,7 +11756,7 @@
                 <a:ea typeface="PingFang TC"/>
                 <a:cs typeface="PingFang TC"/>
               </a:rPr>
-              <a:t>10 / 13</a:t>
+              <a:t>10 / 15</a:t>
             </a:r>
           </a:p>
         </p:txBody>
@@ -11964,7 +11966,7 @@
                 <a:ea typeface="PingFang TC"/>
                 <a:cs typeface="PingFang TC"/>
               </a:rPr>
-              <a:t>機器人的大腦和身體。例：Skild AI、Physical Intelligence、Figure AI。</a:t>
+              <a:t>機器人的大腦和身體。例：Figure AI、Skild AI、Physical Intelligence。</a:t>
             </a:r>
           </a:p>
         </p:txBody>
@@ -12152,7 +12154,7 @@
                 <a:ea typeface="PingFang TC"/>
                 <a:cs typeface="PingFang TC"/>
               </a:rPr>
-              <a:t>島 9 國防 AI</a:t>
+              <a:t>島 9 世界模型</a:t>
             </a:r>
           </a:p>
         </p:txBody>
@@ -12210,7 +12212,7 @@
                 <a:ea typeface="PingFang TC"/>
                 <a:cs typeface="PingFang TC"/>
               </a:rPr>
-              <a:t>無人機和防衛系統。例：Anduril（美）、Helsing（德）。</a:t>
+              <a:t>讓 AI 看懂、模擬真實世界。例：World Labs、Odyssey、AMI Labs。</a:t>
             </a:r>
           </a:p>
         </p:txBody>
@@ -12550,7 +12552,7 @@
                 <a:ea typeface="PingFang TC"/>
                 <a:cs typeface="PingFang TC"/>
               </a:rPr>
-              <a:t>例：Physical Intelligence 還沒有公開營收，估值已經超過 50 億美元——市場在賭未來。</a:t>
+              <a:t>2026/9/28：AMD 宣布以約 82 億美元收購 World Labs（還在等主管機關核准）——新創的結局不只上市。</a:t>
             </a:r>
           </a:p>
         </p:txBody>
@@ -12566,6 +12568,13 @@
 <file path=ppt/slides/slide36.xml><?xml version="1.0" encoding="utf-8"?>
 <p:sld xmlns:a="http://schemas.openxmlformats.org/drawingml/2006/main" xmlns:p="http://schemas.openxmlformats.org/presentationml/2006/main" xmlns:r="http://schemas.openxmlformats.org/officeDocument/2006/relationships">
   <p:cSld>
+    <p:bg>
+      <p:bgPr>
+        <a:solidFill>
+          <a:srgbClr val="F6F3EE"/>
+        </a:solidFill>
+      </p:bgPr>
+    </p:bg>
     <p:spTree>
       <p:nvGrpSpPr>
         <p:cNvPr id="1" name=""/>
@@ -12575,33 +12584,205 @@
       <p:grpSpPr/>
       <p:sp>
         <p:nvSpPr>
-          <p:cNvPr id="14" name="">
-            <a:extLst>
-              <a:ext uri="{FF2B5EF4-FFF2-40B4-BE49-F238E27FC236}">
-                <a16:creationId xmlns:a16="http://schemas.microsoft.com/office/drawing/2014/main" id="{D99C096F-6EB5-41EA-B969-490BF1A5FE7B}"/>
-              </a:ext>
-            </a:extLst>
-          </p:cNvPr>
-          <p:cNvSpPr>
-            <a:spLocks noGrp="1"/>
-          </p:cNvSpPr>
-          <p:nvPr/>
-        </p:nvSpPr>
-        <p:spPr>
-          <a:xfrm>
-            <a:off x="0" y="0"/>
-            <a:ext cx="12192000" cy="6858000"/>
+          <p:cNvPr id="31" name="">
+            <a:extLst>
+              <a:ext uri="{FF2B5EF4-FFF2-40B4-BE49-F238E27FC236}">
+                <a16:creationId xmlns:a16="http://schemas.microsoft.com/office/drawing/2014/main" id="{68EB7237-7F7B-4EBB-8147-7D3116DA24B3}"/>
+              </a:ext>
+            </a:extLst>
+          </p:cNvPr>
+          <p:cNvSpPr>
+            <a:spLocks noGrp="1"/>
+          </p:cNvSpPr>
+          <p:nvPr/>
+        </p:nvSpPr>
+        <p:spPr>
+          <a:xfrm>
+            <a:off x="609600" y="285750"/>
+            <a:ext cx="10287000" cy="285750"/>
+          </a:xfrm>
+          <a:prstGeom prst="rect">
+            <a:avLst/>
+          </a:prstGeom>
+          <a:noFill/>
+          <a:ln w="0">
+            <a:noFill/>
+          </a:ln>
+        </p:spPr>
+        <p:txBody>
+          <a:bodyPr>
+            <a:noAutofit/>
+          </a:bodyPr>
+          <a:lstStyle/>
+          <a:p>
+            <a:pPr>
+              <a:buNone/>
+              <a:defRPr sz="1350" b="1">
+                <a:solidFill>
+                  <a:srgbClr val="E63946"/>
+                </a:solidFill>
+                <a:latin typeface="PingFang TC"/>
+                <a:ea typeface="PingFang TC"/>
+                <a:cs typeface="PingFang TC"/>
+              </a:defRPr>
+            </a:pPr>
+            <a:r>
+              <a:rPr sz="1350" b="1">
+                <a:solidFill>
+                  <a:srgbClr val="E63946"/>
+                </a:solidFill>
+                <a:latin typeface="PingFang TC"/>
+                <a:ea typeface="PingFang TC"/>
+                <a:cs typeface="PingFang TC"/>
+              </a:rPr>
+              <a:t>WEEK 6  /  AI 新創地圖</a:t>
+            </a:r>
+          </a:p>
+        </p:txBody>
+      </p:sp>
+      <p:sp>
+        <p:nvSpPr>
+          <p:cNvPr id="2" name="">
+            <a:extLst>
+              <a:ext uri="{FF2B5EF4-FFF2-40B4-BE49-F238E27FC236}">
+                <a16:creationId xmlns:a16="http://schemas.microsoft.com/office/drawing/2014/main" id="{E3A4D602-346A-48B7-AE99-FAAAA326895A}"/>
+              </a:ext>
+            </a:extLst>
+          </p:cNvPr>
+          <p:cNvSpPr>
+            <a:spLocks noGrp="1"/>
+          </p:cNvSpPr>
+          <p:nvPr/>
+        </p:nvSpPr>
+        <p:spPr>
+          <a:xfrm>
+            <a:off x="609600" y="838200"/>
+            <a:ext cx="10972800" cy="762000"/>
+          </a:xfrm>
+          <a:prstGeom prst="rect">
+            <a:avLst/>
+          </a:prstGeom>
+          <a:noFill/>
+          <a:ln w="0">
+            <a:noFill/>
+          </a:ln>
+        </p:spPr>
+        <p:txBody>
+          <a:bodyPr>
+            <a:noAutofit/>
+          </a:bodyPr>
+          <a:lstStyle/>
+          <a:p>
+            <a:pPr>
+              <a:buNone/>
+              <a:defRPr sz="3450" b="1">
+                <a:solidFill>
+                  <a:srgbClr val="121212"/>
+                </a:solidFill>
+                <a:latin typeface="PingFang TC"/>
+                <a:ea typeface="PingFang TC"/>
+                <a:cs typeface="PingFang TC"/>
+              </a:defRPr>
+            </a:pPr>
+            <a:r>
+              <a:rPr sz="3450" b="1">
+                <a:solidFill>
+                  <a:srgbClr val="121212"/>
+                </a:solidFill>
+                <a:latin typeface="PingFang TC"/>
+                <a:ea typeface="PingFang TC"/>
+                <a:cs typeface="PingFang TC"/>
+              </a:rPr>
+              <a:t>2026 最新：世界模型是什麼？</a:t>
+            </a:r>
+          </a:p>
+        </p:txBody>
+      </p:sp>
+      <p:sp>
+        <p:nvSpPr>
+          <p:cNvPr id="3" name="">
+            <a:extLst>
+              <a:ext uri="{FF2B5EF4-FFF2-40B4-BE49-F238E27FC236}">
+                <a16:creationId xmlns:a16="http://schemas.microsoft.com/office/drawing/2014/main" id="{EB9EFF97-9BDD-4B70-A899-0F84C83E795D}"/>
+              </a:ext>
+            </a:extLst>
+          </p:cNvPr>
+          <p:cNvSpPr>
+            <a:spLocks noGrp="1"/>
+          </p:cNvSpPr>
+          <p:nvPr/>
+        </p:nvSpPr>
+        <p:spPr>
+          <a:xfrm>
+            <a:off x="609600" y="1619250"/>
+            <a:ext cx="10972800" cy="495300"/>
+          </a:xfrm>
+          <a:prstGeom prst="rect">
+            <a:avLst/>
+          </a:prstGeom>
+          <a:noFill/>
+          <a:ln w="0">
+            <a:noFill/>
+          </a:ln>
+        </p:spPr>
+        <p:txBody>
+          <a:bodyPr>
+            <a:noAutofit/>
+          </a:bodyPr>
+          <a:lstStyle/>
+          <a:p>
+            <a:pPr>
+              <a:buNone/>
+              <a:defRPr sz="1875" b="0">
+                <a:solidFill>
+                  <a:srgbClr val="626262"/>
+                </a:solidFill>
+                <a:latin typeface="PingFang TC"/>
+                <a:ea typeface="PingFang TC"/>
+                <a:cs typeface="PingFang TC"/>
+              </a:defRPr>
+            </a:pPr>
+            <a:r>
+              <a:rPr sz="1875" b="0">
+                <a:solidFill>
+                  <a:srgbClr val="626262"/>
+                </a:solidFill>
+                <a:latin typeface="PingFang TC"/>
+                <a:ea typeface="PingFang TC"/>
+                <a:cs typeface="PingFang TC"/>
+              </a:rPr>
+              <a:t>語言模型學「字」，世界模型學「世界怎麼動」</a:t>
+            </a:r>
+          </a:p>
+        </p:txBody>
+      </p:sp>
+      <p:sp>
+        <p:nvSpPr>
+          <p:cNvPr id="4" name="">
+            <a:extLst>
+              <a:ext uri="{FF2B5EF4-FFF2-40B4-BE49-F238E27FC236}">
+                <a16:creationId xmlns:a16="http://schemas.microsoft.com/office/drawing/2014/main" id="{D12C4FFE-AA45-4E84-9A78-83B6155A0076}"/>
+              </a:ext>
+            </a:extLst>
+          </p:cNvPr>
+          <p:cNvSpPr>
+            <a:spLocks noGrp="1"/>
+          </p:cNvSpPr>
+          <p:nvPr/>
+        </p:nvSpPr>
+        <p:spPr>
+          <a:xfrm>
+            <a:off x="609600" y="6286500"/>
+            <a:ext cx="10972800" cy="19050"/>
           </a:xfrm>
           <a:prstGeom prst="rect">
             <a:avLst/>
           </a:prstGeom>
           <a:solidFill>
-            <a:srgbClr val="F6F3EE"/>
+            <a:srgbClr val="D9D5CF"/>
           </a:solidFill>
-          <a:ln w="9525">
-            <a:solidFill>
-              <a:srgbClr val="F6F3EE"/>
-            </a:solidFill>
+          <a:ln w="0">
+            <a:noFill/>
           </a:ln>
         </p:spPr>
         <p:txBody>
@@ -12611,156 +12792,40 @@
       </p:sp>
       <p:sp>
         <p:nvSpPr>
-          <p:cNvPr id="2" name="">
-            <a:extLst>
-              <a:ext uri="{FF2B5EF4-FFF2-40B4-BE49-F238E27FC236}">
-                <a16:creationId xmlns:a16="http://schemas.microsoft.com/office/drawing/2014/main" id="{F945F193-D6A2-4A5E-BD73-6B69757A3820}"/>
-              </a:ext>
-            </a:extLst>
-          </p:cNvPr>
-          <p:cNvSpPr>
-            <a:spLocks noGrp="1"/>
-          </p:cNvSpPr>
-          <p:nvPr/>
-        </p:nvSpPr>
-        <p:spPr>
-          <a:xfrm>
-            <a:off x="609600" y="285750"/>
-            <a:ext cx="10287000" cy="285750"/>
-          </a:xfrm>
-          <a:prstGeom prst="rect">
-            <a:avLst/>
-          </a:prstGeom>
-          <a:noFill/>
-          <a:ln w="0">
-            <a:noFill/>
-          </a:ln>
-        </p:spPr>
-        <p:txBody>
-          <a:bodyPr anchor="ctr">
-            <a:normAutofit fontScale="94444"/>
-          </a:bodyPr>
-          <a:lstStyle/>
-          <a:p>
-            <a:pPr algn="l">
-              <a:buNone/>
-              <a:defRPr sz="1350" b="1">
-                <a:solidFill>
-                  <a:srgbClr val="E63946"/>
-                </a:solidFill>
-                <a:latin typeface="PingFang TC"/>
-                <a:ea typeface="PingFang TC"/>
-                <a:cs typeface="PingFang TC"/>
-              </a:defRPr>
-            </a:pPr>
-            <a:r>
-              <a:rPr sz="1350" b="1">
-                <a:solidFill>
-                  <a:srgbClr val="E63946"/>
-                </a:solidFill>
-                <a:latin typeface="PingFang TC"/>
-                <a:ea typeface="PingFang TC"/>
-                <a:cs typeface="PingFang TC"/>
-              </a:rPr>
-              <a:t>WEEK 6  /  AI 新創地圖</a:t>
-            </a:r>
-          </a:p>
-        </p:txBody>
-      </p:sp>
-      <p:sp>
-        <p:nvSpPr>
-          <p:cNvPr id="3" name="">
-            <a:extLst>
-              <a:ext uri="{FF2B5EF4-FFF2-40B4-BE49-F238E27FC236}">
-                <a16:creationId xmlns:a16="http://schemas.microsoft.com/office/drawing/2014/main" id="{EBE0DE06-5026-47E2-9F71-7631AE1BDAE2}"/>
-              </a:ext>
-            </a:extLst>
-          </p:cNvPr>
-          <p:cNvSpPr>
-            <a:spLocks noGrp="1"/>
-          </p:cNvSpPr>
-          <p:nvPr/>
-        </p:nvSpPr>
-        <p:spPr>
-          <a:xfrm>
-            <a:off x="609600" y="838200"/>
-            <a:ext cx="10972800" cy="762000"/>
-          </a:xfrm>
-          <a:prstGeom prst="rect">
-            <a:avLst/>
-          </a:prstGeom>
-          <a:noFill/>
-          <a:ln w="0">
-            <a:noFill/>
-          </a:ln>
-        </p:spPr>
-        <p:txBody>
-          <a:bodyPr anchor="ctr">
-            <a:normAutofit fontScale="100000"/>
-          </a:bodyPr>
-          <a:lstStyle/>
-          <a:p>
-            <a:pPr algn="l">
-              <a:buNone/>
-              <a:defRPr sz="3450" b="1">
-                <a:solidFill>
-                  <a:srgbClr val="121212"/>
-                </a:solidFill>
-                <a:latin typeface="PingFang TC"/>
-                <a:ea typeface="PingFang TC"/>
-                <a:cs typeface="PingFang TC"/>
-              </a:defRPr>
-            </a:pPr>
-            <a:r>
-              <a:rPr sz="3450" b="1">
-                <a:solidFill>
-                  <a:srgbClr val="121212"/>
-                </a:solidFill>
-                <a:latin typeface="PingFang TC"/>
-                <a:ea typeface="PingFang TC"/>
-                <a:cs typeface="PingFang TC"/>
-              </a:rPr>
-              <a:t>台灣在哪一層？</a:t>
-            </a:r>
-          </a:p>
-        </p:txBody>
-      </p:sp>
-      <p:sp>
-        <p:nvSpPr>
-          <p:cNvPr id="4" name="">
-            <a:extLst>
-              <a:ext uri="{FF2B5EF4-FFF2-40B4-BE49-F238E27FC236}">
-                <a16:creationId xmlns:a16="http://schemas.microsoft.com/office/drawing/2014/main" id="{E0ED7F9D-7CE4-45F4-B7CB-9761EE5DF652}"/>
-              </a:ext>
-            </a:extLst>
-          </p:cNvPr>
-          <p:cNvSpPr>
-            <a:spLocks noGrp="1"/>
-          </p:cNvSpPr>
-          <p:nvPr/>
-        </p:nvSpPr>
-        <p:spPr>
-          <a:xfrm>
-            <a:off x="609600" y="1619250"/>
-            <a:ext cx="10972800" cy="476250"/>
-          </a:xfrm>
-          <a:prstGeom prst="rect">
-            <a:avLst/>
-          </a:prstGeom>
-          <a:noFill/>
-          <a:ln w="0">
-            <a:noFill/>
-          </a:ln>
-        </p:spPr>
-        <p:txBody>
-          <a:bodyPr anchor="ctr">
-            <a:normAutofit fontScale="100000"/>
-          </a:bodyPr>
-          <a:lstStyle/>
-          <a:p>
-            <a:pPr algn="l">
-              <a:buNone/>
-              <a:defRPr sz="1800" b="0">
+          <p:cNvPr id="5" name="">
+            <a:extLst>
+              <a:ext uri="{FF2B5EF4-FFF2-40B4-BE49-F238E27FC236}">
+                <a16:creationId xmlns:a16="http://schemas.microsoft.com/office/drawing/2014/main" id="{94862769-381A-4C7F-B6F8-66BEDA67D9A6}"/>
+              </a:ext>
+            </a:extLst>
+          </p:cNvPr>
+          <p:cNvSpPr>
+            <a:spLocks noGrp="1"/>
+          </p:cNvSpPr>
+          <p:nvPr/>
+        </p:nvSpPr>
+        <p:spPr>
+          <a:xfrm>
+            <a:off x="609600" y="6410325"/>
+            <a:ext cx="5238750" cy="285750"/>
+          </a:xfrm>
+          <a:prstGeom prst="rect">
+            <a:avLst/>
+          </a:prstGeom>
+          <a:noFill/>
+          <a:ln w="0">
+            <a:noFill/>
+          </a:ln>
+        </p:spPr>
+        <p:txBody>
+          <a:bodyPr>
+            <a:noAutofit/>
+          </a:bodyPr>
+          <a:lstStyle/>
+          <a:p>
+            <a:pPr>
+              <a:buNone/>
+              <a:defRPr sz="1200" b="0">
                 <a:solidFill>
                   <a:srgbClr val="626262"/>
                 </a:solidFill>
@@ -12770,7 +12835,7 @@
               </a:defRPr>
             </a:pPr>
             <a:r>
-              <a:rPr sz="1800" b="0">
+              <a:rPr sz="1200" b="0">
                 <a:solidFill>
                   <a:srgbClr val="626262"/>
                 </a:solidFill>
@@ -12778,40 +12843,96 @@
                 <a:ea typeface="PingFang TC"/>
                 <a:cs typeface="PingFang TC"/>
               </a:rPr>
-              <a:t>左邊是現況，右邊是本課的推論——期末研究要用證據證明或推翻它</a:t>
-            </a:r>
-          </a:p>
-        </p:txBody>
-      </p:sp>
-      <p:sp>
-        <p:nvSpPr>
-          <p:cNvPr id="5" name="">
-            <a:extLst>
-              <a:ext uri="{FF2B5EF4-FFF2-40B4-BE49-F238E27FC236}">
-                <a16:creationId xmlns:a16="http://schemas.microsoft.com/office/drawing/2014/main" id="{A2DC1420-12C3-4916-8E72-AE7443D5B25C}"/>
-              </a:ext>
-            </a:extLst>
-          </p:cNvPr>
-          <p:cNvSpPr>
-            <a:spLocks noGrp="1"/>
-          </p:cNvSpPr>
-          <p:nvPr/>
-        </p:nvSpPr>
-        <p:spPr>
-          <a:xfrm>
-            <a:off x="609600" y="6286500"/>
-            <a:ext cx="10972800" cy="19050"/>
+              <a:t>Startup Journey Lab</a:t>
+            </a:r>
+          </a:p>
+        </p:txBody>
+      </p:sp>
+      <p:sp>
+        <p:nvSpPr>
+          <p:cNvPr id="6" name="">
+            <a:extLst>
+              <a:ext uri="{FF2B5EF4-FFF2-40B4-BE49-F238E27FC236}">
+                <a16:creationId xmlns:a16="http://schemas.microsoft.com/office/drawing/2014/main" id="{682FD63C-1A06-42CE-A2D4-A2173418FE75}"/>
+              </a:ext>
+            </a:extLst>
+          </p:cNvPr>
+          <p:cNvSpPr>
+            <a:spLocks noGrp="1"/>
+          </p:cNvSpPr>
+          <p:nvPr/>
+        </p:nvSpPr>
+        <p:spPr>
+          <a:xfrm>
+            <a:off x="10668000" y="6410325"/>
+            <a:ext cx="1047750" cy="285750"/>
+          </a:xfrm>
+          <a:prstGeom prst="rect">
+            <a:avLst/>
+          </a:prstGeom>
+          <a:noFill/>
+          <a:ln w="0">
+            <a:noFill/>
+          </a:ln>
+        </p:spPr>
+        <p:txBody>
+          <a:bodyPr>
+            <a:noAutofit/>
+          </a:bodyPr>
+          <a:lstStyle/>
+          <a:p>
+            <a:pPr>
+              <a:buNone/>
+              <a:defRPr sz="1200" b="0">
+                <a:solidFill>
+                  <a:srgbClr val="626262"/>
+                </a:solidFill>
+                <a:latin typeface="PingFang TC"/>
+                <a:ea typeface="PingFang TC"/>
+                <a:cs typeface="PingFang TC"/>
+              </a:defRPr>
+            </a:pPr>
+            <a:r>
+              <a:rPr sz="1200" b="0">
+                <a:solidFill>
+                  <a:srgbClr val="626262"/>
+                </a:solidFill>
+                <a:latin typeface="PingFang TC"/>
+                <a:ea typeface="PingFang TC"/>
+                <a:cs typeface="PingFang TC"/>
+              </a:rPr>
+              <a:t>11 / 15</a:t>
+            </a:r>
+          </a:p>
+        </p:txBody>
+      </p:sp>
+      <p:sp>
+        <p:nvSpPr>
+          <p:cNvPr id="7" name="">
+            <a:extLst>
+              <a:ext uri="{FF2B5EF4-FFF2-40B4-BE49-F238E27FC236}">
+                <a16:creationId xmlns:a16="http://schemas.microsoft.com/office/drawing/2014/main" id="{27A1CCD5-B26A-4035-801D-C98F40910D30}"/>
+              </a:ext>
+            </a:extLst>
+          </p:cNvPr>
+          <p:cNvSpPr>
+            <a:spLocks noGrp="1"/>
+          </p:cNvSpPr>
+          <p:nvPr/>
+        </p:nvSpPr>
+        <p:spPr>
+          <a:xfrm>
+            <a:off x="609600" y="2333625"/>
+            <a:ext cx="5372100" cy="1657350"/>
           </a:xfrm>
           <a:prstGeom prst="rect">
             <a:avLst/>
           </a:prstGeom>
           <a:solidFill>
-            <a:srgbClr val="D6D0C7"/>
+            <a:srgbClr val="FFFFFF"/>
           </a:solidFill>
-          <a:ln w="9525">
-            <a:solidFill>
-              <a:srgbClr val="D6D0C7"/>
-            </a:solidFill>
+          <a:ln w="0">
+            <a:noFill/>
           </a:ln>
         </p:spPr>
         <p:txBody>
@@ -12821,293 +12942,31 @@
       </p:sp>
       <p:sp>
         <p:nvSpPr>
-          <p:cNvPr id="6" name="">
-            <a:extLst>
-              <a:ext uri="{FF2B5EF4-FFF2-40B4-BE49-F238E27FC236}">
-                <a16:creationId xmlns:a16="http://schemas.microsoft.com/office/drawing/2014/main" id="{2F07DDDE-8D75-462F-91D5-4B36B43575EE}"/>
-              </a:ext>
-            </a:extLst>
-          </p:cNvPr>
-          <p:cNvSpPr>
-            <a:spLocks noGrp="1"/>
-          </p:cNvSpPr>
-          <p:nvPr/>
-        </p:nvSpPr>
-        <p:spPr>
-          <a:xfrm>
-            <a:off x="609600" y="6362700"/>
-            <a:ext cx="2381250" cy="209550"/>
-          </a:xfrm>
-          <a:prstGeom prst="rect">
-            <a:avLst/>
-          </a:prstGeom>
-          <a:noFill/>
-          <a:ln w="0">
-            <a:noFill/>
-          </a:ln>
-        </p:spPr>
-        <p:txBody>
-          <a:bodyPr anchor="ctr">
-            <a:normAutofit fontScale="86111"/>
-          </a:bodyPr>
-          <a:lstStyle/>
-          <a:p>
-            <a:pPr algn="l">
-              <a:buNone/>
-              <a:defRPr sz="900" b="0">
-                <a:solidFill>
-                  <a:srgbClr val="626262"/>
-                </a:solidFill>
-                <a:latin typeface="PingFang TC"/>
-                <a:ea typeface="PingFang TC"/>
-                <a:cs typeface="PingFang TC"/>
-              </a:defRPr>
-            </a:pPr>
-            <a:r>
-              <a:rPr sz="900" b="0">
-                <a:solidFill>
-                  <a:srgbClr val="626262"/>
-                </a:solidFill>
-                <a:latin typeface="PingFang TC"/>
-                <a:ea typeface="PingFang TC"/>
-                <a:cs typeface="PingFang TC"/>
-              </a:rPr>
-              <a:t>Startup Journey Lab</a:t>
-            </a:r>
-          </a:p>
-        </p:txBody>
-      </p:sp>
-      <p:sp>
-        <p:nvSpPr>
-          <p:cNvPr id="7" name="">
-            <a:extLst>
-              <a:ext uri="{FF2B5EF4-FFF2-40B4-BE49-F238E27FC236}">
-                <a16:creationId xmlns:a16="http://schemas.microsoft.com/office/drawing/2014/main" id="{C5FE7A55-B727-4B6F-9EE2-D39F3300B62E}"/>
-              </a:ext>
-            </a:extLst>
-          </p:cNvPr>
-          <p:cNvSpPr>
-            <a:spLocks noGrp="1"/>
-          </p:cNvSpPr>
-          <p:nvPr/>
-        </p:nvSpPr>
-        <p:spPr>
-          <a:xfrm>
-            <a:off x="10477500" y="6362700"/>
-            <a:ext cx="1104900" cy="209550"/>
-          </a:xfrm>
-          <a:prstGeom prst="rect">
-            <a:avLst/>
-          </a:prstGeom>
-          <a:noFill/>
-          <a:ln w="0">
-            <a:noFill/>
-          </a:ln>
-        </p:spPr>
-        <p:txBody>
-          <a:bodyPr anchor="ctr">
-            <a:normAutofit fontScale="86111"/>
-          </a:bodyPr>
-          <a:lstStyle/>
-          <a:p>
-            <a:pPr algn="r">
-              <a:buNone/>
-              <a:defRPr sz="900" b="0">
-                <a:solidFill>
-                  <a:srgbClr val="626262"/>
-                </a:solidFill>
-                <a:latin typeface="PingFang TC"/>
-                <a:ea typeface="PingFang TC"/>
-                <a:cs typeface="PingFang TC"/>
-              </a:defRPr>
-            </a:pPr>
-            <a:r>
-              <a:rPr sz="900" b="0">
-                <a:solidFill>
-                  <a:srgbClr val="626262"/>
-                </a:solidFill>
-                <a:latin typeface="PingFang TC"/>
-                <a:ea typeface="PingFang TC"/>
-                <a:cs typeface="PingFang TC"/>
-              </a:rPr>
-              <a:t>11 / 13</a:t>
-            </a:r>
-          </a:p>
-        </p:txBody>
-      </p:sp>
-      <p:sp>
-        <p:nvSpPr>
           <p:cNvPr id="8" name="">
             <a:extLst>
               <a:ext uri="{FF2B5EF4-FFF2-40B4-BE49-F238E27FC236}">
-                <a16:creationId xmlns:a16="http://schemas.microsoft.com/office/drawing/2014/main" id="{E25F88BD-8320-4506-A81F-3D2EC6975FEA}"/>
-              </a:ext>
-            </a:extLst>
-          </p:cNvPr>
-          <p:cNvSpPr>
-            <a:spLocks noGrp="1"/>
-          </p:cNvSpPr>
-          <p:nvPr/>
-        </p:nvSpPr>
-        <p:spPr>
-          <a:xfrm>
-            <a:off x="609600" y="2428875"/>
-            <a:ext cx="4476750" cy="457200"/>
-          </a:xfrm>
-          <a:prstGeom prst="rect">
-            <a:avLst/>
-          </a:prstGeom>
-          <a:noFill/>
-          <a:ln w="0">
-            <a:noFill/>
-          </a:ln>
-        </p:spPr>
-        <p:txBody>
-          <a:bodyPr anchor="ctr">
-            <a:normAutofit fontScale="100000"/>
-          </a:bodyPr>
-          <a:lstStyle/>
-          <a:p>
-            <a:pPr algn="l">
-              <a:buNone/>
-              <a:defRPr sz="2325" b="1">
-                <a:solidFill>
-                  <a:srgbClr val="E63946"/>
-                </a:solidFill>
-                <a:latin typeface="PingFang TC"/>
-                <a:ea typeface="PingFang TC"/>
-                <a:cs typeface="PingFang TC"/>
-              </a:defRPr>
-            </a:pPr>
-            <a:r>
-              <a:rPr sz="2325" b="1">
-                <a:solidFill>
-                  <a:srgbClr val="E63946"/>
-                </a:solidFill>
-                <a:latin typeface="PingFang TC"/>
-                <a:ea typeface="PingFang TC"/>
-                <a:cs typeface="PingFang TC"/>
-              </a:rPr>
-              <a:t>台灣強的地方：底層硬體</a:t>
-            </a:r>
-          </a:p>
-        </p:txBody>
-      </p:sp>
-      <p:sp>
-        <p:nvSpPr>
-          <p:cNvPr id="9" name="">
-            <a:extLst>
-              <a:ext uri="{FF2B5EF4-FFF2-40B4-BE49-F238E27FC236}">
-                <a16:creationId xmlns:a16="http://schemas.microsoft.com/office/drawing/2014/main" id="{0993229B-BD18-4B58-BFFD-54C5C43644DE}"/>
-              </a:ext>
-            </a:extLst>
-          </p:cNvPr>
-          <p:cNvSpPr>
-            <a:spLocks noGrp="1"/>
-          </p:cNvSpPr>
-          <p:nvPr/>
-        </p:nvSpPr>
-        <p:spPr>
-          <a:xfrm>
-            <a:off x="609600" y="3000375"/>
-            <a:ext cx="4762500" cy="2238375"/>
-          </a:xfrm>
-          <a:prstGeom prst="rect">
-            <a:avLst/>
-          </a:prstGeom>
-          <a:noFill/>
-          <a:ln w="0">
-            <a:noFill/>
-          </a:ln>
-        </p:spPr>
-        <p:txBody>
-          <a:bodyPr anchor="ctr">
-            <a:normAutofit fontScale="100000"/>
-          </a:bodyPr>
-          <a:lstStyle/>
-          <a:p>
-            <a:r>
-              <a:rPr sz="1650" b="0">
-                <a:solidFill>
-                  <a:srgbClr val="121212"/>
-                </a:solidFill>
-                <a:latin typeface="PingFang TC"/>
-                <a:ea typeface="PingFang TC"/>
-                <a:cs typeface="PingFang TC"/>
-              </a:rPr>
-              <a:t>• 晶片代工：先進 AI 晶片大多在台灣製造</a:t>
-            </a:r>
-          </a:p>
-          <a:p>
-            <a:r>
-              <a:rPr sz="1650" b="0">
-                <a:solidFill>
-                  <a:srgbClr val="121212"/>
-                </a:solidFill>
-                <a:latin typeface="PingFang TC"/>
-                <a:ea typeface="PingFang TC"/>
-                <a:cs typeface="PingFang TC"/>
-              </a:rPr>
-              <a:t>• 伺服器和電子零件的供應鏈</a:t>
-            </a:r>
-          </a:p>
-          <a:p>
-            <a:r>
-              <a:rPr sz="1650" b="0">
-                <a:solidFill>
-                  <a:srgbClr val="121212"/>
-                </a:solidFill>
-                <a:latin typeface="PingFang TC"/>
-                <a:ea typeface="PingFang TC"/>
-                <a:cs typeface="PingFang TC"/>
-              </a:rPr>
-              <a:t>• 也就是「發電廠」和「引擎」背後的工廠</a:t>
-            </a:r>
-          </a:p>
-          <a:p>
-            <a:r>
-              <a:rPr sz="1650" b="0">
-                <a:solidFill>
-                  <a:srgbClr val="121212"/>
-                </a:solidFill>
-                <a:latin typeface="PingFang TC"/>
-                <a:ea typeface="PingFang TC"/>
-                <a:cs typeface="PingFang TC"/>
-              </a:rPr>
-              <a:t>• 但這一層的新創門檻極高</a:t>
-            </a:r>
-          </a:p>
-        </p:txBody>
-      </p:sp>
-      <p:sp>
-        <p:nvSpPr>
-          <p:cNvPr id="10" name="">
-            <a:extLst>
-              <a:ext uri="{FF2B5EF4-FFF2-40B4-BE49-F238E27FC236}">
-                <a16:creationId xmlns:a16="http://schemas.microsoft.com/office/drawing/2014/main" id="{92A462A0-899F-4C1D-9C7C-25D4058895FB}"/>
-              </a:ext>
-            </a:extLst>
-          </p:cNvPr>
-          <p:cNvSpPr>
-            <a:spLocks noGrp="1"/>
-          </p:cNvSpPr>
-          <p:nvPr/>
-        </p:nvSpPr>
-        <p:spPr>
-          <a:xfrm>
-            <a:off x="5953125" y="2428875"/>
-            <a:ext cx="38100" cy="2952750"/>
+                <a16:creationId xmlns:a16="http://schemas.microsoft.com/office/drawing/2014/main" id="{400BA3D1-834E-4646-9683-131ABCF808E2}"/>
+              </a:ext>
+            </a:extLst>
+          </p:cNvPr>
+          <p:cNvSpPr>
+            <a:spLocks noGrp="1"/>
+          </p:cNvSpPr>
+          <p:nvPr/>
+        </p:nvSpPr>
+        <p:spPr>
+          <a:xfrm>
+            <a:off x="609600" y="2333625"/>
+            <a:ext cx="47625" cy="1657350"/>
           </a:xfrm>
           <a:prstGeom prst="rect">
             <a:avLst/>
           </a:prstGeom>
           <a:solidFill>
-            <a:srgbClr val="D6D0C7"/>
+            <a:srgbClr val="E63946"/>
           </a:solidFill>
-          <a:ln w="9525">
-            <a:solidFill>
-              <a:srgbClr val="D6D0C7"/>
-            </a:solidFill>
+          <a:ln w="0">
+            <a:noFill/>
           </a:ln>
         </p:spPr>
         <p:txBody>
@@ -13117,58 +12976,198 @@
       </p:sp>
       <p:sp>
         <p:nvSpPr>
+          <p:cNvPr id="9" name="">
+            <a:extLst>
+              <a:ext uri="{FF2B5EF4-FFF2-40B4-BE49-F238E27FC236}">
+                <a16:creationId xmlns:a16="http://schemas.microsoft.com/office/drawing/2014/main" id="{066F096E-6BFD-4B19-BFFC-76160372441F}"/>
+              </a:ext>
+            </a:extLst>
+          </p:cNvPr>
+          <p:cNvSpPr>
+            <a:spLocks noGrp="1"/>
+          </p:cNvSpPr>
+          <p:nvPr/>
+        </p:nvSpPr>
+        <p:spPr>
+          <a:xfrm>
+            <a:off x="819150" y="2505075"/>
+            <a:ext cx="647700" cy="428625"/>
+          </a:xfrm>
+          <a:prstGeom prst="rect">
+            <a:avLst/>
+          </a:prstGeom>
+          <a:noFill/>
+          <a:ln w="0">
+            <a:noFill/>
+          </a:ln>
+        </p:spPr>
+        <p:txBody>
+          <a:bodyPr>
+            <a:noAutofit/>
+          </a:bodyPr>
+          <a:lstStyle/>
+          <a:p>
+            <a:pPr>
+              <a:buNone/>
+              <a:defRPr sz="2025" b="1">
+                <a:solidFill>
+                  <a:srgbClr val="E63946"/>
+                </a:solidFill>
+                <a:latin typeface="PingFang TC"/>
+                <a:ea typeface="PingFang TC"/>
+                <a:cs typeface="PingFang TC"/>
+              </a:defRPr>
+            </a:pPr>
+            <a:r>
+              <a:rPr sz="2025" b="1">
+                <a:solidFill>
+                  <a:srgbClr val="E63946"/>
+                </a:solidFill>
+                <a:latin typeface="PingFang TC"/>
+                <a:ea typeface="PingFang TC"/>
+                <a:cs typeface="PingFang TC"/>
+              </a:rPr>
+              <a:t>01</a:t>
+            </a:r>
+          </a:p>
+        </p:txBody>
+      </p:sp>
+      <p:sp>
+        <p:nvSpPr>
+          <p:cNvPr id="10" name="">
+            <a:extLst>
+              <a:ext uri="{FF2B5EF4-FFF2-40B4-BE49-F238E27FC236}">
+                <a16:creationId xmlns:a16="http://schemas.microsoft.com/office/drawing/2014/main" id="{9B2C30A9-4597-48FB-9C72-464F020DDEFA}"/>
+              </a:ext>
+            </a:extLst>
+          </p:cNvPr>
+          <p:cNvSpPr>
+            <a:spLocks noGrp="1"/>
+          </p:cNvSpPr>
+          <p:nvPr/>
+        </p:nvSpPr>
+        <p:spPr>
+          <a:xfrm>
+            <a:off x="1524000" y="2505075"/>
+            <a:ext cx="4191000" cy="457200"/>
+          </a:xfrm>
+          <a:prstGeom prst="rect">
+            <a:avLst/>
+          </a:prstGeom>
+          <a:noFill/>
+          <a:ln w="0">
+            <a:noFill/>
+          </a:ln>
+        </p:spPr>
+        <p:txBody>
+          <a:bodyPr>
+            <a:noAutofit/>
+          </a:bodyPr>
+          <a:lstStyle/>
+          <a:p>
+            <a:pPr>
+              <a:buNone/>
+              <a:defRPr sz="2175" b="1">
+                <a:solidFill>
+                  <a:srgbClr val="121212"/>
+                </a:solidFill>
+                <a:latin typeface="PingFang TC"/>
+                <a:ea typeface="PingFang TC"/>
+                <a:cs typeface="PingFang TC"/>
+              </a:defRPr>
+            </a:pPr>
+            <a:r>
+              <a:rPr sz="2175" b="1">
+                <a:solidFill>
+                  <a:srgbClr val="121212"/>
+                </a:solidFill>
+                <a:latin typeface="PingFang TC"/>
+                <a:ea typeface="PingFang TC"/>
+                <a:cs typeface="PingFang TC"/>
+              </a:rPr>
+              <a:t>一句話</a:t>
+            </a:r>
+          </a:p>
+        </p:txBody>
+      </p:sp>
+      <p:sp>
+        <p:nvSpPr>
           <p:cNvPr id="11" name="">
             <a:extLst>
               <a:ext uri="{FF2B5EF4-FFF2-40B4-BE49-F238E27FC236}">
-                <a16:creationId xmlns:a16="http://schemas.microsoft.com/office/drawing/2014/main" id="{B13E5783-0243-4D15-B1DC-FFBD06FE9F16}"/>
-              </a:ext>
-            </a:extLst>
-          </p:cNvPr>
-          <p:cNvSpPr>
-            <a:spLocks noGrp="1"/>
-          </p:cNvSpPr>
-          <p:nvPr/>
-        </p:nvSpPr>
-        <p:spPr>
-          <a:xfrm>
-            <a:off x="6572250" y="2428875"/>
-            <a:ext cx="4476750" cy="457200"/>
-          </a:xfrm>
-          <a:prstGeom prst="rect">
-            <a:avLst/>
-          </a:prstGeom>
-          <a:noFill/>
-          <a:ln w="0">
-            <a:noFill/>
-          </a:ln>
-        </p:spPr>
-        <p:txBody>
-          <a:bodyPr anchor="ctr">
-            <a:normAutofit fontScale="100000"/>
-          </a:bodyPr>
-          <a:lstStyle/>
-          <a:p>
-            <a:pPr algn="l">
-              <a:buNone/>
-              <a:defRPr sz="2325" b="1">
-                <a:solidFill>
-                  <a:srgbClr val="14395B"/>
-                </a:solidFill>
-                <a:latin typeface="PingFang TC"/>
-                <a:ea typeface="PingFang TC"/>
-                <a:cs typeface="PingFang TC"/>
-              </a:defRPr>
-            </a:pPr>
-            <a:r>
-              <a:rPr sz="2325" b="1">
-                <a:solidFill>
-                  <a:srgbClr val="14395B"/>
-                </a:solidFill>
-                <a:latin typeface="PingFang TC"/>
-                <a:ea typeface="PingFang TC"/>
-                <a:cs typeface="PingFang TC"/>
-              </a:rPr>
-              <a:t>台灣的機會（推論）：上層應用</a:t>
+                <a16:creationId xmlns:a16="http://schemas.microsoft.com/office/drawing/2014/main" id="{149FFC90-3B89-4B88-A159-F50282024610}"/>
+              </a:ext>
+            </a:extLst>
+          </p:cNvPr>
+          <p:cNvSpPr>
+            <a:spLocks noGrp="1"/>
+          </p:cNvSpPr>
+          <p:nvPr/>
+        </p:nvSpPr>
+        <p:spPr>
+          <a:xfrm>
+            <a:off x="838200" y="3105150"/>
+            <a:ext cx="4867275" cy="514350"/>
+          </a:xfrm>
+          <a:prstGeom prst="rect">
+            <a:avLst/>
+          </a:prstGeom>
+          <a:noFill/>
+          <a:ln w="0">
+            <a:noFill/>
+          </a:ln>
+        </p:spPr>
+        <p:txBody>
+          <a:bodyPr>
+            <a:noAutofit/>
+          </a:bodyPr>
+          <a:lstStyle/>
+          <a:p>
+            <a:pPr>
+              <a:buNone/>
+              <a:defRPr sz="1650" b="0">
+                <a:solidFill>
+                  <a:srgbClr val="626262"/>
+                </a:solidFill>
+                <a:latin typeface="PingFang TC"/>
+                <a:ea typeface="PingFang TC"/>
+                <a:cs typeface="PingFang TC"/>
+              </a:defRPr>
+            </a:pPr>
+            <a:r>
+              <a:rPr sz="1650" b="0">
+                <a:solidFill>
+                  <a:srgbClr val="626262"/>
+                </a:solidFill>
+                <a:latin typeface="PingFang TC"/>
+                <a:ea typeface="PingFang TC"/>
+                <a:cs typeface="PingFang TC"/>
+              </a:rPr>
+              <a:t>讓 AI 看懂並模擬真實世界：</a:t>
+            </a:r>
+          </a:p>
+          <a:p>
+            <a:pPr>
+              <a:buNone/>
+              <a:defRPr sz="1650" b="0">
+                <a:solidFill>
+                  <a:srgbClr val="626262"/>
+                </a:solidFill>
+                <a:latin typeface="PingFang TC"/>
+                <a:ea typeface="PingFang TC"/>
+                <a:cs typeface="PingFang TC"/>
+              </a:defRPr>
+            </a:pPr>
+            <a:r>
+              <a:rPr sz="1650" b="0">
+                <a:solidFill>
+                  <a:srgbClr val="626262"/>
+                </a:solidFill>
+                <a:latin typeface="PingFang TC"/>
+                <a:ea typeface="PingFang TC"/>
+                <a:cs typeface="PingFang TC"/>
+              </a:rPr>
+              <a:t>空間、物體、會怎麼移動和碰撞。</a:t>
             </a:r>
           </a:p>
         </p:txBody>
@@ -13178,143 +13177,909 @@
           <p:cNvPr id="12" name="">
             <a:extLst>
               <a:ext uri="{FF2B5EF4-FFF2-40B4-BE49-F238E27FC236}">
-                <a16:creationId xmlns:a16="http://schemas.microsoft.com/office/drawing/2014/main" id="{204B0874-5189-41D9-9F8F-D809113B0CB0}"/>
-              </a:ext>
-            </a:extLst>
-          </p:cNvPr>
-          <p:cNvSpPr>
-            <a:spLocks noGrp="1"/>
-          </p:cNvSpPr>
-          <p:nvPr/>
-        </p:nvSpPr>
-        <p:spPr>
-          <a:xfrm>
-            <a:off x="6572250" y="3000375"/>
-            <a:ext cx="4762500" cy="2238375"/>
-          </a:xfrm>
-          <a:prstGeom prst="rect">
-            <a:avLst/>
-          </a:prstGeom>
-          <a:noFill/>
-          <a:ln w="0">
-            <a:noFill/>
-          </a:ln>
-        </p:spPr>
-        <p:txBody>
-          <a:bodyPr anchor="ctr">
-            <a:normAutofit fontScale="100000"/>
-          </a:bodyPr>
-          <a:lstStyle/>
-          <a:p>
+                <a16:creationId xmlns:a16="http://schemas.microsoft.com/office/drawing/2014/main" id="{C0389E3D-C56E-4707-A449-0AC32CA578CA}"/>
+              </a:ext>
+            </a:extLst>
+          </p:cNvPr>
+          <p:cNvSpPr>
+            <a:spLocks noGrp="1"/>
+          </p:cNvSpPr>
+          <p:nvPr/>
+        </p:nvSpPr>
+        <p:spPr>
+          <a:xfrm>
+            <a:off x="838200" y="3714750"/>
+            <a:ext cx="4905375" cy="19050"/>
+          </a:xfrm>
+          <a:prstGeom prst="rect">
+            <a:avLst/>
+          </a:prstGeom>
+          <a:solidFill>
+            <a:srgbClr val="D9D5CF"/>
+          </a:solidFill>
+          <a:ln w="0">
+            <a:noFill/>
+          </a:ln>
+        </p:spPr>
+        <p:txBody>
+          <a:bodyPr/>
+          <a:p/>
+        </p:txBody>
+      </p:sp>
+      <p:sp>
+        <p:nvSpPr>
+          <p:cNvPr id="13" name="">
+            <a:extLst>
+              <a:ext uri="{FF2B5EF4-FFF2-40B4-BE49-F238E27FC236}">
+                <a16:creationId xmlns:a16="http://schemas.microsoft.com/office/drawing/2014/main" id="{CE170350-F5E0-44DF-A0AD-00F684A3D9DC}"/>
+              </a:ext>
+            </a:extLst>
+          </p:cNvPr>
+          <p:cNvSpPr>
+            <a:spLocks noGrp="1"/>
+          </p:cNvSpPr>
+          <p:nvPr/>
+        </p:nvSpPr>
+        <p:spPr>
+          <a:xfrm>
+            <a:off x="6210300" y="2333625"/>
+            <a:ext cx="5372100" cy="1657350"/>
+          </a:xfrm>
+          <a:prstGeom prst="rect">
+            <a:avLst/>
+          </a:prstGeom>
+          <a:solidFill>
+            <a:srgbClr val="FFFFFF"/>
+          </a:solidFill>
+          <a:ln w="0">
+            <a:noFill/>
+          </a:ln>
+        </p:spPr>
+        <p:txBody>
+          <a:bodyPr/>
+          <a:p/>
+        </p:txBody>
+      </p:sp>
+      <p:sp>
+        <p:nvSpPr>
+          <p:cNvPr id="14" name="">
+            <a:extLst>
+              <a:ext uri="{FF2B5EF4-FFF2-40B4-BE49-F238E27FC236}">
+                <a16:creationId xmlns:a16="http://schemas.microsoft.com/office/drawing/2014/main" id="{AD3B1000-E290-49F8-9D0E-0C06A872F305}"/>
+              </a:ext>
+            </a:extLst>
+          </p:cNvPr>
+          <p:cNvSpPr>
+            <a:spLocks noGrp="1"/>
+          </p:cNvSpPr>
+          <p:nvPr/>
+        </p:nvSpPr>
+        <p:spPr>
+          <a:xfrm>
+            <a:off x="6210300" y="2333625"/>
+            <a:ext cx="47625" cy="1657350"/>
+          </a:xfrm>
+          <a:prstGeom prst="rect">
+            <a:avLst/>
+          </a:prstGeom>
+          <a:solidFill>
+            <a:srgbClr val="E63946"/>
+          </a:solidFill>
+          <a:ln w="0">
+            <a:noFill/>
+          </a:ln>
+        </p:spPr>
+        <p:txBody>
+          <a:bodyPr/>
+          <a:p/>
+        </p:txBody>
+      </p:sp>
+      <p:sp>
+        <p:nvSpPr>
+          <p:cNvPr id="15" name="">
+            <a:extLst>
+              <a:ext uri="{FF2B5EF4-FFF2-40B4-BE49-F238E27FC236}">
+                <a16:creationId xmlns:a16="http://schemas.microsoft.com/office/drawing/2014/main" id="{639B8976-571E-4A1C-849D-D2C3FF78EED3}"/>
+              </a:ext>
+            </a:extLst>
+          </p:cNvPr>
+          <p:cNvSpPr>
+            <a:spLocks noGrp="1"/>
+          </p:cNvSpPr>
+          <p:nvPr/>
+        </p:nvSpPr>
+        <p:spPr>
+          <a:xfrm>
+            <a:off x="6419850" y="2505075"/>
+            <a:ext cx="647700" cy="428625"/>
+          </a:xfrm>
+          <a:prstGeom prst="rect">
+            <a:avLst/>
+          </a:prstGeom>
+          <a:noFill/>
+          <a:ln w="0">
+            <a:noFill/>
+          </a:ln>
+        </p:spPr>
+        <p:txBody>
+          <a:bodyPr>
+            <a:noAutofit/>
+          </a:bodyPr>
+          <a:lstStyle/>
+          <a:p>
+            <a:pPr>
+              <a:buNone/>
+              <a:defRPr sz="2025" b="1">
+                <a:solidFill>
+                  <a:srgbClr val="E63946"/>
+                </a:solidFill>
+                <a:latin typeface="PingFang TC"/>
+                <a:ea typeface="PingFang TC"/>
+                <a:cs typeface="PingFang TC"/>
+              </a:defRPr>
+            </a:pPr>
+            <a:r>
+              <a:rPr sz="2025" b="1">
+                <a:solidFill>
+                  <a:srgbClr val="E63946"/>
+                </a:solidFill>
+                <a:latin typeface="PingFang TC"/>
+                <a:ea typeface="PingFang TC"/>
+                <a:cs typeface="PingFang TC"/>
+              </a:rPr>
+              <a:t>02</a:t>
+            </a:r>
+          </a:p>
+        </p:txBody>
+      </p:sp>
+      <p:sp>
+        <p:nvSpPr>
+          <p:cNvPr id="16" name="">
+            <a:extLst>
+              <a:ext uri="{FF2B5EF4-FFF2-40B4-BE49-F238E27FC236}">
+                <a16:creationId xmlns:a16="http://schemas.microsoft.com/office/drawing/2014/main" id="{EBA0E952-AD26-4E31-89D8-0E17D9EBCC49}"/>
+              </a:ext>
+            </a:extLst>
+          </p:cNvPr>
+          <p:cNvSpPr>
+            <a:spLocks noGrp="1"/>
+          </p:cNvSpPr>
+          <p:nvPr/>
+        </p:nvSpPr>
+        <p:spPr>
+          <a:xfrm>
+            <a:off x="7124700" y="2505075"/>
+            <a:ext cx="4191000" cy="457200"/>
+          </a:xfrm>
+          <a:prstGeom prst="rect">
+            <a:avLst/>
+          </a:prstGeom>
+          <a:noFill/>
+          <a:ln w="0">
+            <a:noFill/>
+          </a:ln>
+        </p:spPr>
+        <p:txBody>
+          <a:bodyPr>
+            <a:noAutofit/>
+          </a:bodyPr>
+          <a:lstStyle/>
+          <a:p>
+            <a:pPr>
+              <a:buNone/>
+              <a:defRPr sz="2175" b="1">
+                <a:solidFill>
+                  <a:srgbClr val="121212"/>
+                </a:solidFill>
+                <a:latin typeface="PingFang TC"/>
+                <a:ea typeface="PingFang TC"/>
+                <a:cs typeface="PingFang TC"/>
+              </a:defRPr>
+            </a:pPr>
+            <a:r>
+              <a:rPr sz="2175" b="1">
+                <a:solidFill>
+                  <a:srgbClr val="121212"/>
+                </a:solidFill>
+                <a:latin typeface="PingFang TC"/>
+                <a:ea typeface="PingFang TC"/>
+                <a:cs typeface="PingFang TC"/>
+              </a:rPr>
+              <a:t>跟聊天機器人差在哪</a:t>
+            </a:r>
+          </a:p>
+        </p:txBody>
+      </p:sp>
+      <p:sp>
+        <p:nvSpPr>
+          <p:cNvPr id="17" name="">
+            <a:extLst>
+              <a:ext uri="{FF2B5EF4-FFF2-40B4-BE49-F238E27FC236}">
+                <a16:creationId xmlns:a16="http://schemas.microsoft.com/office/drawing/2014/main" id="{27A6A621-6AE2-4020-9522-1EFCDF0C4D22}"/>
+              </a:ext>
+            </a:extLst>
+          </p:cNvPr>
+          <p:cNvSpPr>
+            <a:spLocks noGrp="1"/>
+          </p:cNvSpPr>
+          <p:nvPr/>
+        </p:nvSpPr>
+        <p:spPr>
+          <a:xfrm>
+            <a:off x="6438900" y="3105150"/>
+            <a:ext cx="4867275" cy="514350"/>
+          </a:xfrm>
+          <a:prstGeom prst="rect">
+            <a:avLst/>
+          </a:prstGeom>
+          <a:noFill/>
+          <a:ln w="0">
+            <a:noFill/>
+          </a:ln>
+        </p:spPr>
+        <p:txBody>
+          <a:bodyPr>
+            <a:noAutofit/>
+          </a:bodyPr>
+          <a:lstStyle/>
+          <a:p>
+            <a:pPr>
+              <a:buNone/>
+              <a:defRPr sz="1650" b="0">
+                <a:solidFill>
+                  <a:srgbClr val="626262"/>
+                </a:solidFill>
+                <a:latin typeface="PingFang TC"/>
+                <a:ea typeface="PingFang TC"/>
+                <a:cs typeface="PingFang TC"/>
+              </a:defRPr>
+            </a:pPr>
             <a:r>
               <a:rPr sz="1650" b="0">
                 <a:solidFill>
+                  <a:srgbClr val="626262"/>
+                </a:solidFill>
+                <a:latin typeface="PingFang TC"/>
+                <a:ea typeface="PingFang TC"/>
+                <a:cs typeface="PingFang TC"/>
+              </a:rPr>
+              <a:t>ChatGPT、Claude 讀文字、回文字；</a:t>
+            </a:r>
+          </a:p>
+          <a:p>
+            <a:pPr>
+              <a:buNone/>
+              <a:defRPr sz="1650" b="0">
+                <a:solidFill>
+                  <a:srgbClr val="626262"/>
+                </a:solidFill>
+                <a:latin typeface="PingFang TC"/>
+                <a:ea typeface="PingFang TC"/>
+                <a:cs typeface="PingFang TC"/>
+              </a:defRPr>
+            </a:pPr>
+            <a:r>
+              <a:rPr sz="1650" b="0">
+                <a:solidFill>
+                  <a:srgbClr val="626262"/>
+                </a:solidFill>
+                <a:latin typeface="PingFang TC"/>
+                <a:ea typeface="PingFang TC"/>
+                <a:cs typeface="PingFang TC"/>
+              </a:rPr>
+              <a:t>世界模型「看」影像、「想像」接下來會發生什麼。</a:t>
+            </a:r>
+          </a:p>
+        </p:txBody>
+      </p:sp>
+      <p:sp>
+        <p:nvSpPr>
+          <p:cNvPr id="18" name="">
+            <a:extLst>
+              <a:ext uri="{FF2B5EF4-FFF2-40B4-BE49-F238E27FC236}">
+                <a16:creationId xmlns:a16="http://schemas.microsoft.com/office/drawing/2014/main" id="{3D5E9FEA-7654-4EFA-8998-C77A9A4BA516}"/>
+              </a:ext>
+            </a:extLst>
+          </p:cNvPr>
+          <p:cNvSpPr>
+            <a:spLocks noGrp="1"/>
+          </p:cNvSpPr>
+          <p:nvPr/>
+        </p:nvSpPr>
+        <p:spPr>
+          <a:xfrm>
+            <a:off x="6438900" y="3714750"/>
+            <a:ext cx="4905375" cy="19050"/>
+          </a:xfrm>
+          <a:prstGeom prst="rect">
+            <a:avLst/>
+          </a:prstGeom>
+          <a:solidFill>
+            <a:srgbClr val="D9D5CF"/>
+          </a:solidFill>
+          <a:ln w="0">
+            <a:noFill/>
+          </a:ln>
+        </p:spPr>
+        <p:txBody>
+          <a:bodyPr/>
+          <a:p/>
+        </p:txBody>
+      </p:sp>
+      <p:sp>
+        <p:nvSpPr>
+          <p:cNvPr id="19" name="">
+            <a:extLst>
+              <a:ext uri="{FF2B5EF4-FFF2-40B4-BE49-F238E27FC236}">
+                <a16:creationId xmlns:a16="http://schemas.microsoft.com/office/drawing/2014/main" id="{E8F8ED3D-E01B-4FE2-8DDB-B2AFB41A9CEE}"/>
+              </a:ext>
+            </a:extLst>
+          </p:cNvPr>
+          <p:cNvSpPr>
+            <a:spLocks noGrp="1"/>
+          </p:cNvSpPr>
+          <p:nvPr/>
+        </p:nvSpPr>
+        <p:spPr>
+          <a:xfrm>
+            <a:off x="609600" y="4248150"/>
+            <a:ext cx="5372100" cy="1657350"/>
+          </a:xfrm>
+          <a:prstGeom prst="rect">
+            <a:avLst/>
+          </a:prstGeom>
+          <a:solidFill>
+            <a:srgbClr val="FFFFFF"/>
+          </a:solidFill>
+          <a:ln w="0">
+            <a:noFill/>
+          </a:ln>
+        </p:spPr>
+        <p:txBody>
+          <a:bodyPr/>
+          <a:p/>
+        </p:txBody>
+      </p:sp>
+      <p:sp>
+        <p:nvSpPr>
+          <p:cNvPr id="20" name="">
+            <a:extLst>
+              <a:ext uri="{FF2B5EF4-FFF2-40B4-BE49-F238E27FC236}">
+                <a16:creationId xmlns:a16="http://schemas.microsoft.com/office/drawing/2014/main" id="{4AB9F765-1955-4D41-9C88-83F376762D9E}"/>
+              </a:ext>
+            </a:extLst>
+          </p:cNvPr>
+          <p:cNvSpPr>
+            <a:spLocks noGrp="1"/>
+          </p:cNvSpPr>
+          <p:nvPr/>
+        </p:nvSpPr>
+        <p:spPr>
+          <a:xfrm>
+            <a:off x="609600" y="4248150"/>
+            <a:ext cx="47625" cy="1657350"/>
+          </a:xfrm>
+          <a:prstGeom prst="rect">
+            <a:avLst/>
+          </a:prstGeom>
+          <a:solidFill>
+            <a:srgbClr val="E63946"/>
+          </a:solidFill>
+          <a:ln w="0">
+            <a:noFill/>
+          </a:ln>
+        </p:spPr>
+        <p:txBody>
+          <a:bodyPr/>
+          <a:p/>
+        </p:txBody>
+      </p:sp>
+      <p:sp>
+        <p:nvSpPr>
+          <p:cNvPr id="21" name="">
+            <a:extLst>
+              <a:ext uri="{FF2B5EF4-FFF2-40B4-BE49-F238E27FC236}">
+                <a16:creationId xmlns:a16="http://schemas.microsoft.com/office/drawing/2014/main" id="{45D78E31-998E-4BFA-A554-D824FA379782}"/>
+              </a:ext>
+            </a:extLst>
+          </p:cNvPr>
+          <p:cNvSpPr>
+            <a:spLocks noGrp="1"/>
+          </p:cNvSpPr>
+          <p:nvPr/>
+        </p:nvSpPr>
+        <p:spPr>
+          <a:xfrm>
+            <a:off x="819150" y="4419600"/>
+            <a:ext cx="647700" cy="428625"/>
+          </a:xfrm>
+          <a:prstGeom prst="rect">
+            <a:avLst/>
+          </a:prstGeom>
+          <a:noFill/>
+          <a:ln w="0">
+            <a:noFill/>
+          </a:ln>
+        </p:spPr>
+        <p:txBody>
+          <a:bodyPr>
+            <a:noAutofit/>
+          </a:bodyPr>
+          <a:lstStyle/>
+          <a:p>
+            <a:pPr>
+              <a:buNone/>
+              <a:defRPr sz="2025" b="1">
+                <a:solidFill>
+                  <a:srgbClr val="E63946"/>
+                </a:solidFill>
+                <a:latin typeface="PingFang TC"/>
+                <a:ea typeface="PingFang TC"/>
+                <a:cs typeface="PingFang TC"/>
+              </a:defRPr>
+            </a:pPr>
+            <a:r>
+              <a:rPr sz="2025" b="1">
+                <a:solidFill>
+                  <a:srgbClr val="E63946"/>
+                </a:solidFill>
+                <a:latin typeface="PingFang TC"/>
+                <a:ea typeface="PingFang TC"/>
+                <a:cs typeface="PingFang TC"/>
+              </a:rPr>
+              <a:t>03</a:t>
+            </a:r>
+          </a:p>
+        </p:txBody>
+      </p:sp>
+      <p:sp>
+        <p:nvSpPr>
+          <p:cNvPr id="22" name="">
+            <a:extLst>
+              <a:ext uri="{FF2B5EF4-FFF2-40B4-BE49-F238E27FC236}">
+                <a16:creationId xmlns:a16="http://schemas.microsoft.com/office/drawing/2014/main" id="{DC700C09-5DC7-4A22-AA97-AC16015F50CC}"/>
+              </a:ext>
+            </a:extLst>
+          </p:cNvPr>
+          <p:cNvSpPr>
+            <a:spLocks noGrp="1"/>
+          </p:cNvSpPr>
+          <p:nvPr/>
+        </p:nvSpPr>
+        <p:spPr>
+          <a:xfrm>
+            <a:off x="1524000" y="4419600"/>
+            <a:ext cx="4191000" cy="457200"/>
+          </a:xfrm>
+          <a:prstGeom prst="rect">
+            <a:avLst/>
+          </a:prstGeom>
+          <a:noFill/>
+          <a:ln w="0">
+            <a:noFill/>
+          </a:ln>
+        </p:spPr>
+        <p:txBody>
+          <a:bodyPr>
+            <a:noAutofit/>
+          </a:bodyPr>
+          <a:lstStyle/>
+          <a:p>
+            <a:pPr>
+              <a:buNone/>
+              <a:defRPr sz="2175" b="1">
+                <a:solidFill>
                   <a:srgbClr val="121212"/>
                 </a:solidFill>
                 <a:latin typeface="PingFang TC"/>
                 <a:ea typeface="PingFang TC"/>
                 <a:cs typeface="PingFang TC"/>
-              </a:rPr>
-              <a:t>• 中文、在地化的垂直 Agent</a:t>
-            </a:r>
-          </a:p>
-          <a:p>
+              </a:defRPr>
+            </a:pPr>
+            <a:r>
+              <a:rPr sz="2175" b="1">
+                <a:solidFill>
+                  <a:srgbClr val="121212"/>
+                </a:solidFill>
+                <a:latin typeface="PingFang TC"/>
+                <a:ea typeface="PingFang TC"/>
+                <a:cs typeface="PingFang TC"/>
+              </a:rPr>
+              <a:t>用在哪裡</a:t>
+            </a:r>
+          </a:p>
+        </p:txBody>
+      </p:sp>
+      <p:sp>
+        <p:nvSpPr>
+          <p:cNvPr id="23" name="">
+            <a:extLst>
+              <a:ext uri="{FF2B5EF4-FFF2-40B4-BE49-F238E27FC236}">
+                <a16:creationId xmlns:a16="http://schemas.microsoft.com/office/drawing/2014/main" id="{8668167D-14C4-4575-B53E-7AABB13896ED}"/>
+              </a:ext>
+            </a:extLst>
+          </p:cNvPr>
+          <p:cNvSpPr>
+            <a:spLocks noGrp="1"/>
+          </p:cNvSpPr>
+          <p:nvPr/>
+        </p:nvSpPr>
+        <p:spPr>
+          <a:xfrm>
+            <a:off x="838200" y="5019675"/>
+            <a:ext cx="4867275" cy="514350"/>
+          </a:xfrm>
+          <a:prstGeom prst="rect">
+            <a:avLst/>
+          </a:prstGeom>
+          <a:noFill/>
+          <a:ln w="0">
+            <a:noFill/>
+          </a:ln>
+        </p:spPr>
+        <p:txBody>
+          <a:bodyPr>
+            <a:noAutofit/>
+          </a:bodyPr>
+          <a:lstStyle/>
+          <a:p>
+            <a:pPr>
+              <a:buNone/>
+              <a:defRPr sz="1650" b="0">
+                <a:solidFill>
+                  <a:srgbClr val="626262"/>
+                </a:solidFill>
+                <a:latin typeface="PingFang TC"/>
+                <a:ea typeface="PingFang TC"/>
+                <a:cs typeface="PingFang TC"/>
+              </a:defRPr>
+            </a:pPr>
             <a:r>
               <a:rPr sz="1650" b="0">
                 <a:solidFill>
+                  <a:srgbClr val="626262"/>
+                </a:solidFill>
+                <a:latin typeface="PingFang TC"/>
+                <a:ea typeface="PingFang TC"/>
+                <a:cs typeface="PingFang TC"/>
+              </a:rPr>
+              <a:t>做 3D 場景和遊戲、</a:t>
+            </a:r>
+          </a:p>
+          <a:p>
+            <a:pPr>
+              <a:buNone/>
+              <a:defRPr sz="1650" b="0">
+                <a:solidFill>
+                  <a:srgbClr val="626262"/>
+                </a:solidFill>
+                <a:latin typeface="PingFang TC"/>
+                <a:ea typeface="PingFang TC"/>
+                <a:cs typeface="PingFang TC"/>
+              </a:defRPr>
+            </a:pPr>
+            <a:r>
+              <a:rPr sz="1650" b="0">
+                <a:solidFill>
+                  <a:srgbClr val="626262"/>
+                </a:solidFill>
+                <a:latin typeface="PingFang TC"/>
+                <a:ea typeface="PingFang TC"/>
+                <a:cs typeface="PingFang TC"/>
+              </a:rPr>
+              <a:t>讓機器人和自駕車先在模擬世界裡練習。</a:t>
+            </a:r>
+          </a:p>
+        </p:txBody>
+      </p:sp>
+      <p:sp>
+        <p:nvSpPr>
+          <p:cNvPr id="24" name="">
+            <a:extLst>
+              <a:ext uri="{FF2B5EF4-FFF2-40B4-BE49-F238E27FC236}">
+                <a16:creationId xmlns:a16="http://schemas.microsoft.com/office/drawing/2014/main" id="{50382CE4-25B9-4F93-95EA-C2893B5516BB}"/>
+              </a:ext>
+            </a:extLst>
+          </p:cNvPr>
+          <p:cNvSpPr>
+            <a:spLocks noGrp="1"/>
+          </p:cNvSpPr>
+          <p:nvPr/>
+        </p:nvSpPr>
+        <p:spPr>
+          <a:xfrm>
+            <a:off x="838200" y="5629275"/>
+            <a:ext cx="4905375" cy="19050"/>
+          </a:xfrm>
+          <a:prstGeom prst="rect">
+            <a:avLst/>
+          </a:prstGeom>
+          <a:solidFill>
+            <a:srgbClr val="D9D5CF"/>
+          </a:solidFill>
+          <a:ln w="0">
+            <a:noFill/>
+          </a:ln>
+        </p:spPr>
+        <p:txBody>
+          <a:bodyPr/>
+          <a:p/>
+        </p:txBody>
+      </p:sp>
+      <p:sp>
+        <p:nvSpPr>
+          <p:cNvPr id="25" name="">
+            <a:extLst>
+              <a:ext uri="{FF2B5EF4-FFF2-40B4-BE49-F238E27FC236}">
+                <a16:creationId xmlns:a16="http://schemas.microsoft.com/office/drawing/2014/main" id="{0554D802-4E35-4493-A040-EBB9030F3F4E}"/>
+              </a:ext>
+            </a:extLst>
+          </p:cNvPr>
+          <p:cNvSpPr>
+            <a:spLocks noGrp="1"/>
+          </p:cNvSpPr>
+          <p:nvPr/>
+        </p:nvSpPr>
+        <p:spPr>
+          <a:xfrm>
+            <a:off x="6210300" y="4248150"/>
+            <a:ext cx="5372100" cy="1657350"/>
+          </a:xfrm>
+          <a:prstGeom prst="rect">
+            <a:avLst/>
+          </a:prstGeom>
+          <a:solidFill>
+            <a:srgbClr val="FFFFFF"/>
+          </a:solidFill>
+          <a:ln w="0">
+            <a:noFill/>
+          </a:ln>
+        </p:spPr>
+        <p:txBody>
+          <a:bodyPr/>
+          <a:p/>
+        </p:txBody>
+      </p:sp>
+      <p:sp>
+        <p:nvSpPr>
+          <p:cNvPr id="26" name="">
+            <a:extLst>
+              <a:ext uri="{FF2B5EF4-FFF2-40B4-BE49-F238E27FC236}">
+                <a16:creationId xmlns:a16="http://schemas.microsoft.com/office/drawing/2014/main" id="{42E7A137-3813-409A-95BC-2CF6A7879627}"/>
+              </a:ext>
+            </a:extLst>
+          </p:cNvPr>
+          <p:cNvSpPr>
+            <a:spLocks noGrp="1"/>
+          </p:cNvSpPr>
+          <p:nvPr/>
+        </p:nvSpPr>
+        <p:spPr>
+          <a:xfrm>
+            <a:off x="6210300" y="4248150"/>
+            <a:ext cx="47625" cy="1657350"/>
+          </a:xfrm>
+          <a:prstGeom prst="rect">
+            <a:avLst/>
+          </a:prstGeom>
+          <a:solidFill>
+            <a:srgbClr val="E63946"/>
+          </a:solidFill>
+          <a:ln w="0">
+            <a:noFill/>
+          </a:ln>
+        </p:spPr>
+        <p:txBody>
+          <a:bodyPr/>
+          <a:p/>
+        </p:txBody>
+      </p:sp>
+      <p:sp>
+        <p:nvSpPr>
+          <p:cNvPr id="27" name="">
+            <a:extLst>
+              <a:ext uri="{FF2B5EF4-FFF2-40B4-BE49-F238E27FC236}">
+                <a16:creationId xmlns:a16="http://schemas.microsoft.com/office/drawing/2014/main" id="{D015D6CB-B4CB-48C3-BF11-5D852A8D654C}"/>
+              </a:ext>
+            </a:extLst>
+          </p:cNvPr>
+          <p:cNvSpPr>
+            <a:spLocks noGrp="1"/>
+          </p:cNvSpPr>
+          <p:nvPr/>
+        </p:nvSpPr>
+        <p:spPr>
+          <a:xfrm>
+            <a:off x="6419850" y="4419600"/>
+            <a:ext cx="647700" cy="428625"/>
+          </a:xfrm>
+          <a:prstGeom prst="rect">
+            <a:avLst/>
+          </a:prstGeom>
+          <a:noFill/>
+          <a:ln w="0">
+            <a:noFill/>
+          </a:ln>
+        </p:spPr>
+        <p:txBody>
+          <a:bodyPr>
+            <a:noAutofit/>
+          </a:bodyPr>
+          <a:lstStyle/>
+          <a:p>
+            <a:pPr>
+              <a:buNone/>
+              <a:defRPr sz="2025" b="1">
+                <a:solidFill>
+                  <a:srgbClr val="E63946"/>
+                </a:solidFill>
+                <a:latin typeface="PingFang TC"/>
+                <a:ea typeface="PingFang TC"/>
+                <a:cs typeface="PingFang TC"/>
+              </a:defRPr>
+            </a:pPr>
+            <a:r>
+              <a:rPr sz="2025" b="1">
+                <a:solidFill>
+                  <a:srgbClr val="E63946"/>
+                </a:solidFill>
+                <a:latin typeface="PingFang TC"/>
+                <a:ea typeface="PingFang TC"/>
+                <a:cs typeface="PingFang TC"/>
+              </a:rPr>
+              <a:t>04</a:t>
+            </a:r>
+          </a:p>
+        </p:txBody>
+      </p:sp>
+      <p:sp>
+        <p:nvSpPr>
+          <p:cNvPr id="28" name="">
+            <a:extLst>
+              <a:ext uri="{FF2B5EF4-FFF2-40B4-BE49-F238E27FC236}">
+                <a16:creationId xmlns:a16="http://schemas.microsoft.com/office/drawing/2014/main" id="{6DA70BE6-B36E-447E-BB42-1ACF6D1DC1FE}"/>
+              </a:ext>
+            </a:extLst>
+          </p:cNvPr>
+          <p:cNvSpPr>
+            <a:spLocks noGrp="1"/>
+          </p:cNvSpPr>
+          <p:nvPr/>
+        </p:nvSpPr>
+        <p:spPr>
+          <a:xfrm>
+            <a:off x="7124700" y="4419600"/>
+            <a:ext cx="4191000" cy="457200"/>
+          </a:xfrm>
+          <a:prstGeom prst="rect">
+            <a:avLst/>
+          </a:prstGeom>
+          <a:noFill/>
+          <a:ln w="0">
+            <a:noFill/>
+          </a:ln>
+        </p:spPr>
+        <p:txBody>
+          <a:bodyPr>
+            <a:noAutofit/>
+          </a:bodyPr>
+          <a:lstStyle/>
+          <a:p>
+            <a:pPr>
+              <a:buNone/>
+              <a:defRPr sz="2175" b="1">
+                <a:solidFill>
                   <a:srgbClr val="121212"/>
                 </a:solidFill>
                 <a:latin typeface="PingFang TC"/>
                 <a:ea typeface="PingFang TC"/>
                 <a:cs typeface="PingFang TC"/>
-              </a:rPr>
-              <a:t>• 中小企業和小店非常多，是第一批客戶</a:t>
-            </a:r>
-          </a:p>
-          <a:p>
+              </a:defRPr>
+            </a:pPr>
+            <a:r>
+              <a:rPr sz="2175" b="1">
+                <a:solidFill>
+                  <a:srgbClr val="121212"/>
+                </a:solidFill>
+                <a:latin typeface="PingFang TC"/>
+                <a:ea typeface="PingFang TC"/>
+                <a:cs typeface="PingFang TC"/>
+              </a:rPr>
+              <a:t>2026 的錢</a:t>
+            </a:r>
+          </a:p>
+        </p:txBody>
+      </p:sp>
+      <p:sp>
+        <p:nvSpPr>
+          <p:cNvPr id="29" name="">
+            <a:extLst>
+              <a:ext uri="{FF2B5EF4-FFF2-40B4-BE49-F238E27FC236}">
+                <a16:creationId xmlns:a16="http://schemas.microsoft.com/office/drawing/2014/main" id="{70B6D5FA-EA01-4907-A6CB-D4041C18C5ED}"/>
+              </a:ext>
+            </a:extLst>
+          </p:cNvPr>
+          <p:cNvSpPr>
+            <a:spLocks noGrp="1"/>
+          </p:cNvSpPr>
+          <p:nvPr/>
+        </p:nvSpPr>
+        <p:spPr>
+          <a:xfrm>
+            <a:off x="6438900" y="5019675"/>
+            <a:ext cx="4867275" cy="514350"/>
+          </a:xfrm>
+          <a:prstGeom prst="rect">
+            <a:avLst/>
+          </a:prstGeom>
+          <a:noFill/>
+          <a:ln w="0">
+            <a:noFill/>
+          </a:ln>
+        </p:spPr>
+        <p:txBody>
+          <a:bodyPr>
+            <a:noAutofit/>
+          </a:bodyPr>
+          <a:lstStyle/>
+          <a:p>
+            <a:pPr>
+              <a:buNone/>
+              <a:defRPr sz="1650" b="0">
+                <a:solidFill>
+                  <a:srgbClr val="626262"/>
+                </a:solidFill>
+                <a:latin typeface="PingFang TC"/>
+                <a:ea typeface="PingFang TC"/>
+                <a:cs typeface="PingFang TC"/>
+              </a:defRPr>
+            </a:pPr>
             <a:r>
               <a:rPr sz="1650" b="0">
                 <a:solidFill>
-                  <a:srgbClr val="121212"/>
-                </a:solidFill>
-                <a:latin typeface="PingFang TC"/>
-                <a:ea typeface="PingFang TC"/>
-                <a:cs typeface="PingFang TC"/>
-              </a:rPr>
-              <a:t>• 產業 know-how：餐飲、零售、旅宿、製造</a:t>
-            </a:r>
-          </a:p>
-          <a:p>
-            <a:r>
-              <a:rPr sz="1650" b="0">
-                <a:solidFill>
-                  <a:srgbClr val="121212"/>
-                </a:solidFill>
-                <a:latin typeface="PingFang TC"/>
-                <a:ea typeface="PingFang TC"/>
-                <a:cs typeface="PingFang TC"/>
-              </a:rPr>
-              <a:t>• 小團隊進得去：用現成的引擎和零件</a:t>
-            </a:r>
-          </a:p>
-        </p:txBody>
-      </p:sp>
-      <p:sp>
-        <p:nvSpPr>
-          <p:cNvPr id="13" name="">
-            <a:extLst>
-              <a:ext uri="{FF2B5EF4-FFF2-40B4-BE49-F238E27FC236}">
-                <a16:creationId xmlns:a16="http://schemas.microsoft.com/office/drawing/2014/main" id="{5A63A13F-D1D5-4F06-BFE8-CD5525CCAD8B}"/>
-              </a:ext>
-            </a:extLst>
-          </p:cNvPr>
-          <p:cNvSpPr>
-            <a:spLocks noGrp="1"/>
-          </p:cNvSpPr>
-          <p:nvPr/>
-        </p:nvSpPr>
-        <p:spPr>
-          <a:xfrm>
-            <a:off x="609600" y="5600700"/>
-            <a:ext cx="10972800" cy="400050"/>
-          </a:xfrm>
-          <a:prstGeom prst="rect">
-            <a:avLst/>
-          </a:prstGeom>
-          <a:noFill/>
-          <a:ln w="0">
-            <a:noFill/>
-          </a:ln>
-        </p:spPr>
-        <p:txBody>
-          <a:bodyPr anchor="ctr">
-            <a:normAutofit fontScale="100000"/>
-          </a:bodyPr>
-          <a:lstStyle/>
-          <a:p>
-            <a:pPr algn="l">
-              <a:buNone/>
-              <a:defRPr sz="1650" b="1">
-                <a:solidFill>
-                  <a:srgbClr val="E63946"/>
-                </a:solidFill>
-                <a:latin typeface="PingFang TC"/>
-                <a:ea typeface="PingFang TC"/>
-                <a:cs typeface="PingFang TC"/>
-              </a:defRPr>
-            </a:pPr>
-            <a:r>
-              <a:rPr sz="1650" b="1">
-                <a:solidFill>
-                  <a:srgbClr val="E63946"/>
-                </a:solidFill>
-                <a:latin typeface="PingFang TC"/>
-                <a:ea typeface="PingFang TC"/>
-                <a:cs typeface="PingFang TC"/>
-              </a:rPr>
-              <a:t>你的期末題目，就是在右邊找一個證據最強的位置。</a:t>
-            </a:r>
-          </a:p>
+                  <a:srgbClr val="626262"/>
+                </a:solidFill>
+                <a:latin typeface="PingFang TC"/>
+                <a:ea typeface="PingFang TC"/>
+                <a:cs typeface="PingFang TC"/>
+              </a:rPr>
+              <a:t>World Labs（被 AMD 宣布收購）、AMI Labs（LeCun，種子輪 10.3 億美元、還沒產品）、Decart、Odyssey。</a:t>
+            </a:r>
+          </a:p>
+        </p:txBody>
+      </p:sp>
+      <p:sp>
+        <p:nvSpPr>
+          <p:cNvPr id="30" name="">
+            <a:extLst>
+              <a:ext uri="{FF2B5EF4-FFF2-40B4-BE49-F238E27FC236}">
+                <a16:creationId xmlns:a16="http://schemas.microsoft.com/office/drawing/2014/main" id="{DAE4AA41-CF0B-4EB5-871A-7FD226B0079B}"/>
+              </a:ext>
+            </a:extLst>
+          </p:cNvPr>
+          <p:cNvSpPr>
+            <a:spLocks noGrp="1"/>
+          </p:cNvSpPr>
+          <p:nvPr/>
+        </p:nvSpPr>
+        <p:spPr>
+          <a:xfrm>
+            <a:off x="6438900" y="5629275"/>
+            <a:ext cx="4905375" cy="19050"/>
+          </a:xfrm>
+          <a:prstGeom prst="rect">
+            <a:avLst/>
+          </a:prstGeom>
+          <a:solidFill>
+            <a:srgbClr val="D9D5CF"/>
+          </a:solidFill>
+          <a:ln w="0">
+            <a:noFill/>
+          </a:ln>
+        </p:spPr>
+        <p:txBody>
+          <a:bodyPr/>
+          <a:p/>
         </p:txBody>
       </p:sp>
     </p:spTree>
@@ -13328,6 +14093,13 @@
 <file path=ppt/slides/slide37.xml><?xml version="1.0" encoding="utf-8"?>
 <p:sld xmlns:a="http://schemas.openxmlformats.org/drawingml/2006/main" xmlns:p="http://schemas.openxmlformats.org/presentationml/2006/main" xmlns:r="http://schemas.openxmlformats.org/officeDocument/2006/relationships">
   <p:cSld>
+    <p:bg>
+      <p:bgPr>
+        <a:solidFill>
+          <a:srgbClr val="F6F3EE"/>
+        </a:solidFill>
+      </p:bgPr>
+    </p:bg>
     <p:spTree>
       <p:nvGrpSpPr>
         <p:cNvPr id="1" name=""/>
@@ -13337,33 +14109,205 @@
       <p:grpSpPr/>
       <p:sp>
         <p:nvSpPr>
-          <p:cNvPr id="24" name="">
-            <a:extLst>
-              <a:ext uri="{FF2B5EF4-FFF2-40B4-BE49-F238E27FC236}">
-                <a16:creationId xmlns:a16="http://schemas.microsoft.com/office/drawing/2014/main" id="{482E03A9-F1BB-408B-BE0F-61666E3C3670}"/>
-              </a:ext>
-            </a:extLst>
-          </p:cNvPr>
-          <p:cNvSpPr>
-            <a:spLocks noGrp="1"/>
-          </p:cNvSpPr>
-          <p:nvPr/>
-        </p:nvSpPr>
-        <p:spPr>
-          <a:xfrm>
-            <a:off x="0" y="0"/>
-            <a:ext cx="12192000" cy="6858000"/>
+          <p:cNvPr id="31" name="">
+            <a:extLst>
+              <a:ext uri="{FF2B5EF4-FFF2-40B4-BE49-F238E27FC236}">
+                <a16:creationId xmlns:a16="http://schemas.microsoft.com/office/drawing/2014/main" id="{68EB7237-7F7B-4EBB-8147-7D3116DA24B3}"/>
+              </a:ext>
+            </a:extLst>
+          </p:cNvPr>
+          <p:cNvSpPr>
+            <a:spLocks noGrp="1"/>
+          </p:cNvSpPr>
+          <p:nvPr/>
+        </p:nvSpPr>
+        <p:spPr>
+          <a:xfrm>
+            <a:off x="609600" y="285750"/>
+            <a:ext cx="10287000" cy="285750"/>
+          </a:xfrm>
+          <a:prstGeom prst="rect">
+            <a:avLst/>
+          </a:prstGeom>
+          <a:noFill/>
+          <a:ln w="0">
+            <a:noFill/>
+          </a:ln>
+        </p:spPr>
+        <p:txBody>
+          <a:bodyPr>
+            <a:noAutofit/>
+          </a:bodyPr>
+          <a:lstStyle/>
+          <a:p>
+            <a:pPr>
+              <a:buNone/>
+              <a:defRPr sz="1350" b="1">
+                <a:solidFill>
+                  <a:srgbClr val="E63946"/>
+                </a:solidFill>
+                <a:latin typeface="PingFang TC"/>
+                <a:ea typeface="PingFang TC"/>
+                <a:cs typeface="PingFang TC"/>
+              </a:defRPr>
+            </a:pPr>
+            <a:r>
+              <a:rPr sz="1350" b="1">
+                <a:solidFill>
+                  <a:srgbClr val="E63946"/>
+                </a:solidFill>
+                <a:latin typeface="PingFang TC"/>
+                <a:ea typeface="PingFang TC"/>
+                <a:cs typeface="PingFang TC"/>
+              </a:rPr>
+              <a:t>WEEK 6  /  AI 新創地圖</a:t>
+            </a:r>
+          </a:p>
+        </p:txBody>
+      </p:sp>
+      <p:sp>
+        <p:nvSpPr>
+          <p:cNvPr id="2" name="">
+            <a:extLst>
+              <a:ext uri="{FF2B5EF4-FFF2-40B4-BE49-F238E27FC236}">
+                <a16:creationId xmlns:a16="http://schemas.microsoft.com/office/drawing/2014/main" id="{E3A4D602-346A-48B7-AE99-FAAAA326895A}"/>
+              </a:ext>
+            </a:extLst>
+          </p:cNvPr>
+          <p:cNvSpPr>
+            <a:spLocks noGrp="1"/>
+          </p:cNvSpPr>
+          <p:nvPr/>
+        </p:nvSpPr>
+        <p:spPr>
+          <a:xfrm>
+            <a:off x="609600" y="838200"/>
+            <a:ext cx="10972800" cy="762000"/>
+          </a:xfrm>
+          <a:prstGeom prst="rect">
+            <a:avLst/>
+          </a:prstGeom>
+          <a:noFill/>
+          <a:ln w="0">
+            <a:noFill/>
+          </a:ln>
+        </p:spPr>
+        <p:txBody>
+          <a:bodyPr>
+            <a:noAutofit/>
+          </a:bodyPr>
+          <a:lstStyle/>
+          <a:p>
+            <a:pPr>
+              <a:buNone/>
+              <a:defRPr sz="3450" b="1">
+                <a:solidFill>
+                  <a:srgbClr val="121212"/>
+                </a:solidFill>
+                <a:latin typeface="PingFang TC"/>
+                <a:ea typeface="PingFang TC"/>
+                <a:cs typeface="PingFang TC"/>
+              </a:defRPr>
+            </a:pPr>
+            <a:r>
+              <a:rPr sz="3450" b="1">
+                <a:solidFill>
+                  <a:srgbClr val="121212"/>
+                </a:solidFill>
+                <a:latin typeface="PingFang TC"/>
+                <a:ea typeface="PingFang TC"/>
+                <a:cs typeface="PingFang TC"/>
+              </a:rPr>
+              <a:t>你的產業線，在島 6 找對照組</a:t>
+            </a:r>
+          </a:p>
+        </p:txBody>
+      </p:sp>
+      <p:sp>
+        <p:nvSpPr>
+          <p:cNvPr id="3" name="">
+            <a:extLst>
+              <a:ext uri="{FF2B5EF4-FFF2-40B4-BE49-F238E27FC236}">
+                <a16:creationId xmlns:a16="http://schemas.microsoft.com/office/drawing/2014/main" id="{EB9EFF97-9BDD-4B70-A899-0F84C83E795D}"/>
+              </a:ext>
+            </a:extLst>
+          </p:cNvPr>
+          <p:cNvSpPr>
+            <a:spLocks noGrp="1"/>
+          </p:cNvSpPr>
+          <p:nvPr/>
+        </p:nvSpPr>
+        <p:spPr>
+          <a:xfrm>
+            <a:off x="609600" y="1619250"/>
+            <a:ext cx="10972800" cy="495300"/>
+          </a:xfrm>
+          <a:prstGeom prst="rect">
+            <a:avLst/>
+          </a:prstGeom>
+          <a:noFill/>
+          <a:ln w="0">
+            <a:noFill/>
+          </a:ln>
+        </p:spPr>
+        <p:txBody>
+          <a:bodyPr>
+            <a:noAutofit/>
+          </a:bodyPr>
+          <a:lstStyle/>
+          <a:p>
+            <a:pPr>
+              <a:buNone/>
+              <a:defRPr sz="1875" b="0">
+                <a:solidFill>
+                  <a:srgbClr val="626262"/>
+                </a:solidFill>
+                <a:latin typeface="PingFang TC"/>
+                <a:ea typeface="PingFang TC"/>
+                <a:cs typeface="PingFang TC"/>
+              </a:defRPr>
+            </a:pPr>
+            <a:r>
+              <a:rPr sz="1875" b="0">
+                <a:solidFill>
+                  <a:srgbClr val="626262"/>
+                </a:solidFill>
+                <a:latin typeface="PingFang TC"/>
+                <a:ea typeface="PingFang TC"/>
+                <a:cs typeface="PingFang TC"/>
+              </a:rPr>
+              <a:t>第二輪研究：每個方向都要拿一家群島公司當對照</a:t>
+            </a:r>
+          </a:p>
+        </p:txBody>
+      </p:sp>
+      <p:sp>
+        <p:nvSpPr>
+          <p:cNvPr id="4" name="">
+            <a:extLst>
+              <a:ext uri="{FF2B5EF4-FFF2-40B4-BE49-F238E27FC236}">
+                <a16:creationId xmlns:a16="http://schemas.microsoft.com/office/drawing/2014/main" id="{D12C4FFE-AA45-4E84-9A78-83B6155A0076}"/>
+              </a:ext>
+            </a:extLst>
+          </p:cNvPr>
+          <p:cNvSpPr>
+            <a:spLocks noGrp="1"/>
+          </p:cNvSpPr>
+          <p:nvPr/>
+        </p:nvSpPr>
+        <p:spPr>
+          <a:xfrm>
+            <a:off x="609600" y="6286500"/>
+            <a:ext cx="10972800" cy="19050"/>
           </a:xfrm>
           <a:prstGeom prst="rect">
             <a:avLst/>
           </a:prstGeom>
           <a:solidFill>
-            <a:srgbClr val="F6F3EE"/>
+            <a:srgbClr val="D9D5CF"/>
           </a:solidFill>
-          <a:ln w="9525">
-            <a:solidFill>
-              <a:srgbClr val="F6F3EE"/>
-            </a:solidFill>
+          <a:ln w="0">
+            <a:noFill/>
           </a:ln>
         </p:spPr>
         <p:txBody>
@@ -13373,156 +14317,40 @@
       </p:sp>
       <p:sp>
         <p:nvSpPr>
-          <p:cNvPr id="2" name="">
-            <a:extLst>
-              <a:ext uri="{FF2B5EF4-FFF2-40B4-BE49-F238E27FC236}">
-                <a16:creationId xmlns:a16="http://schemas.microsoft.com/office/drawing/2014/main" id="{32821D0B-7BB9-4BEA-8568-4AEA506F821E}"/>
-              </a:ext>
-            </a:extLst>
-          </p:cNvPr>
-          <p:cNvSpPr>
-            <a:spLocks noGrp="1"/>
-          </p:cNvSpPr>
-          <p:nvPr/>
-        </p:nvSpPr>
-        <p:spPr>
-          <a:xfrm>
-            <a:off x="609600" y="285750"/>
-            <a:ext cx="10287000" cy="285750"/>
-          </a:xfrm>
-          <a:prstGeom prst="rect">
-            <a:avLst/>
-          </a:prstGeom>
-          <a:noFill/>
-          <a:ln w="0">
-            <a:noFill/>
-          </a:ln>
-        </p:spPr>
-        <p:txBody>
-          <a:bodyPr anchor="ctr">
-            <a:normAutofit fontScale="94444"/>
-          </a:bodyPr>
-          <a:lstStyle/>
-          <a:p>
-            <a:pPr algn="l">
-              <a:buNone/>
-              <a:defRPr sz="1350" b="1">
-                <a:solidFill>
-                  <a:srgbClr val="E63946"/>
-                </a:solidFill>
-                <a:latin typeface="PingFang TC"/>
-                <a:ea typeface="PingFang TC"/>
-                <a:cs typeface="PingFang TC"/>
-              </a:defRPr>
-            </a:pPr>
-            <a:r>
-              <a:rPr sz="1350" b="1">
-                <a:solidFill>
-                  <a:srgbClr val="E63946"/>
-                </a:solidFill>
-                <a:latin typeface="PingFang TC"/>
-                <a:ea typeface="PingFang TC"/>
-                <a:cs typeface="PingFang TC"/>
-              </a:rPr>
-              <a:t>WEEK 6  /  AI 新創地圖</a:t>
-            </a:r>
-          </a:p>
-        </p:txBody>
-      </p:sp>
-      <p:sp>
-        <p:nvSpPr>
-          <p:cNvPr id="3" name="">
-            <a:extLst>
-              <a:ext uri="{FF2B5EF4-FFF2-40B4-BE49-F238E27FC236}">
-                <a16:creationId xmlns:a16="http://schemas.microsoft.com/office/drawing/2014/main" id="{7ED7AA5C-1BBF-4A51-9587-BA5F6F04C78E}"/>
-              </a:ext>
-            </a:extLst>
-          </p:cNvPr>
-          <p:cNvSpPr>
-            <a:spLocks noGrp="1"/>
-          </p:cNvSpPr>
-          <p:nvPr/>
-        </p:nvSpPr>
-        <p:spPr>
-          <a:xfrm>
-            <a:off x="609600" y="838200"/>
-            <a:ext cx="10972800" cy="762000"/>
-          </a:xfrm>
-          <a:prstGeom prst="rect">
-            <a:avLst/>
-          </a:prstGeom>
-          <a:noFill/>
-          <a:ln w="0">
-            <a:noFill/>
-          </a:ln>
-        </p:spPr>
-        <p:txBody>
-          <a:bodyPr anchor="ctr">
-            <a:normAutofit fontScale="100000"/>
-          </a:bodyPr>
-          <a:lstStyle/>
-          <a:p>
-            <a:pPr algn="l">
-              <a:buNone/>
-              <a:defRPr sz="3450" b="1">
-                <a:solidFill>
-                  <a:srgbClr val="121212"/>
-                </a:solidFill>
-                <a:latin typeface="PingFang TC"/>
-                <a:ea typeface="PingFang TC"/>
-                <a:cs typeface="PingFang TC"/>
-              </a:defRPr>
-            </a:pPr>
-            <a:r>
-              <a:rPr sz="3450" b="1">
-                <a:solidFill>
-                  <a:srgbClr val="121212"/>
-                </a:solidFill>
-                <a:latin typeface="PingFang TC"/>
-                <a:ea typeface="PingFang TC"/>
-                <a:cs typeface="PingFang TC"/>
-              </a:rPr>
-              <a:t>接下來四週：這張地圖怎麼用</a:t>
-            </a:r>
-          </a:p>
-        </p:txBody>
-      </p:sp>
-      <p:sp>
-        <p:nvSpPr>
-          <p:cNvPr id="4" name="">
-            <a:extLst>
-              <a:ext uri="{FF2B5EF4-FFF2-40B4-BE49-F238E27FC236}">
-                <a16:creationId xmlns:a16="http://schemas.microsoft.com/office/drawing/2014/main" id="{698E7BB7-A40C-43D3-9FF0-18E046A80787}"/>
-              </a:ext>
-            </a:extLst>
-          </p:cNvPr>
-          <p:cNvSpPr>
-            <a:spLocks noGrp="1"/>
-          </p:cNvSpPr>
-          <p:nvPr/>
-        </p:nvSpPr>
-        <p:spPr>
-          <a:xfrm>
-            <a:off x="609600" y="1619250"/>
-            <a:ext cx="10972800" cy="476250"/>
-          </a:xfrm>
-          <a:prstGeom prst="rect">
-            <a:avLst/>
-          </a:prstGeom>
-          <a:noFill/>
-          <a:ln w="0">
-            <a:noFill/>
-          </a:ln>
-        </p:spPr>
-        <p:txBody>
-          <a:bodyPr anchor="ctr">
-            <a:normAutofit fontScale="100000"/>
-          </a:bodyPr>
-          <a:lstStyle/>
-          <a:p>
-            <a:pPr algn="l">
-              <a:buNone/>
-              <a:defRPr sz="1800" b="0">
+          <p:cNvPr id="5" name="">
+            <a:extLst>
+              <a:ext uri="{FF2B5EF4-FFF2-40B4-BE49-F238E27FC236}">
+                <a16:creationId xmlns:a16="http://schemas.microsoft.com/office/drawing/2014/main" id="{94862769-381A-4C7F-B6F8-66BEDA67D9A6}"/>
+              </a:ext>
+            </a:extLst>
+          </p:cNvPr>
+          <p:cNvSpPr>
+            <a:spLocks noGrp="1"/>
+          </p:cNvSpPr>
+          <p:nvPr/>
+        </p:nvSpPr>
+        <p:spPr>
+          <a:xfrm>
+            <a:off x="609600" y="6410325"/>
+            <a:ext cx="5238750" cy="285750"/>
+          </a:xfrm>
+          <a:prstGeom prst="rect">
+            <a:avLst/>
+          </a:prstGeom>
+          <a:noFill/>
+          <a:ln w="0">
+            <a:noFill/>
+          </a:ln>
+        </p:spPr>
+        <p:txBody>
+          <a:bodyPr>
+            <a:noAutofit/>
+          </a:bodyPr>
+          <a:lstStyle/>
+          <a:p>
+            <a:pPr>
+              <a:buNone/>
+              <a:defRPr sz="1200" b="0">
                 <a:solidFill>
                   <a:srgbClr val="626262"/>
                 </a:solidFill>
@@ -13532,7 +14360,7 @@
               </a:defRPr>
             </a:pPr>
             <a:r>
-              <a:rPr sz="1800" b="0">
+              <a:rPr sz="1200" b="0">
                 <a:solidFill>
                   <a:srgbClr val="626262"/>
                 </a:solidFill>
@@ -13540,40 +14368,96 @@
                 <a:ea typeface="PingFang TC"/>
                 <a:cs typeface="PingFang TC"/>
               </a:rPr>
-              <a:t>群島遊戲在 11/27 和 12/4，接你的方向卡 v1、v2</a:t>
-            </a:r>
-          </a:p>
-        </p:txBody>
-      </p:sp>
-      <p:sp>
-        <p:nvSpPr>
-          <p:cNvPr id="5" name="">
-            <a:extLst>
-              <a:ext uri="{FF2B5EF4-FFF2-40B4-BE49-F238E27FC236}">
-                <a16:creationId xmlns:a16="http://schemas.microsoft.com/office/drawing/2014/main" id="{CDDA15AF-D83A-474D-A456-43204758A811}"/>
-              </a:ext>
-            </a:extLst>
-          </p:cNvPr>
-          <p:cNvSpPr>
-            <a:spLocks noGrp="1"/>
-          </p:cNvSpPr>
-          <p:nvPr/>
-        </p:nvSpPr>
-        <p:spPr>
-          <a:xfrm>
-            <a:off x="609600" y="6286500"/>
-            <a:ext cx="10972800" cy="19050"/>
+              <a:t>Startup Journey Lab</a:t>
+            </a:r>
+          </a:p>
+        </p:txBody>
+      </p:sp>
+      <p:sp>
+        <p:nvSpPr>
+          <p:cNvPr id="6" name="">
+            <a:extLst>
+              <a:ext uri="{FF2B5EF4-FFF2-40B4-BE49-F238E27FC236}">
+                <a16:creationId xmlns:a16="http://schemas.microsoft.com/office/drawing/2014/main" id="{682FD63C-1A06-42CE-A2D4-A2173418FE75}"/>
+              </a:ext>
+            </a:extLst>
+          </p:cNvPr>
+          <p:cNvSpPr>
+            <a:spLocks noGrp="1"/>
+          </p:cNvSpPr>
+          <p:nvPr/>
+        </p:nvSpPr>
+        <p:spPr>
+          <a:xfrm>
+            <a:off x="10668000" y="6410325"/>
+            <a:ext cx="1047750" cy="285750"/>
+          </a:xfrm>
+          <a:prstGeom prst="rect">
+            <a:avLst/>
+          </a:prstGeom>
+          <a:noFill/>
+          <a:ln w="0">
+            <a:noFill/>
+          </a:ln>
+        </p:spPr>
+        <p:txBody>
+          <a:bodyPr>
+            <a:noAutofit/>
+          </a:bodyPr>
+          <a:lstStyle/>
+          <a:p>
+            <a:pPr>
+              <a:buNone/>
+              <a:defRPr sz="1200" b="0">
+                <a:solidFill>
+                  <a:srgbClr val="626262"/>
+                </a:solidFill>
+                <a:latin typeface="PingFang TC"/>
+                <a:ea typeface="PingFang TC"/>
+                <a:cs typeface="PingFang TC"/>
+              </a:defRPr>
+            </a:pPr>
+            <a:r>
+              <a:rPr sz="1200" b="0">
+                <a:solidFill>
+                  <a:srgbClr val="626262"/>
+                </a:solidFill>
+                <a:latin typeface="PingFang TC"/>
+                <a:ea typeface="PingFang TC"/>
+                <a:cs typeface="PingFang TC"/>
+              </a:rPr>
+              <a:t>12 / 15</a:t>
+            </a:r>
+          </a:p>
+        </p:txBody>
+      </p:sp>
+      <p:sp>
+        <p:nvSpPr>
+          <p:cNvPr id="7" name="">
+            <a:extLst>
+              <a:ext uri="{FF2B5EF4-FFF2-40B4-BE49-F238E27FC236}">
+                <a16:creationId xmlns:a16="http://schemas.microsoft.com/office/drawing/2014/main" id="{27A1CCD5-B26A-4035-801D-C98F40910D30}"/>
+              </a:ext>
+            </a:extLst>
+          </p:cNvPr>
+          <p:cNvSpPr>
+            <a:spLocks noGrp="1"/>
+          </p:cNvSpPr>
+          <p:nvPr/>
+        </p:nvSpPr>
+        <p:spPr>
+          <a:xfrm>
+            <a:off x="609600" y="2333625"/>
+            <a:ext cx="5372100" cy="1657350"/>
           </a:xfrm>
           <a:prstGeom prst="rect">
             <a:avLst/>
           </a:prstGeom>
           <a:solidFill>
-            <a:srgbClr val="D6D0C7"/>
+            <a:srgbClr val="FFFFFF"/>
           </a:solidFill>
-          <a:ln w="9525">
-            <a:solidFill>
-              <a:srgbClr val="D6D0C7"/>
-            </a:solidFill>
+          <a:ln w="0">
+            <a:noFill/>
           </a:ln>
         </p:spPr>
         <p:txBody>
@@ -13583,138 +14467,22 @@
       </p:sp>
       <p:sp>
         <p:nvSpPr>
-          <p:cNvPr id="6" name="">
-            <a:extLst>
-              <a:ext uri="{FF2B5EF4-FFF2-40B4-BE49-F238E27FC236}">
-                <a16:creationId xmlns:a16="http://schemas.microsoft.com/office/drawing/2014/main" id="{77B95A0A-8FD1-49B6-8553-75CAA5444E19}"/>
-              </a:ext>
-            </a:extLst>
-          </p:cNvPr>
-          <p:cNvSpPr>
-            <a:spLocks noGrp="1"/>
-          </p:cNvSpPr>
-          <p:nvPr/>
-        </p:nvSpPr>
-        <p:spPr>
-          <a:xfrm>
-            <a:off x="609600" y="6362700"/>
-            <a:ext cx="2381250" cy="209550"/>
-          </a:xfrm>
-          <a:prstGeom prst="rect">
-            <a:avLst/>
-          </a:prstGeom>
-          <a:noFill/>
-          <a:ln w="0">
-            <a:noFill/>
-          </a:ln>
-        </p:spPr>
-        <p:txBody>
-          <a:bodyPr anchor="ctr">
-            <a:normAutofit fontScale="86111"/>
-          </a:bodyPr>
-          <a:lstStyle/>
-          <a:p>
-            <a:pPr algn="l">
-              <a:buNone/>
-              <a:defRPr sz="900" b="0">
-                <a:solidFill>
-                  <a:srgbClr val="626262"/>
-                </a:solidFill>
-                <a:latin typeface="PingFang TC"/>
-                <a:ea typeface="PingFang TC"/>
-                <a:cs typeface="PingFang TC"/>
-              </a:defRPr>
-            </a:pPr>
-            <a:r>
-              <a:rPr sz="900" b="0">
-                <a:solidFill>
-                  <a:srgbClr val="626262"/>
-                </a:solidFill>
-                <a:latin typeface="PingFang TC"/>
-                <a:ea typeface="PingFang TC"/>
-                <a:cs typeface="PingFang TC"/>
-              </a:rPr>
-              <a:t>Startup Journey Lab</a:t>
-            </a:r>
-          </a:p>
-        </p:txBody>
-      </p:sp>
-      <p:sp>
-        <p:nvSpPr>
-          <p:cNvPr id="7" name="">
-            <a:extLst>
-              <a:ext uri="{FF2B5EF4-FFF2-40B4-BE49-F238E27FC236}">
-                <a16:creationId xmlns:a16="http://schemas.microsoft.com/office/drawing/2014/main" id="{9B45994A-9DF8-4526-9B16-24CAE03C38D1}"/>
-              </a:ext>
-            </a:extLst>
-          </p:cNvPr>
-          <p:cNvSpPr>
-            <a:spLocks noGrp="1"/>
-          </p:cNvSpPr>
-          <p:nvPr/>
-        </p:nvSpPr>
-        <p:spPr>
-          <a:xfrm>
-            <a:off x="10477500" y="6362700"/>
-            <a:ext cx="1104900" cy="209550"/>
-          </a:xfrm>
-          <a:prstGeom prst="rect">
-            <a:avLst/>
-          </a:prstGeom>
-          <a:noFill/>
-          <a:ln w="0">
-            <a:noFill/>
-          </a:ln>
-        </p:spPr>
-        <p:txBody>
-          <a:bodyPr anchor="ctr">
-            <a:normAutofit fontScale="86111"/>
-          </a:bodyPr>
-          <a:lstStyle/>
-          <a:p>
-            <a:pPr algn="r">
-              <a:buNone/>
-              <a:defRPr sz="900" b="0">
-                <a:solidFill>
-                  <a:srgbClr val="626262"/>
-                </a:solidFill>
-                <a:latin typeface="PingFang TC"/>
-                <a:ea typeface="PingFang TC"/>
-                <a:cs typeface="PingFang TC"/>
-              </a:defRPr>
-            </a:pPr>
-            <a:r>
-              <a:rPr sz="900" b="0">
-                <a:solidFill>
-                  <a:srgbClr val="626262"/>
-                </a:solidFill>
-                <a:latin typeface="PingFang TC"/>
-                <a:ea typeface="PingFang TC"/>
-                <a:cs typeface="PingFang TC"/>
-              </a:rPr>
-              <a:t>12 / 13</a:t>
-            </a:r>
-          </a:p>
-        </p:txBody>
-      </p:sp>
-      <p:sp>
-        <p:nvSpPr>
           <p:cNvPr id="8" name="">
             <a:extLst>
               <a:ext uri="{FF2B5EF4-FFF2-40B4-BE49-F238E27FC236}">
-                <a16:creationId xmlns:a16="http://schemas.microsoft.com/office/drawing/2014/main" id="{382371FE-697D-40E4-BB3A-4680C9492111}"/>
-              </a:ext>
-            </a:extLst>
-          </p:cNvPr>
-          <p:cNvSpPr>
-            <a:spLocks noGrp="1"/>
-          </p:cNvSpPr>
-          <p:nvPr/>
-        </p:nvSpPr>
-        <p:spPr>
-          <a:xfrm>
-            <a:off x="609600" y="2428875"/>
-            <a:ext cx="457200" cy="457200"/>
+                <a16:creationId xmlns:a16="http://schemas.microsoft.com/office/drawing/2014/main" id="{400BA3D1-834E-4646-9683-131ABCF808E2}"/>
+              </a:ext>
+            </a:extLst>
+          </p:cNvPr>
+          <p:cNvSpPr>
+            <a:spLocks noGrp="1"/>
+          </p:cNvSpPr>
+          <p:nvPr/>
+        </p:nvSpPr>
+        <p:spPr>
+          <a:xfrm>
+            <a:off x="609600" y="2333625"/>
+            <a:ext cx="47625" cy="1657350"/>
           </a:xfrm>
           <a:prstGeom prst="rect">
             <a:avLst/>
@@ -13722,10 +14490,8 @@
           <a:solidFill>
             <a:srgbClr val="E63946"/>
           </a:solidFill>
-          <a:ln w="9525">
-            <a:solidFill>
-              <a:srgbClr val="E63946"/>
-            </a:solidFill>
+          <a:ln w="0">
+            <a:noFill/>
           </a:ln>
         </p:spPr>
         <p:txBody>
@@ -13738,49 +14504,49 @@
           <p:cNvPr id="9" name="">
             <a:extLst>
               <a:ext uri="{FF2B5EF4-FFF2-40B4-BE49-F238E27FC236}">
-                <a16:creationId xmlns:a16="http://schemas.microsoft.com/office/drawing/2014/main" id="{3C320CB9-C3AD-46D4-B730-D814052F3DBA}"/>
-              </a:ext>
-            </a:extLst>
-          </p:cNvPr>
-          <p:cNvSpPr>
-            <a:spLocks noGrp="1"/>
-          </p:cNvSpPr>
-          <p:nvPr/>
-        </p:nvSpPr>
-        <p:spPr>
-          <a:xfrm>
-            <a:off x="609600" y="2428875"/>
-            <a:ext cx="457200" cy="457200"/>
-          </a:xfrm>
-          <a:prstGeom prst="rect">
-            <a:avLst/>
-          </a:prstGeom>
-          <a:noFill/>
-          <a:ln w="0">
-            <a:noFill/>
-          </a:ln>
-        </p:spPr>
-        <p:txBody>
-          <a:bodyPr anchor="ctr">
-            <a:normAutofit fontScale="100000"/>
-          </a:bodyPr>
-          <a:lstStyle/>
-          <a:p>
-            <a:pPr algn="ctr">
-              <a:buNone/>
-              <a:defRPr sz="1350" b="1">
-                <a:solidFill>
-                  <a:srgbClr val="FFFFFF"/>
-                </a:solidFill>
-                <a:latin typeface="PingFang TC"/>
-                <a:ea typeface="PingFang TC"/>
-                <a:cs typeface="PingFang TC"/>
-              </a:defRPr>
-            </a:pPr>
-            <a:r>
-              <a:rPr sz="1350" b="1">
-                <a:solidFill>
-                  <a:srgbClr val="FFFFFF"/>
+                <a16:creationId xmlns:a16="http://schemas.microsoft.com/office/drawing/2014/main" id="{066F096E-6BFD-4B19-BFFC-76160372441F}"/>
+              </a:ext>
+            </a:extLst>
+          </p:cNvPr>
+          <p:cNvSpPr>
+            <a:spLocks noGrp="1"/>
+          </p:cNvSpPr>
+          <p:nvPr/>
+        </p:nvSpPr>
+        <p:spPr>
+          <a:xfrm>
+            <a:off x="819150" y="2505075"/>
+            <a:ext cx="647700" cy="428625"/>
+          </a:xfrm>
+          <a:prstGeom prst="rect">
+            <a:avLst/>
+          </a:prstGeom>
+          <a:noFill/>
+          <a:ln w="0">
+            <a:noFill/>
+          </a:ln>
+        </p:spPr>
+        <p:txBody>
+          <a:bodyPr>
+            <a:noAutofit/>
+          </a:bodyPr>
+          <a:lstStyle/>
+          <a:p>
+            <a:pPr>
+              <a:buNone/>
+              <a:defRPr sz="2025" b="1">
+                <a:solidFill>
+                  <a:srgbClr val="E63946"/>
+                </a:solidFill>
+                <a:latin typeface="PingFang TC"/>
+                <a:ea typeface="PingFang TC"/>
+                <a:cs typeface="PingFang TC"/>
+              </a:defRPr>
+            </a:pPr>
+            <a:r>
+              <a:rPr sz="2025" b="1">
+                <a:solidFill>
+                  <a:srgbClr val="E63946"/>
                 </a:solidFill>
                 <a:latin typeface="PingFang TC"/>
                 <a:ea typeface="PingFang TC"/>
@@ -13796,37 +14562,37 @@
           <p:cNvPr id="10" name="">
             <a:extLst>
               <a:ext uri="{FF2B5EF4-FFF2-40B4-BE49-F238E27FC236}">
-                <a16:creationId xmlns:a16="http://schemas.microsoft.com/office/drawing/2014/main" id="{AEF2220A-25C8-4436-884F-D94EFAE572B1}"/>
-              </a:ext>
-            </a:extLst>
-          </p:cNvPr>
-          <p:cNvSpPr>
-            <a:spLocks noGrp="1"/>
-          </p:cNvSpPr>
-          <p:nvPr/>
-        </p:nvSpPr>
-        <p:spPr>
-          <a:xfrm>
-            <a:off x="1314450" y="2409825"/>
-            <a:ext cx="2952750" cy="381000"/>
-          </a:xfrm>
-          <a:prstGeom prst="rect">
-            <a:avLst/>
-          </a:prstGeom>
-          <a:noFill/>
-          <a:ln w="0">
-            <a:noFill/>
-          </a:ln>
-        </p:spPr>
-        <p:txBody>
-          <a:bodyPr anchor="ctr">
-            <a:normAutofit fontScale="97436"/>
-          </a:bodyPr>
-          <a:lstStyle/>
-          <a:p>
-            <a:pPr algn="l">
-              <a:buNone/>
-              <a:defRPr sz="1950" b="1">
+                <a16:creationId xmlns:a16="http://schemas.microsoft.com/office/drawing/2014/main" id="{9B2C30A9-4597-48FB-9C72-464F020DDEFA}"/>
+              </a:ext>
+            </a:extLst>
+          </p:cNvPr>
+          <p:cNvSpPr>
+            <a:spLocks noGrp="1"/>
+          </p:cNvSpPr>
+          <p:nvPr/>
+        </p:nvSpPr>
+        <p:spPr>
+          <a:xfrm>
+            <a:off x="1524000" y="2505075"/>
+            <a:ext cx="4191000" cy="457200"/>
+          </a:xfrm>
+          <a:prstGeom prst="rect">
+            <a:avLst/>
+          </a:prstGeom>
+          <a:noFill/>
+          <a:ln w="0">
+            <a:noFill/>
+          </a:ln>
+        </p:spPr>
+        <p:txBody>
+          <a:bodyPr>
+            <a:noAutofit/>
+          </a:bodyPr>
+          <a:lstStyle/>
+          <a:p>
+            <a:pPr>
+              <a:buNone/>
+              <a:defRPr sz="2175" b="1">
                 <a:solidFill>
                   <a:srgbClr val="121212"/>
                 </a:solidFill>
@@ -13836,7 +14602,7 @@
               </a:defRPr>
             </a:pPr>
             <a:r>
-              <a:rPr sz="1950" b="1">
+              <a:rPr sz="2175" b="1">
                 <a:solidFill>
                   <a:srgbClr val="121212"/>
                 </a:solidFill>
@@ -13844,7 +14610,7 @@
                 <a:ea typeface="PingFang TC"/>
                 <a:cs typeface="PingFang TC"/>
               </a:rPr>
-              <a:t>11/20 建組</a:t>
+              <a:t>1 餐飲小店</a:t>
             </a:r>
           </a:p>
         </p:txBody>
@@ -13854,37 +14620,37 @@
           <p:cNvPr id="11" name="">
             <a:extLst>
               <a:ext uri="{FF2B5EF4-FFF2-40B4-BE49-F238E27FC236}">
-                <a16:creationId xmlns:a16="http://schemas.microsoft.com/office/drawing/2014/main" id="{9C8C0427-9A41-4804-B115-6DB5C54BE26C}"/>
-              </a:ext>
-            </a:extLst>
-          </p:cNvPr>
-          <p:cNvSpPr>
-            <a:spLocks noGrp="1"/>
-          </p:cNvSpPr>
-          <p:nvPr/>
-        </p:nvSpPr>
-        <p:spPr>
-          <a:xfrm>
-            <a:off x="4429125" y="2409825"/>
-            <a:ext cx="6953250" cy="457200"/>
-          </a:xfrm>
-          <a:prstGeom prst="rect">
-            <a:avLst/>
-          </a:prstGeom>
-          <a:noFill/>
-          <a:ln w="0">
-            <a:noFill/>
-          </a:ln>
-        </p:spPr>
-        <p:txBody>
-          <a:bodyPr anchor="ctr">
-            <a:normAutofit fontScale="100000"/>
-          </a:bodyPr>
-          <a:lstStyle/>
-          <a:p>
-            <a:pPr algn="l">
-              <a:buNone/>
-              <a:defRPr sz="1500" b="0">
+                <a16:creationId xmlns:a16="http://schemas.microsoft.com/office/drawing/2014/main" id="{149FFC90-3B89-4B88-A159-F50282024610}"/>
+              </a:ext>
+            </a:extLst>
+          </p:cNvPr>
+          <p:cNvSpPr>
+            <a:spLocks noGrp="1"/>
+          </p:cNvSpPr>
+          <p:nvPr/>
+        </p:nvSpPr>
+        <p:spPr>
+          <a:xfrm>
+            <a:off x="838200" y="3105150"/>
+            <a:ext cx="4867275" cy="514350"/>
+          </a:xfrm>
+          <a:prstGeom prst="rect">
+            <a:avLst/>
+          </a:prstGeom>
+          <a:noFill/>
+          <a:ln w="0">
+            <a:noFill/>
+          </a:ln>
+        </p:spPr>
+        <p:txBody>
+          <a:bodyPr>
+            <a:noAutofit/>
+          </a:bodyPr>
+          <a:lstStyle/>
+          <a:p>
+            <a:pPr>
+              <a:buNone/>
+              <a:defRPr sz="1650" b="0">
                 <a:solidFill>
                   <a:srgbClr val="626262"/>
                 </a:solidFill>
@@ -13894,7 +14660,7 @@
               </a:defRPr>
             </a:pPr>
             <a:r>
-              <a:rPr sz="1500" b="0">
+              <a:rPr sz="1650" b="0">
                 <a:solidFill>
                   <a:srgbClr val="626262"/>
                 </a:solidFill>
@@ -13902,7 +14668,7 @@
                 <a:ea typeface="PingFang TC"/>
                 <a:cs typeface="PingFang TC"/>
               </a:rPr>
-              <a:t>AI agent 工具更新；三人一組、一組一個產業，三個方向各由一人認領。</a:t>
+              <a:t>Owner（幫餐廳做網站、點餐和行銷）、Slang AI（幫餐廳接訂位電話）</a:t>
             </a:r>
           </a:p>
         </p:txBody>
@@ -13912,30 +14678,28 @@
           <p:cNvPr id="12" name="">
             <a:extLst>
               <a:ext uri="{FF2B5EF4-FFF2-40B4-BE49-F238E27FC236}">
-                <a16:creationId xmlns:a16="http://schemas.microsoft.com/office/drawing/2014/main" id="{A4D9B320-DC9A-4954-BCBD-D1A12EBEB5F1}"/>
-              </a:ext>
-            </a:extLst>
-          </p:cNvPr>
-          <p:cNvSpPr>
-            <a:spLocks noGrp="1"/>
-          </p:cNvSpPr>
-          <p:nvPr/>
-        </p:nvSpPr>
-        <p:spPr>
-          <a:xfrm>
-            <a:off x="1314450" y="3019425"/>
-            <a:ext cx="10267950" cy="19050"/>
+                <a16:creationId xmlns:a16="http://schemas.microsoft.com/office/drawing/2014/main" id="{C0389E3D-C56E-4707-A449-0AC32CA578CA}"/>
+              </a:ext>
+            </a:extLst>
+          </p:cNvPr>
+          <p:cNvSpPr>
+            <a:spLocks noGrp="1"/>
+          </p:cNvSpPr>
+          <p:nvPr/>
+        </p:nvSpPr>
+        <p:spPr>
+          <a:xfrm>
+            <a:off x="838200" y="3714750"/>
+            <a:ext cx="4905375" cy="19050"/>
           </a:xfrm>
           <a:prstGeom prst="rect">
             <a:avLst/>
           </a:prstGeom>
           <a:solidFill>
-            <a:srgbClr val="D6D0C7"/>
+            <a:srgbClr val="D9D5CF"/>
           </a:solidFill>
-          <a:ln w="9525">
-            <a:solidFill>
-              <a:srgbClr val="D6D0C7"/>
-            </a:solidFill>
+          <a:ln w="0">
+            <a:noFill/>
           </a:ln>
         </p:spPr>
         <p:txBody>
@@ -13948,30 +14712,28 @@
           <p:cNvPr id="13" name="">
             <a:extLst>
               <a:ext uri="{FF2B5EF4-FFF2-40B4-BE49-F238E27FC236}">
-                <a16:creationId xmlns:a16="http://schemas.microsoft.com/office/drawing/2014/main" id="{EBF68F2A-63F8-4862-B27E-F8DF179D2DA6}"/>
-              </a:ext>
-            </a:extLst>
-          </p:cNvPr>
-          <p:cNvSpPr>
-            <a:spLocks noGrp="1"/>
-          </p:cNvSpPr>
-          <p:nvPr/>
-        </p:nvSpPr>
-        <p:spPr>
-          <a:xfrm>
-            <a:off x="609600" y="3381375"/>
-            <a:ext cx="457200" cy="457200"/>
+                <a16:creationId xmlns:a16="http://schemas.microsoft.com/office/drawing/2014/main" id="{CE170350-F5E0-44DF-A0AD-00F684A3D9DC}"/>
+              </a:ext>
+            </a:extLst>
+          </p:cNvPr>
+          <p:cNvSpPr>
+            <a:spLocks noGrp="1"/>
+          </p:cNvSpPr>
+          <p:nvPr/>
+        </p:nvSpPr>
+        <p:spPr>
+          <a:xfrm>
+            <a:off x="6210300" y="2333625"/>
+            <a:ext cx="5372100" cy="1657350"/>
           </a:xfrm>
           <a:prstGeom prst="rect">
             <a:avLst/>
           </a:prstGeom>
           <a:solidFill>
-            <a:srgbClr val="14395B"/>
+            <a:srgbClr val="FFFFFF"/>
           </a:solidFill>
-          <a:ln w="9525">
-            <a:solidFill>
-              <a:srgbClr val="14395B"/>
-            </a:solidFill>
+          <a:ln w="0">
+            <a:noFill/>
           </a:ln>
         </p:spPr>
         <p:txBody>
@@ -13984,204 +14746,28 @@
           <p:cNvPr id="14" name="">
             <a:extLst>
               <a:ext uri="{FF2B5EF4-FFF2-40B4-BE49-F238E27FC236}">
-                <a16:creationId xmlns:a16="http://schemas.microsoft.com/office/drawing/2014/main" id="{E534EE12-5C89-491C-8932-2A672F3E98D7}"/>
-              </a:ext>
-            </a:extLst>
-          </p:cNvPr>
-          <p:cNvSpPr>
-            <a:spLocks noGrp="1"/>
-          </p:cNvSpPr>
-          <p:nvPr/>
-        </p:nvSpPr>
-        <p:spPr>
-          <a:xfrm>
-            <a:off x="609600" y="3381375"/>
-            <a:ext cx="457200" cy="457200"/>
-          </a:xfrm>
-          <a:prstGeom prst="rect">
-            <a:avLst/>
-          </a:prstGeom>
-          <a:noFill/>
-          <a:ln w="0">
-            <a:noFill/>
-          </a:ln>
-        </p:spPr>
-        <p:txBody>
-          <a:bodyPr anchor="ctr">
-            <a:normAutofit fontScale="100000"/>
-          </a:bodyPr>
-          <a:lstStyle/>
-          <a:p>
-            <a:pPr algn="ctr">
-              <a:buNone/>
-              <a:defRPr sz="1350" b="1">
-                <a:solidFill>
-                  <a:srgbClr val="FFFFFF"/>
-                </a:solidFill>
-                <a:latin typeface="PingFang TC"/>
-                <a:ea typeface="PingFang TC"/>
-                <a:cs typeface="PingFang TC"/>
-              </a:defRPr>
-            </a:pPr>
-            <a:r>
-              <a:rPr sz="1350" b="1">
-                <a:solidFill>
-                  <a:srgbClr val="FFFFFF"/>
-                </a:solidFill>
-                <a:latin typeface="PingFang TC"/>
-                <a:ea typeface="PingFang TC"/>
-                <a:cs typeface="PingFang TC"/>
-              </a:rPr>
-              <a:t>02</a:t>
-            </a:r>
-          </a:p>
-        </p:txBody>
-      </p:sp>
-      <p:sp>
-        <p:nvSpPr>
-          <p:cNvPr id="15" name="">
-            <a:extLst>
-              <a:ext uri="{FF2B5EF4-FFF2-40B4-BE49-F238E27FC236}">
-                <a16:creationId xmlns:a16="http://schemas.microsoft.com/office/drawing/2014/main" id="{AED1200E-7BE2-4DD2-ADA0-7D30E6B0981B}"/>
-              </a:ext>
-            </a:extLst>
-          </p:cNvPr>
-          <p:cNvSpPr>
-            <a:spLocks noGrp="1"/>
-          </p:cNvSpPr>
-          <p:nvPr/>
-        </p:nvSpPr>
-        <p:spPr>
-          <a:xfrm>
-            <a:off x="1314450" y="3362325"/>
-            <a:ext cx="2952750" cy="381000"/>
-          </a:xfrm>
-          <a:prstGeom prst="rect">
-            <a:avLst/>
-          </a:prstGeom>
-          <a:noFill/>
-          <a:ln w="0">
-            <a:noFill/>
-          </a:ln>
-        </p:spPr>
-        <p:txBody>
-          <a:bodyPr anchor="ctr">
-            <a:normAutofit fontScale="97436"/>
-          </a:bodyPr>
-          <a:lstStyle/>
-          <a:p>
-            <a:pPr algn="l">
-              <a:buNone/>
-              <a:defRPr sz="1950" b="1">
-                <a:solidFill>
-                  <a:srgbClr val="121212"/>
-                </a:solidFill>
-                <a:latin typeface="PingFang TC"/>
-                <a:ea typeface="PingFang TC"/>
-                <a:cs typeface="PingFang TC"/>
-              </a:defRPr>
-            </a:pPr>
-            <a:r>
-              <a:rPr sz="1950" b="1">
-                <a:solidFill>
-                  <a:srgbClr val="121212"/>
-                </a:solidFill>
-                <a:latin typeface="PingFang TC"/>
-                <a:ea typeface="PingFang TC"/>
-                <a:cs typeface="PingFang TC"/>
-              </a:rPr>
-              <a:t>11/27 群島遊戲：猜</a:t>
-            </a:r>
-          </a:p>
-        </p:txBody>
-      </p:sp>
-      <p:sp>
-        <p:nvSpPr>
-          <p:cNvPr id="16" name="">
-            <a:extLst>
-              <a:ext uri="{FF2B5EF4-FFF2-40B4-BE49-F238E27FC236}">
-                <a16:creationId xmlns:a16="http://schemas.microsoft.com/office/drawing/2014/main" id="{F22A966B-DF26-4D7E-8ECC-14591A3B9F8E}"/>
-              </a:ext>
-            </a:extLst>
-          </p:cNvPr>
-          <p:cNvSpPr>
-            <a:spLocks noGrp="1"/>
-          </p:cNvSpPr>
-          <p:nvPr/>
-        </p:nvSpPr>
-        <p:spPr>
-          <a:xfrm>
-            <a:off x="4429125" y="3362325"/>
-            <a:ext cx="6953250" cy="457200"/>
-          </a:xfrm>
-          <a:prstGeom prst="rect">
-            <a:avLst/>
-          </a:prstGeom>
-          <a:noFill/>
-          <a:ln w="0">
-            <a:noFill/>
-          </a:ln>
-        </p:spPr>
-        <p:txBody>
-          <a:bodyPr anchor="ctr">
-            <a:normAutofit fontScale="100000"/>
-          </a:bodyPr>
-          <a:lstStyle/>
-          <a:p>
-            <a:pPr algn="l">
-              <a:buNone/>
-              <a:defRPr sz="1500" b="0">
-                <a:solidFill>
-                  <a:srgbClr val="626262"/>
-                </a:solidFill>
-                <a:latin typeface="PingFang TC"/>
-                <a:ea typeface="PingFang TC"/>
-                <a:cs typeface="PingFang TC"/>
-              </a:defRPr>
-            </a:pPr>
-            <a:r>
-              <a:rPr sz="1500" b="0">
-                <a:solidFill>
-                  <a:srgbClr val="626262"/>
-                </a:solidFill>
-                <a:latin typeface="PingFang TC"/>
-                <a:ea typeface="PingFang TC"/>
-                <a:cs typeface="PingFang TC"/>
-              </a:rPr>
-              <a:t>介紹 11 家公司做什麼 → 每家猜三題：誰付錢、怎麼收費、取代誰，加一題估值 → 下課前鎖住。</a:t>
-            </a:r>
-          </a:p>
-        </p:txBody>
-      </p:sp>
-      <p:sp>
-        <p:nvSpPr>
-          <p:cNvPr id="17" name="">
-            <a:extLst>
-              <a:ext uri="{FF2B5EF4-FFF2-40B4-BE49-F238E27FC236}">
-                <a16:creationId xmlns:a16="http://schemas.microsoft.com/office/drawing/2014/main" id="{4347ED41-C791-4EE4-9C69-652BD9AC2DE6}"/>
-              </a:ext>
-            </a:extLst>
-          </p:cNvPr>
-          <p:cNvSpPr>
-            <a:spLocks noGrp="1"/>
-          </p:cNvSpPr>
-          <p:nvPr/>
-        </p:nvSpPr>
-        <p:spPr>
-          <a:xfrm>
-            <a:off x="1314450" y="3971925"/>
-            <a:ext cx="10267950" cy="19050"/>
+                <a16:creationId xmlns:a16="http://schemas.microsoft.com/office/drawing/2014/main" id="{AD3B1000-E290-49F8-9D0E-0C06A872F305}"/>
+              </a:ext>
+            </a:extLst>
+          </p:cNvPr>
+          <p:cNvSpPr>
+            <a:spLocks noGrp="1"/>
+          </p:cNvSpPr>
+          <p:nvPr/>
+        </p:nvSpPr>
+        <p:spPr>
+          <a:xfrm>
+            <a:off x="6210300" y="2333625"/>
+            <a:ext cx="47625" cy="1657350"/>
           </a:xfrm>
           <a:prstGeom prst="rect">
             <a:avLst/>
           </a:prstGeom>
           <a:solidFill>
-            <a:srgbClr val="D6D0C7"/>
+            <a:srgbClr val="E63946"/>
           </a:solidFill>
-          <a:ln w="9525">
-            <a:solidFill>
-              <a:srgbClr val="D6D0C7"/>
-            </a:solidFill>
+          <a:ln w="0">
+            <a:noFill/>
           </a:ln>
         </p:spPr>
         <p:txBody>
@@ -14191,33 +14777,205 @@
       </p:sp>
       <p:sp>
         <p:nvSpPr>
+          <p:cNvPr id="15" name="">
+            <a:extLst>
+              <a:ext uri="{FF2B5EF4-FFF2-40B4-BE49-F238E27FC236}">
+                <a16:creationId xmlns:a16="http://schemas.microsoft.com/office/drawing/2014/main" id="{639B8976-571E-4A1C-849D-D2C3FF78EED3}"/>
+              </a:ext>
+            </a:extLst>
+          </p:cNvPr>
+          <p:cNvSpPr>
+            <a:spLocks noGrp="1"/>
+          </p:cNvSpPr>
+          <p:nvPr/>
+        </p:nvSpPr>
+        <p:spPr>
+          <a:xfrm>
+            <a:off x="6419850" y="2505075"/>
+            <a:ext cx="647700" cy="428625"/>
+          </a:xfrm>
+          <a:prstGeom prst="rect">
+            <a:avLst/>
+          </a:prstGeom>
+          <a:noFill/>
+          <a:ln w="0">
+            <a:noFill/>
+          </a:ln>
+        </p:spPr>
+        <p:txBody>
+          <a:bodyPr>
+            <a:noAutofit/>
+          </a:bodyPr>
+          <a:lstStyle/>
+          <a:p>
+            <a:pPr>
+              <a:buNone/>
+              <a:defRPr sz="2025" b="1">
+                <a:solidFill>
+                  <a:srgbClr val="E63946"/>
+                </a:solidFill>
+                <a:latin typeface="PingFang TC"/>
+                <a:ea typeface="PingFang TC"/>
+                <a:cs typeface="PingFang TC"/>
+              </a:defRPr>
+            </a:pPr>
+            <a:r>
+              <a:rPr sz="2025" b="1">
+                <a:solidFill>
+                  <a:srgbClr val="E63946"/>
+                </a:solidFill>
+                <a:latin typeface="PingFang TC"/>
+                <a:ea typeface="PingFang TC"/>
+                <a:cs typeface="PingFang TC"/>
+              </a:rPr>
+              <a:t>02</a:t>
+            </a:r>
+          </a:p>
+        </p:txBody>
+      </p:sp>
+      <p:sp>
+        <p:nvSpPr>
+          <p:cNvPr id="16" name="">
+            <a:extLst>
+              <a:ext uri="{FF2B5EF4-FFF2-40B4-BE49-F238E27FC236}">
+                <a16:creationId xmlns:a16="http://schemas.microsoft.com/office/drawing/2014/main" id="{EBA0E952-AD26-4E31-89D8-0E17D9EBCC49}"/>
+              </a:ext>
+            </a:extLst>
+          </p:cNvPr>
+          <p:cNvSpPr>
+            <a:spLocks noGrp="1"/>
+          </p:cNvSpPr>
+          <p:nvPr/>
+        </p:nvSpPr>
+        <p:spPr>
+          <a:xfrm>
+            <a:off x="7124700" y="2505075"/>
+            <a:ext cx="4191000" cy="457200"/>
+          </a:xfrm>
+          <a:prstGeom prst="rect">
+            <a:avLst/>
+          </a:prstGeom>
+          <a:noFill/>
+          <a:ln w="0">
+            <a:noFill/>
+          </a:ln>
+        </p:spPr>
+        <p:txBody>
+          <a:bodyPr>
+            <a:noAutofit/>
+          </a:bodyPr>
+          <a:lstStyle/>
+          <a:p>
+            <a:pPr>
+              <a:buNone/>
+              <a:defRPr sz="2175" b="1">
+                <a:solidFill>
+                  <a:srgbClr val="121212"/>
+                </a:solidFill>
+                <a:latin typeface="PingFang TC"/>
+                <a:ea typeface="PingFang TC"/>
+                <a:cs typeface="PingFang TC"/>
+              </a:defRPr>
+            </a:pPr>
+            <a:r>
+              <a:rPr sz="2175" b="1">
+                <a:solidFill>
+                  <a:srgbClr val="121212"/>
+                </a:solidFill>
+                <a:latin typeface="PingFang TC"/>
+                <a:ea typeface="PingFang TC"/>
+                <a:cs typeface="PingFang TC"/>
+              </a:rPr>
+              <a:t>3 網拍與小品牌電商</a:t>
+            </a:r>
+          </a:p>
+        </p:txBody>
+      </p:sp>
+      <p:sp>
+        <p:nvSpPr>
+          <p:cNvPr id="17" name="">
+            <a:extLst>
+              <a:ext uri="{FF2B5EF4-FFF2-40B4-BE49-F238E27FC236}">
+                <a16:creationId xmlns:a16="http://schemas.microsoft.com/office/drawing/2014/main" id="{27A6A621-6AE2-4020-9522-1EFCDF0C4D22}"/>
+              </a:ext>
+            </a:extLst>
+          </p:cNvPr>
+          <p:cNvSpPr>
+            <a:spLocks noGrp="1"/>
+          </p:cNvSpPr>
+          <p:nvPr/>
+        </p:nvSpPr>
+        <p:spPr>
+          <a:xfrm>
+            <a:off x="6438900" y="3105150"/>
+            <a:ext cx="4867275" cy="514350"/>
+          </a:xfrm>
+          <a:prstGeom prst="rect">
+            <a:avLst/>
+          </a:prstGeom>
+          <a:noFill/>
+          <a:ln w="0">
+            <a:noFill/>
+          </a:ln>
+        </p:spPr>
+        <p:txBody>
+          <a:bodyPr>
+            <a:noAutofit/>
+          </a:bodyPr>
+          <a:lstStyle/>
+          <a:p>
+            <a:pPr>
+              <a:buNone/>
+              <a:defRPr sz="1650" b="0">
+                <a:solidFill>
+                  <a:srgbClr val="626262"/>
+                </a:solidFill>
+                <a:latin typeface="PingFang TC"/>
+                <a:ea typeface="PingFang TC"/>
+                <a:cs typeface="PingFang TC"/>
+              </a:defRPr>
+            </a:pPr>
+            <a:r>
+              <a:rPr sz="1650" b="0">
+                <a:solidFill>
+                  <a:srgbClr val="626262"/>
+                </a:solidFill>
+                <a:latin typeface="PingFang TC"/>
+                <a:ea typeface="PingFang TC"/>
+                <a:cs typeface="PingFang TC"/>
+              </a:rPr>
+              <a:t>Gorgias（Shopify 網店的 AI 客服）；台灣：漸強實驗室</a:t>
+            </a:r>
+          </a:p>
+        </p:txBody>
+      </p:sp>
+      <p:sp>
+        <p:nvSpPr>
           <p:cNvPr id="18" name="">
             <a:extLst>
               <a:ext uri="{FF2B5EF4-FFF2-40B4-BE49-F238E27FC236}">
-                <a16:creationId xmlns:a16="http://schemas.microsoft.com/office/drawing/2014/main" id="{3B36BABB-0E6E-4648-BB95-CCB3E591DDF3}"/>
-              </a:ext>
-            </a:extLst>
-          </p:cNvPr>
-          <p:cNvSpPr>
-            <a:spLocks noGrp="1"/>
-          </p:cNvSpPr>
-          <p:nvPr/>
-        </p:nvSpPr>
-        <p:spPr>
-          <a:xfrm>
-            <a:off x="609600" y="4333875"/>
-            <a:ext cx="457200" cy="457200"/>
+                <a16:creationId xmlns:a16="http://schemas.microsoft.com/office/drawing/2014/main" id="{3D5E9FEA-7654-4EFA-8998-C77A9A4BA516}"/>
+              </a:ext>
+            </a:extLst>
+          </p:cNvPr>
+          <p:cNvSpPr>
+            <a:spLocks noGrp="1"/>
+          </p:cNvSpPr>
+          <p:nvPr/>
+        </p:nvSpPr>
+        <p:spPr>
+          <a:xfrm>
+            <a:off x="6438900" y="3714750"/>
+            <a:ext cx="4905375" cy="19050"/>
           </a:xfrm>
           <a:prstGeom prst="rect">
             <a:avLst/>
           </a:prstGeom>
           <a:solidFill>
-            <a:srgbClr val="C99827"/>
+            <a:srgbClr val="D9D5CF"/>
           </a:solidFill>
-          <a:ln w="9525">
-            <a:solidFill>
-              <a:srgbClr val="C99827"/>
-            </a:solidFill>
+          <a:ln w="0">
+            <a:noFill/>
           </a:ln>
         </p:spPr>
         <p:txBody>
@@ -14230,204 +14988,28 @@
           <p:cNvPr id="19" name="">
             <a:extLst>
               <a:ext uri="{FF2B5EF4-FFF2-40B4-BE49-F238E27FC236}">
-                <a16:creationId xmlns:a16="http://schemas.microsoft.com/office/drawing/2014/main" id="{CA631708-CE6D-42BC-B460-B476022771E7}"/>
-              </a:ext>
-            </a:extLst>
-          </p:cNvPr>
-          <p:cNvSpPr>
-            <a:spLocks noGrp="1"/>
-          </p:cNvSpPr>
-          <p:nvPr/>
-        </p:nvSpPr>
-        <p:spPr>
-          <a:xfrm>
-            <a:off x="609600" y="4333875"/>
-            <a:ext cx="457200" cy="457200"/>
-          </a:xfrm>
-          <a:prstGeom prst="rect">
-            <a:avLst/>
-          </a:prstGeom>
-          <a:noFill/>
-          <a:ln w="0">
-            <a:noFill/>
-          </a:ln>
-        </p:spPr>
-        <p:txBody>
-          <a:bodyPr anchor="ctr">
-            <a:normAutofit fontScale="100000"/>
-          </a:bodyPr>
-          <a:lstStyle/>
-          <a:p>
-            <a:pPr algn="ctr">
-              <a:buNone/>
-              <a:defRPr sz="1350" b="1">
-                <a:solidFill>
-                  <a:srgbClr val="FFFFFF"/>
-                </a:solidFill>
-                <a:latin typeface="PingFang TC"/>
-                <a:ea typeface="PingFang TC"/>
-                <a:cs typeface="PingFang TC"/>
-              </a:defRPr>
-            </a:pPr>
-            <a:r>
-              <a:rPr sz="1350" b="1">
-                <a:solidFill>
-                  <a:srgbClr val="FFFFFF"/>
-                </a:solidFill>
-                <a:latin typeface="PingFang TC"/>
-                <a:ea typeface="PingFang TC"/>
-                <a:cs typeface="PingFang TC"/>
-              </a:rPr>
-              <a:t>03</a:t>
-            </a:r>
-          </a:p>
-        </p:txBody>
-      </p:sp>
-      <p:sp>
-        <p:nvSpPr>
-          <p:cNvPr id="20" name="">
-            <a:extLst>
-              <a:ext uri="{FF2B5EF4-FFF2-40B4-BE49-F238E27FC236}">
-                <a16:creationId xmlns:a16="http://schemas.microsoft.com/office/drawing/2014/main" id="{C7AE9068-2762-4A03-A15E-EE94A7A0CDF0}"/>
-              </a:ext>
-            </a:extLst>
-          </p:cNvPr>
-          <p:cNvSpPr>
-            <a:spLocks noGrp="1"/>
-          </p:cNvSpPr>
-          <p:nvPr/>
-        </p:nvSpPr>
-        <p:spPr>
-          <a:xfrm>
-            <a:off x="1314450" y="4314825"/>
-            <a:ext cx="2952750" cy="381000"/>
-          </a:xfrm>
-          <a:prstGeom prst="rect">
-            <a:avLst/>
-          </a:prstGeom>
-          <a:noFill/>
-          <a:ln w="0">
-            <a:noFill/>
-          </a:ln>
-        </p:spPr>
-        <p:txBody>
-          <a:bodyPr anchor="ctr">
-            <a:normAutofit fontScale="97436"/>
-          </a:bodyPr>
-          <a:lstStyle/>
-          <a:p>
-            <a:pPr algn="l">
-              <a:buNone/>
-              <a:defRPr sz="1950" b="1">
-                <a:solidFill>
-                  <a:srgbClr val="121212"/>
-                </a:solidFill>
-                <a:latin typeface="PingFang TC"/>
-                <a:ea typeface="PingFang TC"/>
-                <a:cs typeface="PingFang TC"/>
-              </a:defRPr>
-            </a:pPr>
-            <a:r>
-              <a:rPr sz="1950" b="1">
-                <a:solidFill>
-                  <a:srgbClr val="121212"/>
-                </a:solidFill>
-                <a:latin typeface="PingFang TC"/>
-                <a:ea typeface="PingFang TC"/>
-                <a:cs typeface="PingFang TC"/>
-              </a:rPr>
-              <a:t>12/4 群島遊戲：揭曉</a:t>
-            </a:r>
-          </a:p>
-        </p:txBody>
-      </p:sp>
-      <p:sp>
-        <p:nvSpPr>
-          <p:cNvPr id="21" name="">
-            <a:extLst>
-              <a:ext uri="{FF2B5EF4-FFF2-40B4-BE49-F238E27FC236}">
-                <a16:creationId xmlns:a16="http://schemas.microsoft.com/office/drawing/2014/main" id="{5BD73FAB-8CB1-41D3-B640-715FEE6AF17E}"/>
-              </a:ext>
-            </a:extLst>
-          </p:cNvPr>
-          <p:cNvSpPr>
-            <a:spLocks noGrp="1"/>
-          </p:cNvSpPr>
-          <p:nvPr/>
-        </p:nvSpPr>
-        <p:spPr>
-          <a:xfrm>
-            <a:off x="4429125" y="4314825"/>
-            <a:ext cx="6953250" cy="457200"/>
-          </a:xfrm>
-          <a:prstGeom prst="rect">
-            <a:avLst/>
-          </a:prstGeom>
-          <a:noFill/>
-          <a:ln w="0">
-            <a:noFill/>
-          </a:ln>
-        </p:spPr>
-        <p:txBody>
-          <a:bodyPr anchor="ctr">
-            <a:normAutofit fontScale="100000"/>
-          </a:bodyPr>
-          <a:lstStyle/>
-          <a:p>
-            <a:pPr algn="l">
-              <a:buNone/>
-              <a:defRPr sz="1500" b="0">
-                <a:solidFill>
-                  <a:srgbClr val="626262"/>
-                </a:solidFill>
-                <a:latin typeface="PingFang TC"/>
-                <a:ea typeface="PingFang TC"/>
-                <a:cs typeface="PingFang TC"/>
-              </a:defRPr>
-            </a:pPr>
-            <a:r>
-              <a:rPr sz="1500" b="0">
-                <a:solidFill>
-                  <a:srgbClr val="626262"/>
-                </a:solidFill>
-                <a:latin typeface="PingFang TC"/>
-                <a:ea typeface="PingFang TC"/>
-                <a:cs typeface="PingFang TC"/>
-              </a:rPr>
-              <a:t>看答案和分數 → 用 NotebookLM 深挖對照公司 → 寫方向卡 v2。</a:t>
-            </a:r>
-          </a:p>
-        </p:txBody>
-      </p:sp>
-      <p:sp>
-        <p:nvSpPr>
-          <p:cNvPr id="22" name="">
-            <a:extLst>
-              <a:ext uri="{FF2B5EF4-FFF2-40B4-BE49-F238E27FC236}">
-                <a16:creationId xmlns:a16="http://schemas.microsoft.com/office/drawing/2014/main" id="{8FA808F9-3FCE-4AFA-B8B7-2FF36A31D8F6}"/>
-              </a:ext>
-            </a:extLst>
-          </p:cNvPr>
-          <p:cNvSpPr>
-            <a:spLocks noGrp="1"/>
-          </p:cNvSpPr>
-          <p:nvPr/>
-        </p:nvSpPr>
-        <p:spPr>
-          <a:xfrm>
-            <a:off x="1314450" y="4924425"/>
-            <a:ext cx="10267950" cy="19050"/>
+                <a16:creationId xmlns:a16="http://schemas.microsoft.com/office/drawing/2014/main" id="{E8F8ED3D-E01B-4FE2-8DDB-B2AFB41A9CEE}"/>
+              </a:ext>
+            </a:extLst>
+          </p:cNvPr>
+          <p:cNvSpPr>
+            <a:spLocks noGrp="1"/>
+          </p:cNvSpPr>
+          <p:nvPr/>
+        </p:nvSpPr>
+        <p:spPr>
+          <a:xfrm>
+            <a:off x="609600" y="4248150"/>
+            <a:ext cx="5372100" cy="1657350"/>
           </a:xfrm>
           <a:prstGeom prst="rect">
             <a:avLst/>
           </a:prstGeom>
           <a:solidFill>
-            <a:srgbClr val="D6D0C7"/>
+            <a:srgbClr val="FFFFFF"/>
           </a:solidFill>
-          <a:ln w="9525">
-            <a:solidFill>
-              <a:srgbClr val="D6D0C7"/>
-            </a:solidFill>
+          <a:ln w="0">
+            <a:noFill/>
           </a:ln>
         </p:spPr>
         <p:txBody>
@@ -14437,40 +15019,408 @@
       </p:sp>
       <p:sp>
         <p:nvSpPr>
+          <p:cNvPr id="20" name="">
+            <a:extLst>
+              <a:ext uri="{FF2B5EF4-FFF2-40B4-BE49-F238E27FC236}">
+                <a16:creationId xmlns:a16="http://schemas.microsoft.com/office/drawing/2014/main" id="{4AB9F765-1955-4D41-9C88-83F376762D9E}"/>
+              </a:ext>
+            </a:extLst>
+          </p:cNvPr>
+          <p:cNvSpPr>
+            <a:spLocks noGrp="1"/>
+          </p:cNvSpPr>
+          <p:nvPr/>
+        </p:nvSpPr>
+        <p:spPr>
+          <a:xfrm>
+            <a:off x="609600" y="4248150"/>
+            <a:ext cx="47625" cy="1657350"/>
+          </a:xfrm>
+          <a:prstGeom prst="rect">
+            <a:avLst/>
+          </a:prstGeom>
+          <a:solidFill>
+            <a:srgbClr val="E63946"/>
+          </a:solidFill>
+          <a:ln w="0">
+            <a:noFill/>
+          </a:ln>
+        </p:spPr>
+        <p:txBody>
+          <a:bodyPr/>
+          <a:p/>
+        </p:txBody>
+      </p:sp>
+      <p:sp>
+        <p:nvSpPr>
+          <p:cNvPr id="21" name="">
+            <a:extLst>
+              <a:ext uri="{FF2B5EF4-FFF2-40B4-BE49-F238E27FC236}">
+                <a16:creationId xmlns:a16="http://schemas.microsoft.com/office/drawing/2014/main" id="{45D78E31-998E-4BFA-A554-D824FA379782}"/>
+              </a:ext>
+            </a:extLst>
+          </p:cNvPr>
+          <p:cNvSpPr>
+            <a:spLocks noGrp="1"/>
+          </p:cNvSpPr>
+          <p:nvPr/>
+        </p:nvSpPr>
+        <p:spPr>
+          <a:xfrm>
+            <a:off x="819150" y="4419600"/>
+            <a:ext cx="647700" cy="428625"/>
+          </a:xfrm>
+          <a:prstGeom prst="rect">
+            <a:avLst/>
+          </a:prstGeom>
+          <a:noFill/>
+          <a:ln w="0">
+            <a:noFill/>
+          </a:ln>
+        </p:spPr>
+        <p:txBody>
+          <a:bodyPr>
+            <a:noAutofit/>
+          </a:bodyPr>
+          <a:lstStyle/>
+          <a:p>
+            <a:pPr>
+              <a:buNone/>
+              <a:defRPr sz="2025" b="1">
+                <a:solidFill>
+                  <a:srgbClr val="E63946"/>
+                </a:solidFill>
+                <a:latin typeface="PingFang TC"/>
+                <a:ea typeface="PingFang TC"/>
+                <a:cs typeface="PingFang TC"/>
+              </a:defRPr>
+            </a:pPr>
+            <a:r>
+              <a:rPr sz="2025" b="1">
+                <a:solidFill>
+                  <a:srgbClr val="E63946"/>
+                </a:solidFill>
+                <a:latin typeface="PingFang TC"/>
+                <a:ea typeface="PingFang TC"/>
+                <a:cs typeface="PingFang TC"/>
+              </a:rPr>
+              <a:t>03</a:t>
+            </a:r>
+          </a:p>
+        </p:txBody>
+      </p:sp>
+      <p:sp>
+        <p:nvSpPr>
+          <p:cNvPr id="22" name="">
+            <a:extLst>
+              <a:ext uri="{FF2B5EF4-FFF2-40B4-BE49-F238E27FC236}">
+                <a16:creationId xmlns:a16="http://schemas.microsoft.com/office/drawing/2014/main" id="{DC700C09-5DC7-4A22-AA97-AC16015F50CC}"/>
+              </a:ext>
+            </a:extLst>
+          </p:cNvPr>
+          <p:cNvSpPr>
+            <a:spLocks noGrp="1"/>
+          </p:cNvSpPr>
+          <p:nvPr/>
+        </p:nvSpPr>
+        <p:spPr>
+          <a:xfrm>
+            <a:off x="1524000" y="4419600"/>
+            <a:ext cx="4191000" cy="457200"/>
+          </a:xfrm>
+          <a:prstGeom prst="rect">
+            <a:avLst/>
+          </a:prstGeom>
+          <a:noFill/>
+          <a:ln w="0">
+            <a:noFill/>
+          </a:ln>
+        </p:spPr>
+        <p:txBody>
+          <a:bodyPr>
+            <a:noAutofit/>
+          </a:bodyPr>
+          <a:lstStyle/>
+          <a:p>
+            <a:pPr>
+              <a:buNone/>
+              <a:defRPr sz="2175" b="1">
+                <a:solidFill>
+                  <a:srgbClr val="121212"/>
+                </a:solidFill>
+                <a:latin typeface="PingFang TC"/>
+                <a:ea typeface="PingFang TC"/>
+                <a:cs typeface="PingFang TC"/>
+              </a:defRPr>
+            </a:pPr>
+            <a:r>
+              <a:rPr sz="2175" b="1">
+                <a:solidFill>
+                  <a:srgbClr val="121212"/>
+                </a:solidFill>
+                <a:latin typeface="PingFang TC"/>
+                <a:ea typeface="PingFang TC"/>
+                <a:cs typeface="PingFang TC"/>
+              </a:rPr>
+              <a:t>4 旅宿與空間出租</a:t>
+            </a:r>
+          </a:p>
+        </p:txBody>
+      </p:sp>
+      <p:sp>
+        <p:nvSpPr>
           <p:cNvPr id="23" name="">
             <a:extLst>
               <a:ext uri="{FF2B5EF4-FFF2-40B4-BE49-F238E27FC236}">
-                <a16:creationId xmlns:a16="http://schemas.microsoft.com/office/drawing/2014/main" id="{52391823-4577-41D5-B5F1-22EFE691E292}"/>
-              </a:ext>
-            </a:extLst>
-          </p:cNvPr>
-          <p:cNvSpPr>
-            <a:spLocks noGrp="1"/>
-          </p:cNvSpPr>
-          <p:nvPr/>
-        </p:nvSpPr>
-        <p:spPr>
-          <a:xfrm>
-            <a:off x="609600" y="5572125"/>
-            <a:ext cx="10972800" cy="400050"/>
-          </a:xfrm>
-          <a:prstGeom prst="rect">
-            <a:avLst/>
-          </a:prstGeom>
-          <a:noFill/>
-          <a:ln w="0">
-            <a:noFill/>
-          </a:ln>
-        </p:spPr>
-        <p:txBody>
-          <a:bodyPr anchor="ctr">
-            <a:normAutofit fontScale="100000"/>
-          </a:bodyPr>
-          <a:lstStyle/>
-          <a:p>
-            <a:pPr algn="l">
-              <a:buNone/>
-              <a:defRPr sz="1575" b="1">
+                <a16:creationId xmlns:a16="http://schemas.microsoft.com/office/drawing/2014/main" id="{8668167D-14C4-4575-B53E-7AABB13896ED}"/>
+              </a:ext>
+            </a:extLst>
+          </p:cNvPr>
+          <p:cNvSpPr>
+            <a:spLocks noGrp="1"/>
+          </p:cNvSpPr>
+          <p:nvPr/>
+        </p:nvSpPr>
+        <p:spPr>
+          <a:xfrm>
+            <a:off x="838200" y="5019675"/>
+            <a:ext cx="4867275" cy="514350"/>
+          </a:xfrm>
+          <a:prstGeom prst="rect">
+            <a:avLst/>
+          </a:prstGeom>
+          <a:noFill/>
+          <a:ln w="0">
+            <a:noFill/>
+          </a:ln>
+        </p:spPr>
+        <p:txBody>
+          <a:bodyPr>
+            <a:noAutofit/>
+          </a:bodyPr>
+          <a:lstStyle/>
+          <a:p>
+            <a:pPr>
+              <a:buNone/>
+              <a:defRPr sz="1650" b="0">
+                <a:solidFill>
+                  <a:srgbClr val="626262"/>
+                </a:solidFill>
+                <a:latin typeface="PingFang TC"/>
+                <a:ea typeface="PingFang TC"/>
+                <a:cs typeface="PingFang TC"/>
+              </a:defRPr>
+            </a:pPr>
+            <a:r>
+              <a:rPr sz="1650" b="0">
+                <a:solidFill>
+                  <a:srgbClr val="626262"/>
+                </a:solidFill>
+                <a:latin typeface="PingFang TC"/>
+                <a:ea typeface="PingFang TC"/>
+                <a:cs typeface="PingFang TC"/>
+              </a:rPr>
+              <a:t>EliseAI（租屋管理的 AI）、Besty AI（短租房東）</a:t>
+            </a:r>
+          </a:p>
+        </p:txBody>
+      </p:sp>
+      <p:sp>
+        <p:nvSpPr>
+          <p:cNvPr id="24" name="">
+            <a:extLst>
+              <a:ext uri="{FF2B5EF4-FFF2-40B4-BE49-F238E27FC236}">
+                <a16:creationId xmlns:a16="http://schemas.microsoft.com/office/drawing/2014/main" id="{50382CE4-25B9-4F93-95EA-C2893B5516BB}"/>
+              </a:ext>
+            </a:extLst>
+          </p:cNvPr>
+          <p:cNvSpPr>
+            <a:spLocks noGrp="1"/>
+          </p:cNvSpPr>
+          <p:nvPr/>
+        </p:nvSpPr>
+        <p:spPr>
+          <a:xfrm>
+            <a:off x="838200" y="5629275"/>
+            <a:ext cx="4905375" cy="19050"/>
+          </a:xfrm>
+          <a:prstGeom prst="rect">
+            <a:avLst/>
+          </a:prstGeom>
+          <a:solidFill>
+            <a:srgbClr val="D9D5CF"/>
+          </a:solidFill>
+          <a:ln w="0">
+            <a:noFill/>
+          </a:ln>
+        </p:spPr>
+        <p:txBody>
+          <a:bodyPr/>
+          <a:p/>
+        </p:txBody>
+      </p:sp>
+      <p:sp>
+        <p:nvSpPr>
+          <p:cNvPr id="25" name="">
+            <a:extLst>
+              <a:ext uri="{FF2B5EF4-FFF2-40B4-BE49-F238E27FC236}">
+                <a16:creationId xmlns:a16="http://schemas.microsoft.com/office/drawing/2014/main" id="{0554D802-4E35-4493-A040-EBB9030F3F4E}"/>
+              </a:ext>
+            </a:extLst>
+          </p:cNvPr>
+          <p:cNvSpPr>
+            <a:spLocks noGrp="1"/>
+          </p:cNvSpPr>
+          <p:nvPr/>
+        </p:nvSpPr>
+        <p:spPr>
+          <a:xfrm>
+            <a:off x="6210300" y="4248150"/>
+            <a:ext cx="5372100" cy="1657350"/>
+          </a:xfrm>
+          <a:prstGeom prst="rect">
+            <a:avLst/>
+          </a:prstGeom>
+          <a:solidFill>
+            <a:srgbClr val="FFFFFF"/>
+          </a:solidFill>
+          <a:ln w="0">
+            <a:noFill/>
+          </a:ln>
+        </p:spPr>
+        <p:txBody>
+          <a:bodyPr/>
+          <a:p/>
+        </p:txBody>
+      </p:sp>
+      <p:sp>
+        <p:nvSpPr>
+          <p:cNvPr id="26" name="">
+            <a:extLst>
+              <a:ext uri="{FF2B5EF4-FFF2-40B4-BE49-F238E27FC236}">
+                <a16:creationId xmlns:a16="http://schemas.microsoft.com/office/drawing/2014/main" id="{42E7A137-3813-409A-95BC-2CF6A7879627}"/>
+              </a:ext>
+            </a:extLst>
+          </p:cNvPr>
+          <p:cNvSpPr>
+            <a:spLocks noGrp="1"/>
+          </p:cNvSpPr>
+          <p:nvPr/>
+        </p:nvSpPr>
+        <p:spPr>
+          <a:xfrm>
+            <a:off x="6210300" y="4248150"/>
+            <a:ext cx="47625" cy="1657350"/>
+          </a:xfrm>
+          <a:prstGeom prst="rect">
+            <a:avLst/>
+          </a:prstGeom>
+          <a:solidFill>
+            <a:srgbClr val="E63946"/>
+          </a:solidFill>
+          <a:ln w="0">
+            <a:noFill/>
+          </a:ln>
+        </p:spPr>
+        <p:txBody>
+          <a:bodyPr/>
+          <a:p/>
+        </p:txBody>
+      </p:sp>
+      <p:sp>
+        <p:nvSpPr>
+          <p:cNvPr id="27" name="">
+            <a:extLst>
+              <a:ext uri="{FF2B5EF4-FFF2-40B4-BE49-F238E27FC236}">
+                <a16:creationId xmlns:a16="http://schemas.microsoft.com/office/drawing/2014/main" id="{D015D6CB-B4CB-48C3-BF11-5D852A8D654C}"/>
+              </a:ext>
+            </a:extLst>
+          </p:cNvPr>
+          <p:cNvSpPr>
+            <a:spLocks noGrp="1"/>
+          </p:cNvSpPr>
+          <p:nvPr/>
+        </p:nvSpPr>
+        <p:spPr>
+          <a:xfrm>
+            <a:off x="6419850" y="4419600"/>
+            <a:ext cx="647700" cy="428625"/>
+          </a:xfrm>
+          <a:prstGeom prst="rect">
+            <a:avLst/>
+          </a:prstGeom>
+          <a:noFill/>
+          <a:ln w="0">
+            <a:noFill/>
+          </a:ln>
+        </p:spPr>
+        <p:txBody>
+          <a:bodyPr>
+            <a:noAutofit/>
+          </a:bodyPr>
+          <a:lstStyle/>
+          <a:p>
+            <a:pPr>
+              <a:buNone/>
+              <a:defRPr sz="2025" b="1">
+                <a:solidFill>
+                  <a:srgbClr val="E63946"/>
+                </a:solidFill>
+                <a:latin typeface="PingFang TC"/>
+                <a:ea typeface="PingFang TC"/>
+                <a:cs typeface="PingFang TC"/>
+              </a:defRPr>
+            </a:pPr>
+            <a:r>
+              <a:rPr sz="2025" b="1">
+                <a:solidFill>
+                  <a:srgbClr val="E63946"/>
+                </a:solidFill>
+                <a:latin typeface="PingFang TC"/>
+                <a:ea typeface="PingFang TC"/>
+                <a:cs typeface="PingFang TC"/>
+              </a:rPr>
+              <a:t>04</a:t>
+            </a:r>
+          </a:p>
+        </p:txBody>
+      </p:sp>
+      <p:sp>
+        <p:nvSpPr>
+          <p:cNvPr id="28" name="">
+            <a:extLst>
+              <a:ext uri="{FF2B5EF4-FFF2-40B4-BE49-F238E27FC236}">
+                <a16:creationId xmlns:a16="http://schemas.microsoft.com/office/drawing/2014/main" id="{6DA70BE6-B36E-447E-BB42-1ACF6D1DC1FE}"/>
+              </a:ext>
+            </a:extLst>
+          </p:cNvPr>
+          <p:cNvSpPr>
+            <a:spLocks noGrp="1"/>
+          </p:cNvSpPr>
+          <p:nvPr/>
+        </p:nvSpPr>
+        <p:spPr>
+          <a:xfrm>
+            <a:off x="7124700" y="4419600"/>
+            <a:ext cx="4191000" cy="457200"/>
+          </a:xfrm>
+          <a:prstGeom prst="rect">
+            <a:avLst/>
+          </a:prstGeom>
+          <a:noFill/>
+          <a:ln w="0">
+            <a:noFill/>
+          </a:ln>
+        </p:spPr>
+        <p:txBody>
+          <a:bodyPr>
+            <a:noAutofit/>
+          </a:bodyPr>
+          <a:lstStyle/>
+          <a:p>
+            <a:pPr>
+              <a:buNone/>
+              <a:defRPr sz="2175" b="1">
                 <a:solidFill>
                   <a:srgbClr val="121212"/>
                 </a:solidFill>
@@ -14480,7 +15430,7 @@
               </a:defRPr>
             </a:pPr>
             <a:r>
-              <a:rPr sz="1575" b="1">
+              <a:rPr sz="2175" b="1">
                 <a:solidFill>
                   <a:srgbClr val="121212"/>
                 </a:solidFill>
@@ -14488,9 +15438,101 @@
                 <a:ea typeface="PingFang TC"/>
                 <a:cs typeface="PingFang TC"/>
               </a:rPr>
-              <a:t>期末報告：每個方向都要拿一家群島公司當對照。</a:t>
-            </a:r>
-          </a:p>
+              <a:t>其他產業線</a:t>
+            </a:r>
+          </a:p>
+        </p:txBody>
+      </p:sp>
+      <p:sp>
+        <p:nvSpPr>
+          <p:cNvPr id="29" name="">
+            <a:extLst>
+              <a:ext uri="{FF2B5EF4-FFF2-40B4-BE49-F238E27FC236}">
+                <a16:creationId xmlns:a16="http://schemas.microsoft.com/office/drawing/2014/main" id="{70B6D5FA-EA01-4907-A6CB-D4041C18C5ED}"/>
+              </a:ext>
+            </a:extLst>
+          </p:cNvPr>
+          <p:cNvSpPr>
+            <a:spLocks noGrp="1"/>
+          </p:cNvSpPr>
+          <p:nvPr/>
+        </p:nvSpPr>
+        <p:spPr>
+          <a:xfrm>
+            <a:off x="6438900" y="5019675"/>
+            <a:ext cx="4867275" cy="514350"/>
+          </a:xfrm>
+          <a:prstGeom prst="rect">
+            <a:avLst/>
+          </a:prstGeom>
+          <a:noFill/>
+          <a:ln w="0">
+            <a:noFill/>
+          </a:ln>
+        </p:spPr>
+        <p:txBody>
+          <a:bodyPr>
+            <a:noAutofit/>
+          </a:bodyPr>
+          <a:lstStyle/>
+          <a:p>
+            <a:pPr>
+              <a:buNone/>
+              <a:defRPr sz="1650" b="0">
+                <a:solidFill>
+                  <a:srgbClr val="626262"/>
+                </a:solidFill>
+                <a:latin typeface="PingFang TC"/>
+                <a:ea typeface="PingFang TC"/>
+                <a:cs typeface="PingFang TC"/>
+              </a:defRPr>
+            </a:pPr>
+            <a:r>
+              <a:rPr sz="1650" b="0">
+                <a:solidFill>
+                  <a:srgbClr val="626262"/>
+                </a:solidFill>
+                <a:latin typeface="PingFang TC"/>
+                <a:ea typeface="PingFang TC"/>
+                <a:cs typeface="PingFang TC"/>
+              </a:rPr>
+              <a:t>零工排班：Skello（法）｜在地服務：Avoca、Fresha｜找不到對照的線＝美國歐洲也還沒做好＝你們的機會</a:t>
+            </a:r>
+          </a:p>
+        </p:txBody>
+      </p:sp>
+      <p:sp>
+        <p:nvSpPr>
+          <p:cNvPr id="30" name="">
+            <a:extLst>
+              <a:ext uri="{FF2B5EF4-FFF2-40B4-BE49-F238E27FC236}">
+                <a16:creationId xmlns:a16="http://schemas.microsoft.com/office/drawing/2014/main" id="{DAE4AA41-CF0B-4EB5-871A-7FD226B0079B}"/>
+              </a:ext>
+            </a:extLst>
+          </p:cNvPr>
+          <p:cNvSpPr>
+            <a:spLocks noGrp="1"/>
+          </p:cNvSpPr>
+          <p:nvPr/>
+        </p:nvSpPr>
+        <p:spPr>
+          <a:xfrm>
+            <a:off x="6438900" y="5629275"/>
+            <a:ext cx="4905375" cy="19050"/>
+          </a:xfrm>
+          <a:prstGeom prst="rect">
+            <a:avLst/>
+          </a:prstGeom>
+          <a:solidFill>
+            <a:srgbClr val="D9D5CF"/>
+          </a:solidFill>
+          <a:ln w="0">
+            <a:noFill/>
+          </a:ln>
+        </p:spPr>
+        <p:txBody>
+          <a:bodyPr/>
+          <a:p/>
         </p:txBody>
       </p:sp>
     </p:spTree>
@@ -14502,6 +15544,1944 @@
 </file>
 
 <file path=ppt/slides/slide38.xml><?xml version="1.0" encoding="utf-8"?>
+<p:sld xmlns:a="http://schemas.openxmlformats.org/drawingml/2006/main" xmlns:p="http://schemas.openxmlformats.org/presentationml/2006/main" xmlns:r="http://schemas.openxmlformats.org/officeDocument/2006/relationships">
+  <p:cSld>
+    <p:spTree>
+      <p:nvGrpSpPr>
+        <p:cNvPr id="1" name=""/>
+        <p:cNvGrpSpPr/>
+        <p:nvPr/>
+      </p:nvGrpSpPr>
+      <p:grpSpPr/>
+      <p:sp>
+        <p:nvSpPr>
+          <p:cNvPr id="14" name="">
+            <a:extLst>
+              <a:ext uri="{FF2B5EF4-FFF2-40B4-BE49-F238E27FC236}">
+                <a16:creationId xmlns:a16="http://schemas.microsoft.com/office/drawing/2014/main" id="{D99C096F-6EB5-41EA-B969-490BF1A5FE7B}"/>
+              </a:ext>
+            </a:extLst>
+          </p:cNvPr>
+          <p:cNvSpPr>
+            <a:spLocks noGrp="1"/>
+          </p:cNvSpPr>
+          <p:nvPr/>
+        </p:nvSpPr>
+        <p:spPr>
+          <a:xfrm>
+            <a:off x="0" y="0"/>
+            <a:ext cx="12192000" cy="6858000"/>
+          </a:xfrm>
+          <a:prstGeom prst="rect">
+            <a:avLst/>
+          </a:prstGeom>
+          <a:solidFill>
+            <a:srgbClr val="F6F3EE"/>
+          </a:solidFill>
+          <a:ln w="9525">
+            <a:solidFill>
+              <a:srgbClr val="F6F3EE"/>
+            </a:solidFill>
+          </a:ln>
+        </p:spPr>
+        <p:txBody>
+          <a:bodyPr/>
+          <a:p/>
+        </p:txBody>
+      </p:sp>
+      <p:sp>
+        <p:nvSpPr>
+          <p:cNvPr id="2" name="">
+            <a:extLst>
+              <a:ext uri="{FF2B5EF4-FFF2-40B4-BE49-F238E27FC236}">
+                <a16:creationId xmlns:a16="http://schemas.microsoft.com/office/drawing/2014/main" id="{F945F193-D6A2-4A5E-BD73-6B69757A3820}"/>
+              </a:ext>
+            </a:extLst>
+          </p:cNvPr>
+          <p:cNvSpPr>
+            <a:spLocks noGrp="1"/>
+          </p:cNvSpPr>
+          <p:nvPr/>
+        </p:nvSpPr>
+        <p:spPr>
+          <a:xfrm>
+            <a:off x="609600" y="285750"/>
+            <a:ext cx="10287000" cy="285750"/>
+          </a:xfrm>
+          <a:prstGeom prst="rect">
+            <a:avLst/>
+          </a:prstGeom>
+          <a:noFill/>
+          <a:ln w="0">
+            <a:noFill/>
+          </a:ln>
+        </p:spPr>
+        <p:txBody>
+          <a:bodyPr anchor="ctr">
+            <a:normAutofit fontScale="94444"/>
+          </a:bodyPr>
+          <a:lstStyle/>
+          <a:p>
+            <a:pPr algn="l">
+              <a:buNone/>
+              <a:defRPr sz="1350" b="1">
+                <a:solidFill>
+                  <a:srgbClr val="E63946"/>
+                </a:solidFill>
+                <a:latin typeface="PingFang TC"/>
+                <a:ea typeface="PingFang TC"/>
+                <a:cs typeface="PingFang TC"/>
+              </a:defRPr>
+            </a:pPr>
+            <a:r>
+              <a:rPr sz="1350" b="1">
+                <a:solidFill>
+                  <a:srgbClr val="E63946"/>
+                </a:solidFill>
+                <a:latin typeface="PingFang TC"/>
+                <a:ea typeface="PingFang TC"/>
+                <a:cs typeface="PingFang TC"/>
+              </a:rPr>
+              <a:t>WEEK 6  /  AI 新創地圖</a:t>
+            </a:r>
+          </a:p>
+        </p:txBody>
+      </p:sp>
+      <p:sp>
+        <p:nvSpPr>
+          <p:cNvPr id="3" name="">
+            <a:extLst>
+              <a:ext uri="{FF2B5EF4-FFF2-40B4-BE49-F238E27FC236}">
+                <a16:creationId xmlns:a16="http://schemas.microsoft.com/office/drawing/2014/main" id="{EBE0DE06-5026-47E2-9F71-7631AE1BDAE2}"/>
+              </a:ext>
+            </a:extLst>
+          </p:cNvPr>
+          <p:cNvSpPr>
+            <a:spLocks noGrp="1"/>
+          </p:cNvSpPr>
+          <p:nvPr/>
+        </p:nvSpPr>
+        <p:spPr>
+          <a:xfrm>
+            <a:off x="609600" y="838200"/>
+            <a:ext cx="10972800" cy="762000"/>
+          </a:xfrm>
+          <a:prstGeom prst="rect">
+            <a:avLst/>
+          </a:prstGeom>
+          <a:noFill/>
+          <a:ln w="0">
+            <a:noFill/>
+          </a:ln>
+        </p:spPr>
+        <p:txBody>
+          <a:bodyPr anchor="ctr">
+            <a:normAutofit fontScale="100000"/>
+          </a:bodyPr>
+          <a:lstStyle/>
+          <a:p>
+            <a:pPr algn="l">
+              <a:buNone/>
+              <a:defRPr sz="3450" b="1">
+                <a:solidFill>
+                  <a:srgbClr val="121212"/>
+                </a:solidFill>
+                <a:latin typeface="PingFang TC"/>
+                <a:ea typeface="PingFang TC"/>
+                <a:cs typeface="PingFang TC"/>
+              </a:defRPr>
+            </a:pPr>
+            <a:r>
+              <a:rPr sz="3450" b="1">
+                <a:solidFill>
+                  <a:srgbClr val="121212"/>
+                </a:solidFill>
+                <a:latin typeface="PingFang TC"/>
+                <a:ea typeface="PingFang TC"/>
+                <a:cs typeface="PingFang TC"/>
+              </a:rPr>
+              <a:t>台灣在哪一層？</a:t>
+            </a:r>
+          </a:p>
+        </p:txBody>
+      </p:sp>
+      <p:sp>
+        <p:nvSpPr>
+          <p:cNvPr id="4" name="">
+            <a:extLst>
+              <a:ext uri="{FF2B5EF4-FFF2-40B4-BE49-F238E27FC236}">
+                <a16:creationId xmlns:a16="http://schemas.microsoft.com/office/drawing/2014/main" id="{E0ED7F9D-7CE4-45F4-B7CB-9761EE5DF652}"/>
+              </a:ext>
+            </a:extLst>
+          </p:cNvPr>
+          <p:cNvSpPr>
+            <a:spLocks noGrp="1"/>
+          </p:cNvSpPr>
+          <p:nvPr/>
+        </p:nvSpPr>
+        <p:spPr>
+          <a:xfrm>
+            <a:off x="609600" y="1619250"/>
+            <a:ext cx="10972800" cy="476250"/>
+          </a:xfrm>
+          <a:prstGeom prst="rect">
+            <a:avLst/>
+          </a:prstGeom>
+          <a:noFill/>
+          <a:ln w="0">
+            <a:noFill/>
+          </a:ln>
+        </p:spPr>
+        <p:txBody>
+          <a:bodyPr anchor="ctr">
+            <a:normAutofit fontScale="100000"/>
+          </a:bodyPr>
+          <a:lstStyle/>
+          <a:p>
+            <a:pPr algn="l">
+              <a:buNone/>
+              <a:defRPr sz="1800" b="0">
+                <a:solidFill>
+                  <a:srgbClr val="626262"/>
+                </a:solidFill>
+                <a:latin typeface="PingFang TC"/>
+                <a:ea typeface="PingFang TC"/>
+                <a:cs typeface="PingFang TC"/>
+              </a:defRPr>
+            </a:pPr>
+            <a:r>
+              <a:rPr sz="1800" b="0">
+                <a:solidFill>
+                  <a:srgbClr val="626262"/>
+                </a:solidFill>
+                <a:latin typeface="PingFang TC"/>
+                <a:ea typeface="PingFang TC"/>
+                <a:cs typeface="PingFang TC"/>
+              </a:rPr>
+              <a:t>左邊是現況，右邊是本課的推論——期末研究要用證據證明或推翻它</a:t>
+            </a:r>
+          </a:p>
+        </p:txBody>
+      </p:sp>
+      <p:sp>
+        <p:nvSpPr>
+          <p:cNvPr id="5" name="">
+            <a:extLst>
+              <a:ext uri="{FF2B5EF4-FFF2-40B4-BE49-F238E27FC236}">
+                <a16:creationId xmlns:a16="http://schemas.microsoft.com/office/drawing/2014/main" id="{A2DC1420-12C3-4916-8E72-AE7443D5B25C}"/>
+              </a:ext>
+            </a:extLst>
+          </p:cNvPr>
+          <p:cNvSpPr>
+            <a:spLocks noGrp="1"/>
+          </p:cNvSpPr>
+          <p:nvPr/>
+        </p:nvSpPr>
+        <p:spPr>
+          <a:xfrm>
+            <a:off x="609600" y="6286500"/>
+            <a:ext cx="10972800" cy="19050"/>
+          </a:xfrm>
+          <a:prstGeom prst="rect">
+            <a:avLst/>
+          </a:prstGeom>
+          <a:solidFill>
+            <a:srgbClr val="D6D0C7"/>
+          </a:solidFill>
+          <a:ln w="9525">
+            <a:solidFill>
+              <a:srgbClr val="D6D0C7"/>
+            </a:solidFill>
+          </a:ln>
+        </p:spPr>
+        <p:txBody>
+          <a:bodyPr/>
+          <a:p/>
+        </p:txBody>
+      </p:sp>
+      <p:sp>
+        <p:nvSpPr>
+          <p:cNvPr id="6" name="">
+            <a:extLst>
+              <a:ext uri="{FF2B5EF4-FFF2-40B4-BE49-F238E27FC236}">
+                <a16:creationId xmlns:a16="http://schemas.microsoft.com/office/drawing/2014/main" id="{2F07DDDE-8D75-462F-91D5-4B36B43575EE}"/>
+              </a:ext>
+            </a:extLst>
+          </p:cNvPr>
+          <p:cNvSpPr>
+            <a:spLocks noGrp="1"/>
+          </p:cNvSpPr>
+          <p:nvPr/>
+        </p:nvSpPr>
+        <p:spPr>
+          <a:xfrm>
+            <a:off x="609600" y="6362700"/>
+            <a:ext cx="2381250" cy="209550"/>
+          </a:xfrm>
+          <a:prstGeom prst="rect">
+            <a:avLst/>
+          </a:prstGeom>
+          <a:noFill/>
+          <a:ln w="0">
+            <a:noFill/>
+          </a:ln>
+        </p:spPr>
+        <p:txBody>
+          <a:bodyPr anchor="ctr">
+            <a:normAutofit fontScale="86111"/>
+          </a:bodyPr>
+          <a:lstStyle/>
+          <a:p>
+            <a:pPr algn="l">
+              <a:buNone/>
+              <a:defRPr sz="900" b="0">
+                <a:solidFill>
+                  <a:srgbClr val="626262"/>
+                </a:solidFill>
+                <a:latin typeface="PingFang TC"/>
+                <a:ea typeface="PingFang TC"/>
+                <a:cs typeface="PingFang TC"/>
+              </a:defRPr>
+            </a:pPr>
+            <a:r>
+              <a:rPr sz="900" b="0">
+                <a:solidFill>
+                  <a:srgbClr val="626262"/>
+                </a:solidFill>
+                <a:latin typeface="PingFang TC"/>
+                <a:ea typeface="PingFang TC"/>
+                <a:cs typeface="PingFang TC"/>
+              </a:rPr>
+              <a:t>Startup Journey Lab</a:t>
+            </a:r>
+          </a:p>
+        </p:txBody>
+      </p:sp>
+      <p:sp>
+        <p:nvSpPr>
+          <p:cNvPr id="7" name="">
+            <a:extLst>
+              <a:ext uri="{FF2B5EF4-FFF2-40B4-BE49-F238E27FC236}">
+                <a16:creationId xmlns:a16="http://schemas.microsoft.com/office/drawing/2014/main" id="{C5FE7A55-B727-4B6F-9EE2-D39F3300B62E}"/>
+              </a:ext>
+            </a:extLst>
+          </p:cNvPr>
+          <p:cNvSpPr>
+            <a:spLocks noGrp="1"/>
+          </p:cNvSpPr>
+          <p:nvPr/>
+        </p:nvSpPr>
+        <p:spPr>
+          <a:xfrm>
+            <a:off x="10477500" y="6362700"/>
+            <a:ext cx="1104900" cy="209550"/>
+          </a:xfrm>
+          <a:prstGeom prst="rect">
+            <a:avLst/>
+          </a:prstGeom>
+          <a:noFill/>
+          <a:ln w="0">
+            <a:noFill/>
+          </a:ln>
+        </p:spPr>
+        <p:txBody>
+          <a:bodyPr anchor="ctr">
+            <a:normAutofit fontScale="86111"/>
+          </a:bodyPr>
+          <a:lstStyle/>
+          <a:p>
+            <a:pPr algn="r">
+              <a:buNone/>
+              <a:defRPr sz="900" b="0">
+                <a:solidFill>
+                  <a:srgbClr val="626262"/>
+                </a:solidFill>
+                <a:latin typeface="PingFang TC"/>
+                <a:ea typeface="PingFang TC"/>
+                <a:cs typeface="PingFang TC"/>
+              </a:defRPr>
+            </a:pPr>
+            <a:r>
+              <a:rPr sz="900" b="0">
+                <a:solidFill>
+                  <a:srgbClr val="626262"/>
+                </a:solidFill>
+                <a:latin typeface="PingFang TC"/>
+                <a:ea typeface="PingFang TC"/>
+                <a:cs typeface="PingFang TC"/>
+              </a:rPr>
+              <a:t>13 / 15</a:t>
+            </a:r>
+          </a:p>
+        </p:txBody>
+      </p:sp>
+      <p:sp>
+        <p:nvSpPr>
+          <p:cNvPr id="8" name="">
+            <a:extLst>
+              <a:ext uri="{FF2B5EF4-FFF2-40B4-BE49-F238E27FC236}">
+                <a16:creationId xmlns:a16="http://schemas.microsoft.com/office/drawing/2014/main" id="{E25F88BD-8320-4506-A81F-3D2EC6975FEA}"/>
+              </a:ext>
+            </a:extLst>
+          </p:cNvPr>
+          <p:cNvSpPr>
+            <a:spLocks noGrp="1"/>
+          </p:cNvSpPr>
+          <p:nvPr/>
+        </p:nvSpPr>
+        <p:spPr>
+          <a:xfrm>
+            <a:off x="609600" y="2428875"/>
+            <a:ext cx="4476750" cy="457200"/>
+          </a:xfrm>
+          <a:prstGeom prst="rect">
+            <a:avLst/>
+          </a:prstGeom>
+          <a:noFill/>
+          <a:ln w="0">
+            <a:noFill/>
+          </a:ln>
+        </p:spPr>
+        <p:txBody>
+          <a:bodyPr anchor="ctr">
+            <a:normAutofit fontScale="100000"/>
+          </a:bodyPr>
+          <a:lstStyle/>
+          <a:p>
+            <a:pPr algn="l">
+              <a:buNone/>
+              <a:defRPr sz="2325" b="1">
+                <a:solidFill>
+                  <a:srgbClr val="E63946"/>
+                </a:solidFill>
+                <a:latin typeface="PingFang TC"/>
+                <a:ea typeface="PingFang TC"/>
+                <a:cs typeface="PingFang TC"/>
+              </a:defRPr>
+            </a:pPr>
+            <a:r>
+              <a:rPr sz="2325" b="1">
+                <a:solidFill>
+                  <a:srgbClr val="E63946"/>
+                </a:solidFill>
+                <a:latin typeface="PingFang TC"/>
+                <a:ea typeface="PingFang TC"/>
+                <a:cs typeface="PingFang TC"/>
+              </a:rPr>
+              <a:t>台灣強的地方：底層硬體</a:t>
+            </a:r>
+          </a:p>
+        </p:txBody>
+      </p:sp>
+      <p:sp>
+        <p:nvSpPr>
+          <p:cNvPr id="9" name="">
+            <a:extLst>
+              <a:ext uri="{FF2B5EF4-FFF2-40B4-BE49-F238E27FC236}">
+                <a16:creationId xmlns:a16="http://schemas.microsoft.com/office/drawing/2014/main" id="{0993229B-BD18-4B58-BFFD-54C5C43644DE}"/>
+              </a:ext>
+            </a:extLst>
+          </p:cNvPr>
+          <p:cNvSpPr>
+            <a:spLocks noGrp="1"/>
+          </p:cNvSpPr>
+          <p:nvPr/>
+        </p:nvSpPr>
+        <p:spPr>
+          <a:xfrm>
+            <a:off x="609600" y="3000375"/>
+            <a:ext cx="4762500" cy="2238375"/>
+          </a:xfrm>
+          <a:prstGeom prst="rect">
+            <a:avLst/>
+          </a:prstGeom>
+          <a:noFill/>
+          <a:ln w="0">
+            <a:noFill/>
+          </a:ln>
+        </p:spPr>
+        <p:txBody>
+          <a:bodyPr anchor="ctr">
+            <a:normAutofit fontScale="100000"/>
+          </a:bodyPr>
+          <a:lstStyle/>
+          <a:p>
+            <a:r>
+              <a:rPr sz="1650" b="0">
+                <a:solidFill>
+                  <a:srgbClr val="121212"/>
+                </a:solidFill>
+                <a:latin typeface="PingFang TC"/>
+                <a:ea typeface="PingFang TC"/>
+                <a:cs typeface="PingFang TC"/>
+              </a:rPr>
+              <a:t>• 晶片代工：先進 AI 晶片大多在台灣製造</a:t>
+            </a:r>
+          </a:p>
+          <a:p>
+            <a:r>
+              <a:rPr sz="1650" b="0">
+                <a:solidFill>
+                  <a:srgbClr val="121212"/>
+                </a:solidFill>
+                <a:latin typeface="PingFang TC"/>
+                <a:ea typeface="PingFang TC"/>
+                <a:cs typeface="PingFang TC"/>
+              </a:rPr>
+              <a:t>• 伺服器和電子零件的供應鏈</a:t>
+            </a:r>
+          </a:p>
+          <a:p>
+            <a:r>
+              <a:rPr sz="1650" b="0">
+                <a:solidFill>
+                  <a:srgbClr val="121212"/>
+                </a:solidFill>
+                <a:latin typeface="PingFang TC"/>
+                <a:ea typeface="PingFang TC"/>
+                <a:cs typeface="PingFang TC"/>
+              </a:rPr>
+              <a:t>• 也就是「發電廠」和「引擎」背後的工廠</a:t>
+            </a:r>
+          </a:p>
+          <a:p>
+            <a:r>
+              <a:rPr sz="1650" b="0">
+                <a:solidFill>
+                  <a:srgbClr val="121212"/>
+                </a:solidFill>
+                <a:latin typeface="PingFang TC"/>
+                <a:ea typeface="PingFang TC"/>
+                <a:cs typeface="PingFang TC"/>
+              </a:rPr>
+              <a:t>• 但這一層的新創門檻極高</a:t>
+            </a:r>
+          </a:p>
+        </p:txBody>
+      </p:sp>
+      <p:sp>
+        <p:nvSpPr>
+          <p:cNvPr id="10" name="">
+            <a:extLst>
+              <a:ext uri="{FF2B5EF4-FFF2-40B4-BE49-F238E27FC236}">
+                <a16:creationId xmlns:a16="http://schemas.microsoft.com/office/drawing/2014/main" id="{92A462A0-899F-4C1D-9C7C-25D4058895FB}"/>
+              </a:ext>
+            </a:extLst>
+          </p:cNvPr>
+          <p:cNvSpPr>
+            <a:spLocks noGrp="1"/>
+          </p:cNvSpPr>
+          <p:nvPr/>
+        </p:nvSpPr>
+        <p:spPr>
+          <a:xfrm>
+            <a:off x="5953125" y="2428875"/>
+            <a:ext cx="38100" cy="2952750"/>
+          </a:xfrm>
+          <a:prstGeom prst="rect">
+            <a:avLst/>
+          </a:prstGeom>
+          <a:solidFill>
+            <a:srgbClr val="D6D0C7"/>
+          </a:solidFill>
+          <a:ln w="9525">
+            <a:solidFill>
+              <a:srgbClr val="D6D0C7"/>
+            </a:solidFill>
+          </a:ln>
+        </p:spPr>
+        <p:txBody>
+          <a:bodyPr/>
+          <a:p/>
+        </p:txBody>
+      </p:sp>
+      <p:sp>
+        <p:nvSpPr>
+          <p:cNvPr id="11" name="">
+            <a:extLst>
+              <a:ext uri="{FF2B5EF4-FFF2-40B4-BE49-F238E27FC236}">
+                <a16:creationId xmlns:a16="http://schemas.microsoft.com/office/drawing/2014/main" id="{B13E5783-0243-4D15-B1DC-FFBD06FE9F16}"/>
+              </a:ext>
+            </a:extLst>
+          </p:cNvPr>
+          <p:cNvSpPr>
+            <a:spLocks noGrp="1"/>
+          </p:cNvSpPr>
+          <p:nvPr/>
+        </p:nvSpPr>
+        <p:spPr>
+          <a:xfrm>
+            <a:off x="6572250" y="2428875"/>
+            <a:ext cx="4476750" cy="457200"/>
+          </a:xfrm>
+          <a:prstGeom prst="rect">
+            <a:avLst/>
+          </a:prstGeom>
+          <a:noFill/>
+          <a:ln w="0">
+            <a:noFill/>
+          </a:ln>
+        </p:spPr>
+        <p:txBody>
+          <a:bodyPr anchor="ctr">
+            <a:normAutofit fontScale="100000"/>
+          </a:bodyPr>
+          <a:lstStyle/>
+          <a:p>
+            <a:pPr algn="l">
+              <a:buNone/>
+              <a:defRPr sz="2325" b="1">
+                <a:solidFill>
+                  <a:srgbClr val="14395B"/>
+                </a:solidFill>
+                <a:latin typeface="PingFang TC"/>
+                <a:ea typeface="PingFang TC"/>
+                <a:cs typeface="PingFang TC"/>
+              </a:defRPr>
+            </a:pPr>
+            <a:r>
+              <a:rPr sz="2325" b="1">
+                <a:solidFill>
+                  <a:srgbClr val="14395B"/>
+                </a:solidFill>
+                <a:latin typeface="PingFang TC"/>
+                <a:ea typeface="PingFang TC"/>
+                <a:cs typeface="PingFang TC"/>
+              </a:rPr>
+              <a:t>台灣的機會（推論）：上層應用</a:t>
+            </a:r>
+          </a:p>
+        </p:txBody>
+      </p:sp>
+      <p:sp>
+        <p:nvSpPr>
+          <p:cNvPr id="12" name="">
+            <a:extLst>
+              <a:ext uri="{FF2B5EF4-FFF2-40B4-BE49-F238E27FC236}">
+                <a16:creationId xmlns:a16="http://schemas.microsoft.com/office/drawing/2014/main" id="{204B0874-5189-41D9-9F8F-D809113B0CB0}"/>
+              </a:ext>
+            </a:extLst>
+          </p:cNvPr>
+          <p:cNvSpPr>
+            <a:spLocks noGrp="1"/>
+          </p:cNvSpPr>
+          <p:nvPr/>
+        </p:nvSpPr>
+        <p:spPr>
+          <a:xfrm>
+            <a:off x="6572250" y="3000375"/>
+            <a:ext cx="4762500" cy="2238375"/>
+          </a:xfrm>
+          <a:prstGeom prst="rect">
+            <a:avLst/>
+          </a:prstGeom>
+          <a:noFill/>
+          <a:ln w="0">
+            <a:noFill/>
+          </a:ln>
+        </p:spPr>
+        <p:txBody>
+          <a:bodyPr anchor="ctr">
+            <a:normAutofit fontScale="100000"/>
+          </a:bodyPr>
+          <a:lstStyle/>
+          <a:p>
+            <a:r>
+              <a:rPr sz="1650" b="0">
+                <a:solidFill>
+                  <a:srgbClr val="121212"/>
+                </a:solidFill>
+                <a:latin typeface="PingFang TC"/>
+                <a:ea typeface="PingFang TC"/>
+                <a:cs typeface="PingFang TC"/>
+              </a:rPr>
+              <a:t>• 中文、在地化的垂直 Agent</a:t>
+            </a:r>
+          </a:p>
+          <a:p>
+            <a:r>
+              <a:rPr sz="1650" b="0">
+                <a:solidFill>
+                  <a:srgbClr val="121212"/>
+                </a:solidFill>
+                <a:latin typeface="PingFang TC"/>
+                <a:ea typeface="PingFang TC"/>
+                <a:cs typeface="PingFang TC"/>
+              </a:rPr>
+              <a:t>• 中小企業和小店非常多，是第一批客戶</a:t>
+            </a:r>
+          </a:p>
+          <a:p>
+            <a:r>
+              <a:rPr sz="1650" b="0">
+                <a:solidFill>
+                  <a:srgbClr val="121212"/>
+                </a:solidFill>
+                <a:latin typeface="PingFang TC"/>
+                <a:ea typeface="PingFang TC"/>
+                <a:cs typeface="PingFang TC"/>
+              </a:rPr>
+              <a:t>• 產業 know-how：餐飲、零售、旅宿、製造</a:t>
+            </a:r>
+          </a:p>
+          <a:p>
+            <a:r>
+              <a:rPr sz="1650" b="0">
+                <a:solidFill>
+                  <a:srgbClr val="121212"/>
+                </a:solidFill>
+                <a:latin typeface="PingFang TC"/>
+                <a:ea typeface="PingFang TC"/>
+                <a:cs typeface="PingFang TC"/>
+              </a:rPr>
+              <a:t>• 小團隊進得去：用現成的引擎和零件</a:t>
+            </a:r>
+          </a:p>
+        </p:txBody>
+      </p:sp>
+      <p:sp>
+        <p:nvSpPr>
+          <p:cNvPr id="13" name="">
+            <a:extLst>
+              <a:ext uri="{FF2B5EF4-FFF2-40B4-BE49-F238E27FC236}">
+                <a16:creationId xmlns:a16="http://schemas.microsoft.com/office/drawing/2014/main" id="{5A63A13F-D1D5-4F06-BFE8-CD5525CCAD8B}"/>
+              </a:ext>
+            </a:extLst>
+          </p:cNvPr>
+          <p:cNvSpPr>
+            <a:spLocks noGrp="1"/>
+          </p:cNvSpPr>
+          <p:nvPr/>
+        </p:nvSpPr>
+        <p:spPr>
+          <a:xfrm>
+            <a:off x="609600" y="5600700"/>
+            <a:ext cx="10972800" cy="400050"/>
+          </a:xfrm>
+          <a:prstGeom prst="rect">
+            <a:avLst/>
+          </a:prstGeom>
+          <a:noFill/>
+          <a:ln w="0">
+            <a:noFill/>
+          </a:ln>
+        </p:spPr>
+        <p:txBody>
+          <a:bodyPr anchor="ctr">
+            <a:normAutofit fontScale="100000"/>
+          </a:bodyPr>
+          <a:lstStyle/>
+          <a:p>
+            <a:pPr algn="l">
+              <a:buNone/>
+              <a:defRPr sz="1650" b="1">
+                <a:solidFill>
+                  <a:srgbClr val="E63946"/>
+                </a:solidFill>
+                <a:latin typeface="PingFang TC"/>
+                <a:ea typeface="PingFang TC"/>
+                <a:cs typeface="PingFang TC"/>
+              </a:defRPr>
+            </a:pPr>
+            <a:r>
+              <a:rPr sz="1650" b="1">
+                <a:solidFill>
+                  <a:srgbClr val="E63946"/>
+                </a:solidFill>
+                <a:latin typeface="PingFang TC"/>
+                <a:ea typeface="PingFang TC"/>
+                <a:cs typeface="PingFang TC"/>
+              </a:rPr>
+              <a:t>你的期末題目，就是在右邊找一個證據最強的位置。</a:t>
+            </a:r>
+          </a:p>
+        </p:txBody>
+      </p:sp>
+    </p:spTree>
+  </p:cSld>
+  <p:clrMapOvr>
+    <a:masterClrMapping/>
+  </p:clrMapOvr>
+</p:sld>
+</file>
+
+<file path=ppt/slides/slide39.xml><?xml version="1.0" encoding="utf-8"?>
+<p:sld xmlns:a="http://schemas.openxmlformats.org/drawingml/2006/main" xmlns:p="http://schemas.openxmlformats.org/presentationml/2006/main" xmlns:r="http://schemas.openxmlformats.org/officeDocument/2006/relationships">
+  <p:cSld>
+    <p:spTree>
+      <p:nvGrpSpPr>
+        <p:cNvPr id="1" name=""/>
+        <p:cNvGrpSpPr/>
+        <p:nvPr/>
+      </p:nvGrpSpPr>
+      <p:grpSpPr/>
+      <p:sp>
+        <p:nvSpPr>
+          <p:cNvPr id="24" name="">
+            <a:extLst>
+              <a:ext uri="{FF2B5EF4-FFF2-40B4-BE49-F238E27FC236}">
+                <a16:creationId xmlns:a16="http://schemas.microsoft.com/office/drawing/2014/main" id="{482E03A9-F1BB-408B-BE0F-61666E3C3670}"/>
+              </a:ext>
+            </a:extLst>
+          </p:cNvPr>
+          <p:cNvSpPr>
+            <a:spLocks noGrp="1"/>
+          </p:cNvSpPr>
+          <p:nvPr/>
+        </p:nvSpPr>
+        <p:spPr>
+          <a:xfrm>
+            <a:off x="0" y="0"/>
+            <a:ext cx="12192000" cy="6858000"/>
+          </a:xfrm>
+          <a:prstGeom prst="rect">
+            <a:avLst/>
+          </a:prstGeom>
+          <a:solidFill>
+            <a:srgbClr val="F6F3EE"/>
+          </a:solidFill>
+          <a:ln w="9525">
+            <a:solidFill>
+              <a:srgbClr val="F6F3EE"/>
+            </a:solidFill>
+          </a:ln>
+        </p:spPr>
+        <p:txBody>
+          <a:bodyPr/>
+          <a:p/>
+        </p:txBody>
+      </p:sp>
+      <p:sp>
+        <p:nvSpPr>
+          <p:cNvPr id="2" name="">
+            <a:extLst>
+              <a:ext uri="{FF2B5EF4-FFF2-40B4-BE49-F238E27FC236}">
+                <a16:creationId xmlns:a16="http://schemas.microsoft.com/office/drawing/2014/main" id="{32821D0B-7BB9-4BEA-8568-4AEA506F821E}"/>
+              </a:ext>
+            </a:extLst>
+          </p:cNvPr>
+          <p:cNvSpPr>
+            <a:spLocks noGrp="1"/>
+          </p:cNvSpPr>
+          <p:nvPr/>
+        </p:nvSpPr>
+        <p:spPr>
+          <a:xfrm>
+            <a:off x="609600" y="285750"/>
+            <a:ext cx="10287000" cy="285750"/>
+          </a:xfrm>
+          <a:prstGeom prst="rect">
+            <a:avLst/>
+          </a:prstGeom>
+          <a:noFill/>
+          <a:ln w="0">
+            <a:noFill/>
+          </a:ln>
+        </p:spPr>
+        <p:txBody>
+          <a:bodyPr anchor="ctr">
+            <a:normAutofit fontScale="94444"/>
+          </a:bodyPr>
+          <a:lstStyle/>
+          <a:p>
+            <a:pPr algn="l">
+              <a:buNone/>
+              <a:defRPr sz="1350" b="1">
+                <a:solidFill>
+                  <a:srgbClr val="E63946"/>
+                </a:solidFill>
+                <a:latin typeface="PingFang TC"/>
+                <a:ea typeface="PingFang TC"/>
+                <a:cs typeface="PingFang TC"/>
+              </a:defRPr>
+            </a:pPr>
+            <a:r>
+              <a:rPr sz="1350" b="1">
+                <a:solidFill>
+                  <a:srgbClr val="E63946"/>
+                </a:solidFill>
+                <a:latin typeface="PingFang TC"/>
+                <a:ea typeface="PingFang TC"/>
+                <a:cs typeface="PingFang TC"/>
+              </a:rPr>
+              <a:t>WEEK 6  /  AI 新創地圖</a:t>
+            </a:r>
+          </a:p>
+        </p:txBody>
+      </p:sp>
+      <p:sp>
+        <p:nvSpPr>
+          <p:cNvPr id="3" name="">
+            <a:extLst>
+              <a:ext uri="{FF2B5EF4-FFF2-40B4-BE49-F238E27FC236}">
+                <a16:creationId xmlns:a16="http://schemas.microsoft.com/office/drawing/2014/main" id="{7ED7AA5C-1BBF-4A51-9587-BA5F6F04C78E}"/>
+              </a:ext>
+            </a:extLst>
+          </p:cNvPr>
+          <p:cNvSpPr>
+            <a:spLocks noGrp="1"/>
+          </p:cNvSpPr>
+          <p:nvPr/>
+        </p:nvSpPr>
+        <p:spPr>
+          <a:xfrm>
+            <a:off x="609600" y="838200"/>
+            <a:ext cx="10972800" cy="762000"/>
+          </a:xfrm>
+          <a:prstGeom prst="rect">
+            <a:avLst/>
+          </a:prstGeom>
+          <a:noFill/>
+          <a:ln w="0">
+            <a:noFill/>
+          </a:ln>
+        </p:spPr>
+        <p:txBody>
+          <a:bodyPr anchor="ctr">
+            <a:normAutofit fontScale="100000"/>
+          </a:bodyPr>
+          <a:lstStyle/>
+          <a:p>
+            <a:pPr algn="l">
+              <a:buNone/>
+              <a:defRPr sz="3450" b="1">
+                <a:solidFill>
+                  <a:srgbClr val="121212"/>
+                </a:solidFill>
+                <a:latin typeface="PingFang TC"/>
+                <a:ea typeface="PingFang TC"/>
+                <a:cs typeface="PingFang TC"/>
+              </a:defRPr>
+            </a:pPr>
+            <a:r>
+              <a:rPr sz="3450" b="1">
+                <a:solidFill>
+                  <a:srgbClr val="121212"/>
+                </a:solidFill>
+                <a:latin typeface="PingFang TC"/>
+                <a:ea typeface="PingFang TC"/>
+                <a:cs typeface="PingFang TC"/>
+              </a:rPr>
+              <a:t>接下來四週：這張地圖怎麼用</a:t>
+            </a:r>
+          </a:p>
+        </p:txBody>
+      </p:sp>
+      <p:sp>
+        <p:nvSpPr>
+          <p:cNvPr id="4" name="">
+            <a:extLst>
+              <a:ext uri="{FF2B5EF4-FFF2-40B4-BE49-F238E27FC236}">
+                <a16:creationId xmlns:a16="http://schemas.microsoft.com/office/drawing/2014/main" id="{698E7BB7-A40C-43D3-9FF0-18E046A80787}"/>
+              </a:ext>
+            </a:extLst>
+          </p:cNvPr>
+          <p:cNvSpPr>
+            <a:spLocks noGrp="1"/>
+          </p:cNvSpPr>
+          <p:nvPr/>
+        </p:nvSpPr>
+        <p:spPr>
+          <a:xfrm>
+            <a:off x="609600" y="1619250"/>
+            <a:ext cx="10972800" cy="476250"/>
+          </a:xfrm>
+          <a:prstGeom prst="rect">
+            <a:avLst/>
+          </a:prstGeom>
+          <a:noFill/>
+          <a:ln w="0">
+            <a:noFill/>
+          </a:ln>
+        </p:spPr>
+        <p:txBody>
+          <a:bodyPr anchor="ctr">
+            <a:normAutofit fontScale="100000"/>
+          </a:bodyPr>
+          <a:lstStyle/>
+          <a:p>
+            <a:pPr algn="l">
+              <a:buNone/>
+              <a:defRPr sz="1800" b="0">
+                <a:solidFill>
+                  <a:srgbClr val="626262"/>
+                </a:solidFill>
+                <a:latin typeface="PingFang TC"/>
+                <a:ea typeface="PingFang TC"/>
+                <a:cs typeface="PingFang TC"/>
+              </a:defRPr>
+            </a:pPr>
+            <a:r>
+              <a:rPr sz="1800" b="0">
+                <a:solidFill>
+                  <a:srgbClr val="626262"/>
+                </a:solidFill>
+                <a:latin typeface="PingFang TC"/>
+                <a:ea typeface="PingFang TC"/>
+                <a:cs typeface="PingFang TC"/>
+              </a:rPr>
+              <a:t>群島遊戲在 11/27 和 12/4，接你的方向卡 v1、v2</a:t>
+            </a:r>
+          </a:p>
+        </p:txBody>
+      </p:sp>
+      <p:sp>
+        <p:nvSpPr>
+          <p:cNvPr id="5" name="">
+            <a:extLst>
+              <a:ext uri="{FF2B5EF4-FFF2-40B4-BE49-F238E27FC236}">
+                <a16:creationId xmlns:a16="http://schemas.microsoft.com/office/drawing/2014/main" id="{CDDA15AF-D83A-474D-A456-43204758A811}"/>
+              </a:ext>
+            </a:extLst>
+          </p:cNvPr>
+          <p:cNvSpPr>
+            <a:spLocks noGrp="1"/>
+          </p:cNvSpPr>
+          <p:nvPr/>
+        </p:nvSpPr>
+        <p:spPr>
+          <a:xfrm>
+            <a:off x="609600" y="6286500"/>
+            <a:ext cx="10972800" cy="19050"/>
+          </a:xfrm>
+          <a:prstGeom prst="rect">
+            <a:avLst/>
+          </a:prstGeom>
+          <a:solidFill>
+            <a:srgbClr val="D6D0C7"/>
+          </a:solidFill>
+          <a:ln w="9525">
+            <a:solidFill>
+              <a:srgbClr val="D6D0C7"/>
+            </a:solidFill>
+          </a:ln>
+        </p:spPr>
+        <p:txBody>
+          <a:bodyPr/>
+          <a:p/>
+        </p:txBody>
+      </p:sp>
+      <p:sp>
+        <p:nvSpPr>
+          <p:cNvPr id="6" name="">
+            <a:extLst>
+              <a:ext uri="{FF2B5EF4-FFF2-40B4-BE49-F238E27FC236}">
+                <a16:creationId xmlns:a16="http://schemas.microsoft.com/office/drawing/2014/main" id="{77B95A0A-8FD1-49B6-8553-75CAA5444E19}"/>
+              </a:ext>
+            </a:extLst>
+          </p:cNvPr>
+          <p:cNvSpPr>
+            <a:spLocks noGrp="1"/>
+          </p:cNvSpPr>
+          <p:nvPr/>
+        </p:nvSpPr>
+        <p:spPr>
+          <a:xfrm>
+            <a:off x="609600" y="6362700"/>
+            <a:ext cx="2381250" cy="209550"/>
+          </a:xfrm>
+          <a:prstGeom prst="rect">
+            <a:avLst/>
+          </a:prstGeom>
+          <a:noFill/>
+          <a:ln w="0">
+            <a:noFill/>
+          </a:ln>
+        </p:spPr>
+        <p:txBody>
+          <a:bodyPr anchor="ctr">
+            <a:normAutofit fontScale="86111"/>
+          </a:bodyPr>
+          <a:lstStyle/>
+          <a:p>
+            <a:pPr algn="l">
+              <a:buNone/>
+              <a:defRPr sz="900" b="0">
+                <a:solidFill>
+                  <a:srgbClr val="626262"/>
+                </a:solidFill>
+                <a:latin typeface="PingFang TC"/>
+                <a:ea typeface="PingFang TC"/>
+                <a:cs typeface="PingFang TC"/>
+              </a:defRPr>
+            </a:pPr>
+            <a:r>
+              <a:rPr sz="900" b="0">
+                <a:solidFill>
+                  <a:srgbClr val="626262"/>
+                </a:solidFill>
+                <a:latin typeface="PingFang TC"/>
+                <a:ea typeface="PingFang TC"/>
+                <a:cs typeface="PingFang TC"/>
+              </a:rPr>
+              <a:t>Startup Journey Lab</a:t>
+            </a:r>
+          </a:p>
+        </p:txBody>
+      </p:sp>
+      <p:sp>
+        <p:nvSpPr>
+          <p:cNvPr id="7" name="">
+            <a:extLst>
+              <a:ext uri="{FF2B5EF4-FFF2-40B4-BE49-F238E27FC236}">
+                <a16:creationId xmlns:a16="http://schemas.microsoft.com/office/drawing/2014/main" id="{9B45994A-9DF8-4526-9B16-24CAE03C38D1}"/>
+              </a:ext>
+            </a:extLst>
+          </p:cNvPr>
+          <p:cNvSpPr>
+            <a:spLocks noGrp="1"/>
+          </p:cNvSpPr>
+          <p:nvPr/>
+        </p:nvSpPr>
+        <p:spPr>
+          <a:xfrm>
+            <a:off x="10477500" y="6362700"/>
+            <a:ext cx="1104900" cy="209550"/>
+          </a:xfrm>
+          <a:prstGeom prst="rect">
+            <a:avLst/>
+          </a:prstGeom>
+          <a:noFill/>
+          <a:ln w="0">
+            <a:noFill/>
+          </a:ln>
+        </p:spPr>
+        <p:txBody>
+          <a:bodyPr anchor="ctr">
+            <a:normAutofit fontScale="86111"/>
+          </a:bodyPr>
+          <a:lstStyle/>
+          <a:p>
+            <a:pPr algn="r">
+              <a:buNone/>
+              <a:defRPr sz="900" b="0">
+                <a:solidFill>
+                  <a:srgbClr val="626262"/>
+                </a:solidFill>
+                <a:latin typeface="PingFang TC"/>
+                <a:ea typeface="PingFang TC"/>
+                <a:cs typeface="PingFang TC"/>
+              </a:defRPr>
+            </a:pPr>
+            <a:r>
+              <a:rPr sz="900" b="0">
+                <a:solidFill>
+                  <a:srgbClr val="626262"/>
+                </a:solidFill>
+                <a:latin typeface="PingFang TC"/>
+                <a:ea typeface="PingFang TC"/>
+                <a:cs typeface="PingFang TC"/>
+              </a:rPr>
+              <a:t>14 / 15</a:t>
+            </a:r>
+          </a:p>
+        </p:txBody>
+      </p:sp>
+      <p:sp>
+        <p:nvSpPr>
+          <p:cNvPr id="8" name="">
+            <a:extLst>
+              <a:ext uri="{FF2B5EF4-FFF2-40B4-BE49-F238E27FC236}">
+                <a16:creationId xmlns:a16="http://schemas.microsoft.com/office/drawing/2014/main" id="{382371FE-697D-40E4-BB3A-4680C9492111}"/>
+              </a:ext>
+            </a:extLst>
+          </p:cNvPr>
+          <p:cNvSpPr>
+            <a:spLocks noGrp="1"/>
+          </p:cNvSpPr>
+          <p:nvPr/>
+        </p:nvSpPr>
+        <p:spPr>
+          <a:xfrm>
+            <a:off x="609600" y="2428875"/>
+            <a:ext cx="457200" cy="457200"/>
+          </a:xfrm>
+          <a:prstGeom prst="rect">
+            <a:avLst/>
+          </a:prstGeom>
+          <a:solidFill>
+            <a:srgbClr val="E63946"/>
+          </a:solidFill>
+          <a:ln w="9525">
+            <a:solidFill>
+              <a:srgbClr val="E63946"/>
+            </a:solidFill>
+          </a:ln>
+        </p:spPr>
+        <p:txBody>
+          <a:bodyPr/>
+          <a:p/>
+        </p:txBody>
+      </p:sp>
+      <p:sp>
+        <p:nvSpPr>
+          <p:cNvPr id="9" name="">
+            <a:extLst>
+              <a:ext uri="{FF2B5EF4-FFF2-40B4-BE49-F238E27FC236}">
+                <a16:creationId xmlns:a16="http://schemas.microsoft.com/office/drawing/2014/main" id="{3C320CB9-C3AD-46D4-B730-D814052F3DBA}"/>
+              </a:ext>
+            </a:extLst>
+          </p:cNvPr>
+          <p:cNvSpPr>
+            <a:spLocks noGrp="1"/>
+          </p:cNvSpPr>
+          <p:nvPr/>
+        </p:nvSpPr>
+        <p:spPr>
+          <a:xfrm>
+            <a:off x="609600" y="2428875"/>
+            <a:ext cx="457200" cy="457200"/>
+          </a:xfrm>
+          <a:prstGeom prst="rect">
+            <a:avLst/>
+          </a:prstGeom>
+          <a:noFill/>
+          <a:ln w="0">
+            <a:noFill/>
+          </a:ln>
+        </p:spPr>
+        <p:txBody>
+          <a:bodyPr anchor="ctr">
+            <a:normAutofit fontScale="100000"/>
+          </a:bodyPr>
+          <a:lstStyle/>
+          <a:p>
+            <a:pPr algn="ctr">
+              <a:buNone/>
+              <a:defRPr sz="1350" b="1">
+                <a:solidFill>
+                  <a:srgbClr val="FFFFFF"/>
+                </a:solidFill>
+                <a:latin typeface="PingFang TC"/>
+                <a:ea typeface="PingFang TC"/>
+                <a:cs typeface="PingFang TC"/>
+              </a:defRPr>
+            </a:pPr>
+            <a:r>
+              <a:rPr sz="1350" b="1">
+                <a:solidFill>
+                  <a:srgbClr val="FFFFFF"/>
+                </a:solidFill>
+                <a:latin typeface="PingFang TC"/>
+                <a:ea typeface="PingFang TC"/>
+                <a:cs typeface="PingFang TC"/>
+              </a:rPr>
+              <a:t>01</a:t>
+            </a:r>
+          </a:p>
+        </p:txBody>
+      </p:sp>
+      <p:sp>
+        <p:nvSpPr>
+          <p:cNvPr id="10" name="">
+            <a:extLst>
+              <a:ext uri="{FF2B5EF4-FFF2-40B4-BE49-F238E27FC236}">
+                <a16:creationId xmlns:a16="http://schemas.microsoft.com/office/drawing/2014/main" id="{AEF2220A-25C8-4436-884F-D94EFAE572B1}"/>
+              </a:ext>
+            </a:extLst>
+          </p:cNvPr>
+          <p:cNvSpPr>
+            <a:spLocks noGrp="1"/>
+          </p:cNvSpPr>
+          <p:nvPr/>
+        </p:nvSpPr>
+        <p:spPr>
+          <a:xfrm>
+            <a:off x="1314450" y="2409825"/>
+            <a:ext cx="2952750" cy="381000"/>
+          </a:xfrm>
+          <a:prstGeom prst="rect">
+            <a:avLst/>
+          </a:prstGeom>
+          <a:noFill/>
+          <a:ln w="0">
+            <a:noFill/>
+          </a:ln>
+        </p:spPr>
+        <p:txBody>
+          <a:bodyPr anchor="ctr">
+            <a:normAutofit fontScale="97436"/>
+          </a:bodyPr>
+          <a:lstStyle/>
+          <a:p>
+            <a:pPr algn="l">
+              <a:buNone/>
+              <a:defRPr sz="1950" b="1">
+                <a:solidFill>
+                  <a:srgbClr val="121212"/>
+                </a:solidFill>
+                <a:latin typeface="PingFang TC"/>
+                <a:ea typeface="PingFang TC"/>
+                <a:cs typeface="PingFang TC"/>
+              </a:defRPr>
+            </a:pPr>
+            <a:r>
+              <a:rPr sz="1950" b="1">
+                <a:solidFill>
+                  <a:srgbClr val="121212"/>
+                </a:solidFill>
+                <a:latin typeface="PingFang TC"/>
+                <a:ea typeface="PingFang TC"/>
+                <a:cs typeface="PingFang TC"/>
+              </a:rPr>
+              <a:t>11/20 建組</a:t>
+            </a:r>
+          </a:p>
+        </p:txBody>
+      </p:sp>
+      <p:sp>
+        <p:nvSpPr>
+          <p:cNvPr id="11" name="">
+            <a:extLst>
+              <a:ext uri="{FF2B5EF4-FFF2-40B4-BE49-F238E27FC236}">
+                <a16:creationId xmlns:a16="http://schemas.microsoft.com/office/drawing/2014/main" id="{9C8C0427-9A41-4804-B115-6DB5C54BE26C}"/>
+              </a:ext>
+            </a:extLst>
+          </p:cNvPr>
+          <p:cNvSpPr>
+            <a:spLocks noGrp="1"/>
+          </p:cNvSpPr>
+          <p:nvPr/>
+        </p:nvSpPr>
+        <p:spPr>
+          <a:xfrm>
+            <a:off x="4429125" y="2409825"/>
+            <a:ext cx="6953250" cy="457200"/>
+          </a:xfrm>
+          <a:prstGeom prst="rect">
+            <a:avLst/>
+          </a:prstGeom>
+          <a:noFill/>
+          <a:ln w="0">
+            <a:noFill/>
+          </a:ln>
+        </p:spPr>
+        <p:txBody>
+          <a:bodyPr anchor="ctr">
+            <a:normAutofit fontScale="100000"/>
+          </a:bodyPr>
+          <a:lstStyle/>
+          <a:p>
+            <a:pPr algn="l">
+              <a:buNone/>
+              <a:defRPr sz="1500" b="0">
+                <a:solidFill>
+                  <a:srgbClr val="626262"/>
+                </a:solidFill>
+                <a:latin typeface="PingFang TC"/>
+                <a:ea typeface="PingFang TC"/>
+                <a:cs typeface="PingFang TC"/>
+              </a:defRPr>
+            </a:pPr>
+            <a:r>
+              <a:rPr sz="1500" b="0">
+                <a:solidFill>
+                  <a:srgbClr val="626262"/>
+                </a:solidFill>
+                <a:latin typeface="PingFang TC"/>
+                <a:ea typeface="PingFang TC"/>
+                <a:cs typeface="PingFang TC"/>
+              </a:rPr>
+              <a:t>AI agent 工具更新；三人一組、一組一個產業，三個方向各由一人認領。</a:t>
+            </a:r>
+          </a:p>
+        </p:txBody>
+      </p:sp>
+      <p:sp>
+        <p:nvSpPr>
+          <p:cNvPr id="12" name="">
+            <a:extLst>
+              <a:ext uri="{FF2B5EF4-FFF2-40B4-BE49-F238E27FC236}">
+                <a16:creationId xmlns:a16="http://schemas.microsoft.com/office/drawing/2014/main" id="{A4D9B320-DC9A-4954-BCBD-D1A12EBEB5F1}"/>
+              </a:ext>
+            </a:extLst>
+          </p:cNvPr>
+          <p:cNvSpPr>
+            <a:spLocks noGrp="1"/>
+          </p:cNvSpPr>
+          <p:nvPr/>
+        </p:nvSpPr>
+        <p:spPr>
+          <a:xfrm>
+            <a:off x="1314450" y="3019425"/>
+            <a:ext cx="10267950" cy="19050"/>
+          </a:xfrm>
+          <a:prstGeom prst="rect">
+            <a:avLst/>
+          </a:prstGeom>
+          <a:solidFill>
+            <a:srgbClr val="D6D0C7"/>
+          </a:solidFill>
+          <a:ln w="9525">
+            <a:solidFill>
+              <a:srgbClr val="D6D0C7"/>
+            </a:solidFill>
+          </a:ln>
+        </p:spPr>
+        <p:txBody>
+          <a:bodyPr/>
+          <a:p/>
+        </p:txBody>
+      </p:sp>
+      <p:sp>
+        <p:nvSpPr>
+          <p:cNvPr id="13" name="">
+            <a:extLst>
+              <a:ext uri="{FF2B5EF4-FFF2-40B4-BE49-F238E27FC236}">
+                <a16:creationId xmlns:a16="http://schemas.microsoft.com/office/drawing/2014/main" id="{EBF68F2A-63F8-4862-B27E-F8DF179D2DA6}"/>
+              </a:ext>
+            </a:extLst>
+          </p:cNvPr>
+          <p:cNvSpPr>
+            <a:spLocks noGrp="1"/>
+          </p:cNvSpPr>
+          <p:nvPr/>
+        </p:nvSpPr>
+        <p:spPr>
+          <a:xfrm>
+            <a:off x="609600" y="3381375"/>
+            <a:ext cx="457200" cy="457200"/>
+          </a:xfrm>
+          <a:prstGeom prst="rect">
+            <a:avLst/>
+          </a:prstGeom>
+          <a:solidFill>
+            <a:srgbClr val="14395B"/>
+          </a:solidFill>
+          <a:ln w="9525">
+            <a:solidFill>
+              <a:srgbClr val="14395B"/>
+            </a:solidFill>
+          </a:ln>
+        </p:spPr>
+        <p:txBody>
+          <a:bodyPr/>
+          <a:p/>
+        </p:txBody>
+      </p:sp>
+      <p:sp>
+        <p:nvSpPr>
+          <p:cNvPr id="14" name="">
+            <a:extLst>
+              <a:ext uri="{FF2B5EF4-FFF2-40B4-BE49-F238E27FC236}">
+                <a16:creationId xmlns:a16="http://schemas.microsoft.com/office/drawing/2014/main" id="{E534EE12-5C89-491C-8932-2A672F3E98D7}"/>
+              </a:ext>
+            </a:extLst>
+          </p:cNvPr>
+          <p:cNvSpPr>
+            <a:spLocks noGrp="1"/>
+          </p:cNvSpPr>
+          <p:nvPr/>
+        </p:nvSpPr>
+        <p:spPr>
+          <a:xfrm>
+            <a:off x="609600" y="3381375"/>
+            <a:ext cx="457200" cy="457200"/>
+          </a:xfrm>
+          <a:prstGeom prst="rect">
+            <a:avLst/>
+          </a:prstGeom>
+          <a:noFill/>
+          <a:ln w="0">
+            <a:noFill/>
+          </a:ln>
+        </p:spPr>
+        <p:txBody>
+          <a:bodyPr anchor="ctr">
+            <a:normAutofit fontScale="100000"/>
+          </a:bodyPr>
+          <a:lstStyle/>
+          <a:p>
+            <a:pPr algn="ctr">
+              <a:buNone/>
+              <a:defRPr sz="1350" b="1">
+                <a:solidFill>
+                  <a:srgbClr val="FFFFFF"/>
+                </a:solidFill>
+                <a:latin typeface="PingFang TC"/>
+                <a:ea typeface="PingFang TC"/>
+                <a:cs typeface="PingFang TC"/>
+              </a:defRPr>
+            </a:pPr>
+            <a:r>
+              <a:rPr sz="1350" b="1">
+                <a:solidFill>
+                  <a:srgbClr val="FFFFFF"/>
+                </a:solidFill>
+                <a:latin typeface="PingFang TC"/>
+                <a:ea typeface="PingFang TC"/>
+                <a:cs typeface="PingFang TC"/>
+              </a:rPr>
+              <a:t>02</a:t>
+            </a:r>
+          </a:p>
+        </p:txBody>
+      </p:sp>
+      <p:sp>
+        <p:nvSpPr>
+          <p:cNvPr id="15" name="">
+            <a:extLst>
+              <a:ext uri="{FF2B5EF4-FFF2-40B4-BE49-F238E27FC236}">
+                <a16:creationId xmlns:a16="http://schemas.microsoft.com/office/drawing/2014/main" id="{AED1200E-7BE2-4DD2-ADA0-7D30E6B0981B}"/>
+              </a:ext>
+            </a:extLst>
+          </p:cNvPr>
+          <p:cNvSpPr>
+            <a:spLocks noGrp="1"/>
+          </p:cNvSpPr>
+          <p:nvPr/>
+        </p:nvSpPr>
+        <p:spPr>
+          <a:xfrm>
+            <a:off x="1314450" y="3362325"/>
+            <a:ext cx="2952750" cy="381000"/>
+          </a:xfrm>
+          <a:prstGeom prst="rect">
+            <a:avLst/>
+          </a:prstGeom>
+          <a:noFill/>
+          <a:ln w="0">
+            <a:noFill/>
+          </a:ln>
+        </p:spPr>
+        <p:txBody>
+          <a:bodyPr anchor="ctr">
+            <a:normAutofit fontScale="97436"/>
+          </a:bodyPr>
+          <a:lstStyle/>
+          <a:p>
+            <a:pPr algn="l">
+              <a:buNone/>
+              <a:defRPr sz="1950" b="1">
+                <a:solidFill>
+                  <a:srgbClr val="121212"/>
+                </a:solidFill>
+                <a:latin typeface="PingFang TC"/>
+                <a:ea typeface="PingFang TC"/>
+                <a:cs typeface="PingFang TC"/>
+              </a:defRPr>
+            </a:pPr>
+            <a:r>
+              <a:rPr sz="1950" b="1">
+                <a:solidFill>
+                  <a:srgbClr val="121212"/>
+                </a:solidFill>
+                <a:latin typeface="PingFang TC"/>
+                <a:ea typeface="PingFang TC"/>
+                <a:cs typeface="PingFang TC"/>
+              </a:rPr>
+              <a:t>11/27 群島遊戲：作答</a:t>
+            </a:r>
+          </a:p>
+        </p:txBody>
+      </p:sp>
+      <p:sp>
+        <p:nvSpPr>
+          <p:cNvPr id="16" name="">
+            <a:extLst>
+              <a:ext uri="{FF2B5EF4-FFF2-40B4-BE49-F238E27FC236}">
+                <a16:creationId xmlns:a16="http://schemas.microsoft.com/office/drawing/2014/main" id="{F22A966B-DF26-4D7E-8ECC-14591A3B9F8E}"/>
+              </a:ext>
+            </a:extLst>
+          </p:cNvPr>
+          <p:cNvSpPr>
+            <a:spLocks noGrp="1"/>
+          </p:cNvSpPr>
+          <p:nvPr/>
+        </p:nvSpPr>
+        <p:spPr>
+          <a:xfrm>
+            <a:off x="4429125" y="3362325"/>
+            <a:ext cx="6953250" cy="457200"/>
+          </a:xfrm>
+          <a:prstGeom prst="rect">
+            <a:avLst/>
+          </a:prstGeom>
+          <a:noFill/>
+          <a:ln w="0">
+            <a:noFill/>
+          </a:ln>
+        </p:spPr>
+        <p:txBody>
+          <a:bodyPr anchor="ctr">
+            <a:normAutofit fontScale="100000"/>
+          </a:bodyPr>
+          <a:lstStyle/>
+          <a:p>
+            <a:pPr algn="l">
+              <a:buNone/>
+              <a:defRPr sz="1500" b="0">
+                <a:solidFill>
+                  <a:srgbClr val="626262"/>
+                </a:solidFill>
+                <a:latin typeface="PingFang TC"/>
+                <a:ea typeface="PingFang TC"/>
+                <a:cs typeface="PingFang TC"/>
+              </a:defRPr>
+            </a:pPr>
+            <a:r>
+              <a:rPr sz="1500" b="0">
+                <a:solidFill>
+                  <a:srgbClr val="626262"/>
+                </a:solidFill>
+                <a:latin typeface="PingFang TC"/>
+                <a:ea typeface="PingFang TC"/>
+                <a:cs typeface="PingFang TC"/>
+              </a:rPr>
+              <a:t>15 家公司各 3 句是非題（誰付錢、怎麼收費、以前誰在做）＋估值題 → 下課前鎖住。</a:t>
+            </a:r>
+          </a:p>
+        </p:txBody>
+      </p:sp>
+      <p:sp>
+        <p:nvSpPr>
+          <p:cNvPr id="17" name="">
+            <a:extLst>
+              <a:ext uri="{FF2B5EF4-FFF2-40B4-BE49-F238E27FC236}">
+                <a16:creationId xmlns:a16="http://schemas.microsoft.com/office/drawing/2014/main" id="{4347ED41-C791-4EE4-9C69-652BD9AC2DE6}"/>
+              </a:ext>
+            </a:extLst>
+          </p:cNvPr>
+          <p:cNvSpPr>
+            <a:spLocks noGrp="1"/>
+          </p:cNvSpPr>
+          <p:nvPr/>
+        </p:nvSpPr>
+        <p:spPr>
+          <a:xfrm>
+            <a:off x="1314450" y="3971925"/>
+            <a:ext cx="10267950" cy="19050"/>
+          </a:xfrm>
+          <a:prstGeom prst="rect">
+            <a:avLst/>
+          </a:prstGeom>
+          <a:solidFill>
+            <a:srgbClr val="D6D0C7"/>
+          </a:solidFill>
+          <a:ln w="9525">
+            <a:solidFill>
+              <a:srgbClr val="D6D0C7"/>
+            </a:solidFill>
+          </a:ln>
+        </p:spPr>
+        <p:txBody>
+          <a:bodyPr/>
+          <a:p/>
+        </p:txBody>
+      </p:sp>
+      <p:sp>
+        <p:nvSpPr>
+          <p:cNvPr id="18" name="">
+            <a:extLst>
+              <a:ext uri="{FF2B5EF4-FFF2-40B4-BE49-F238E27FC236}">
+                <a16:creationId xmlns:a16="http://schemas.microsoft.com/office/drawing/2014/main" id="{3B36BABB-0E6E-4648-BB95-CCB3E591DDF3}"/>
+              </a:ext>
+            </a:extLst>
+          </p:cNvPr>
+          <p:cNvSpPr>
+            <a:spLocks noGrp="1"/>
+          </p:cNvSpPr>
+          <p:nvPr/>
+        </p:nvSpPr>
+        <p:spPr>
+          <a:xfrm>
+            <a:off x="609600" y="4333875"/>
+            <a:ext cx="457200" cy="457200"/>
+          </a:xfrm>
+          <a:prstGeom prst="rect">
+            <a:avLst/>
+          </a:prstGeom>
+          <a:solidFill>
+            <a:srgbClr val="C99827"/>
+          </a:solidFill>
+          <a:ln w="9525">
+            <a:solidFill>
+              <a:srgbClr val="C99827"/>
+            </a:solidFill>
+          </a:ln>
+        </p:spPr>
+        <p:txBody>
+          <a:bodyPr/>
+          <a:p/>
+        </p:txBody>
+      </p:sp>
+      <p:sp>
+        <p:nvSpPr>
+          <p:cNvPr id="19" name="">
+            <a:extLst>
+              <a:ext uri="{FF2B5EF4-FFF2-40B4-BE49-F238E27FC236}">
+                <a16:creationId xmlns:a16="http://schemas.microsoft.com/office/drawing/2014/main" id="{CA631708-CE6D-42BC-B460-B476022771E7}"/>
+              </a:ext>
+            </a:extLst>
+          </p:cNvPr>
+          <p:cNvSpPr>
+            <a:spLocks noGrp="1"/>
+          </p:cNvSpPr>
+          <p:nvPr/>
+        </p:nvSpPr>
+        <p:spPr>
+          <a:xfrm>
+            <a:off x="609600" y="4333875"/>
+            <a:ext cx="457200" cy="457200"/>
+          </a:xfrm>
+          <a:prstGeom prst="rect">
+            <a:avLst/>
+          </a:prstGeom>
+          <a:noFill/>
+          <a:ln w="0">
+            <a:noFill/>
+          </a:ln>
+        </p:spPr>
+        <p:txBody>
+          <a:bodyPr anchor="ctr">
+            <a:normAutofit fontScale="100000"/>
+          </a:bodyPr>
+          <a:lstStyle/>
+          <a:p>
+            <a:pPr algn="ctr">
+              <a:buNone/>
+              <a:defRPr sz="1350" b="1">
+                <a:solidFill>
+                  <a:srgbClr val="FFFFFF"/>
+                </a:solidFill>
+                <a:latin typeface="PingFang TC"/>
+                <a:ea typeface="PingFang TC"/>
+                <a:cs typeface="PingFang TC"/>
+              </a:defRPr>
+            </a:pPr>
+            <a:r>
+              <a:rPr sz="1350" b="1">
+                <a:solidFill>
+                  <a:srgbClr val="FFFFFF"/>
+                </a:solidFill>
+                <a:latin typeface="PingFang TC"/>
+                <a:ea typeface="PingFang TC"/>
+                <a:cs typeface="PingFang TC"/>
+              </a:rPr>
+              <a:t>03</a:t>
+            </a:r>
+          </a:p>
+        </p:txBody>
+      </p:sp>
+      <p:sp>
+        <p:nvSpPr>
+          <p:cNvPr id="20" name="">
+            <a:extLst>
+              <a:ext uri="{FF2B5EF4-FFF2-40B4-BE49-F238E27FC236}">
+                <a16:creationId xmlns:a16="http://schemas.microsoft.com/office/drawing/2014/main" id="{C7AE9068-2762-4A03-A15E-EE94A7A0CDF0}"/>
+              </a:ext>
+            </a:extLst>
+          </p:cNvPr>
+          <p:cNvSpPr>
+            <a:spLocks noGrp="1"/>
+          </p:cNvSpPr>
+          <p:nvPr/>
+        </p:nvSpPr>
+        <p:spPr>
+          <a:xfrm>
+            <a:off x="1314450" y="4314825"/>
+            <a:ext cx="2952750" cy="381000"/>
+          </a:xfrm>
+          <a:prstGeom prst="rect">
+            <a:avLst/>
+          </a:prstGeom>
+          <a:noFill/>
+          <a:ln w="0">
+            <a:noFill/>
+          </a:ln>
+        </p:spPr>
+        <p:txBody>
+          <a:bodyPr anchor="ctr">
+            <a:normAutofit fontScale="97436"/>
+          </a:bodyPr>
+          <a:lstStyle/>
+          <a:p>
+            <a:pPr algn="l">
+              <a:buNone/>
+              <a:defRPr sz="1950" b="1">
+                <a:solidFill>
+                  <a:srgbClr val="121212"/>
+                </a:solidFill>
+                <a:latin typeface="PingFang TC"/>
+                <a:ea typeface="PingFang TC"/>
+                <a:cs typeface="PingFang TC"/>
+              </a:defRPr>
+            </a:pPr>
+            <a:r>
+              <a:rPr sz="1950" b="1">
+                <a:solidFill>
+                  <a:srgbClr val="121212"/>
+                </a:solidFill>
+                <a:latin typeface="PingFang TC"/>
+                <a:ea typeface="PingFang TC"/>
+                <a:cs typeface="PingFang TC"/>
+              </a:rPr>
+              <a:t>12/4 群島遊戲：揭曉</a:t>
+            </a:r>
+          </a:p>
+        </p:txBody>
+      </p:sp>
+      <p:sp>
+        <p:nvSpPr>
+          <p:cNvPr id="21" name="">
+            <a:extLst>
+              <a:ext uri="{FF2B5EF4-FFF2-40B4-BE49-F238E27FC236}">
+                <a16:creationId xmlns:a16="http://schemas.microsoft.com/office/drawing/2014/main" id="{5BD73FAB-8CB1-41D3-B640-715FEE6AF17E}"/>
+              </a:ext>
+            </a:extLst>
+          </p:cNvPr>
+          <p:cNvSpPr>
+            <a:spLocks noGrp="1"/>
+          </p:cNvSpPr>
+          <p:nvPr/>
+        </p:nvSpPr>
+        <p:spPr>
+          <a:xfrm>
+            <a:off x="4429125" y="4314825"/>
+            <a:ext cx="6953250" cy="457200"/>
+          </a:xfrm>
+          <a:prstGeom prst="rect">
+            <a:avLst/>
+          </a:prstGeom>
+          <a:noFill/>
+          <a:ln w="0">
+            <a:noFill/>
+          </a:ln>
+        </p:spPr>
+        <p:txBody>
+          <a:bodyPr anchor="ctr">
+            <a:normAutofit fontScale="100000"/>
+          </a:bodyPr>
+          <a:lstStyle/>
+          <a:p>
+            <a:pPr algn="l">
+              <a:buNone/>
+              <a:defRPr sz="1500" b="0">
+                <a:solidFill>
+                  <a:srgbClr val="626262"/>
+                </a:solidFill>
+                <a:latin typeface="PingFang TC"/>
+                <a:ea typeface="PingFang TC"/>
+                <a:cs typeface="PingFang TC"/>
+              </a:defRPr>
+            </a:pPr>
+            <a:r>
+              <a:rPr sz="1500" b="0">
+                <a:solidFill>
+                  <a:srgbClr val="626262"/>
+                </a:solidFill>
+                <a:latin typeface="PingFang TC"/>
+                <a:ea typeface="PingFang TC"/>
+                <a:cs typeface="PingFang TC"/>
+              </a:rPr>
+              <a:t>AI 老師帶你用 Gemini 查證錯題 → 打開「全圖卡」七格 → 寫方向卡 v2。</a:t>
+            </a:r>
+          </a:p>
+        </p:txBody>
+      </p:sp>
+      <p:sp>
+        <p:nvSpPr>
+          <p:cNvPr id="22" name="">
+            <a:extLst>
+              <a:ext uri="{FF2B5EF4-FFF2-40B4-BE49-F238E27FC236}">
+                <a16:creationId xmlns:a16="http://schemas.microsoft.com/office/drawing/2014/main" id="{8FA808F9-3FCE-4AFA-B8B7-2FF36A31D8F6}"/>
+              </a:ext>
+            </a:extLst>
+          </p:cNvPr>
+          <p:cNvSpPr>
+            <a:spLocks noGrp="1"/>
+          </p:cNvSpPr>
+          <p:nvPr/>
+        </p:nvSpPr>
+        <p:spPr>
+          <a:xfrm>
+            <a:off x="1314450" y="4924425"/>
+            <a:ext cx="10267950" cy="19050"/>
+          </a:xfrm>
+          <a:prstGeom prst="rect">
+            <a:avLst/>
+          </a:prstGeom>
+          <a:solidFill>
+            <a:srgbClr val="D6D0C7"/>
+          </a:solidFill>
+          <a:ln w="9525">
+            <a:solidFill>
+              <a:srgbClr val="D6D0C7"/>
+            </a:solidFill>
+          </a:ln>
+        </p:spPr>
+        <p:txBody>
+          <a:bodyPr/>
+          <a:p/>
+        </p:txBody>
+      </p:sp>
+      <p:sp>
+        <p:nvSpPr>
+          <p:cNvPr id="23" name="">
+            <a:extLst>
+              <a:ext uri="{FF2B5EF4-FFF2-40B4-BE49-F238E27FC236}">
+                <a16:creationId xmlns:a16="http://schemas.microsoft.com/office/drawing/2014/main" id="{52391823-4577-41D5-B5F1-22EFE691E292}"/>
+              </a:ext>
+            </a:extLst>
+          </p:cNvPr>
+          <p:cNvSpPr>
+            <a:spLocks noGrp="1"/>
+          </p:cNvSpPr>
+          <p:nvPr/>
+        </p:nvSpPr>
+        <p:spPr>
+          <a:xfrm>
+            <a:off x="609600" y="5572125"/>
+            <a:ext cx="10972800" cy="400050"/>
+          </a:xfrm>
+          <a:prstGeom prst="rect">
+            <a:avLst/>
+          </a:prstGeom>
+          <a:noFill/>
+          <a:ln w="0">
+            <a:noFill/>
+          </a:ln>
+        </p:spPr>
+        <p:txBody>
+          <a:bodyPr anchor="ctr">
+            <a:normAutofit fontScale="100000"/>
+          </a:bodyPr>
+          <a:lstStyle/>
+          <a:p>
+            <a:pPr algn="l">
+              <a:buNone/>
+              <a:defRPr sz="1575" b="1">
+                <a:solidFill>
+                  <a:srgbClr val="121212"/>
+                </a:solidFill>
+                <a:latin typeface="PingFang TC"/>
+                <a:ea typeface="PingFang TC"/>
+                <a:cs typeface="PingFang TC"/>
+              </a:defRPr>
+            </a:pPr>
+            <a:r>
+              <a:rPr sz="1575" b="1">
+                <a:solidFill>
+                  <a:srgbClr val="121212"/>
+                </a:solidFill>
+                <a:latin typeface="PingFang TC"/>
+                <a:ea typeface="PingFang TC"/>
+                <a:cs typeface="PingFang TC"/>
+              </a:rPr>
+              <a:t>期末報告：每個方向都要拿一家群島公司當對照，用同樣的七格寫「我們這一行」。</a:t>
+            </a:r>
+          </a:p>
+        </p:txBody>
+      </p:sp>
+    </p:spTree>
+  </p:cSld>
+  <p:clrMapOvr>
+    <a:masterClrMapping/>
+  </p:clrMapOvr>
+</p:sld>
+</file>
+
+<file path=ppt/slides/slide40.xml><?xml version="1.0" encoding="utf-8"?>
 <p:sld xmlns:a="http://schemas.openxmlformats.org/drawingml/2006/main" xmlns:p="http://schemas.openxmlformats.org/presentationml/2006/main" xmlns:r="http://schemas.openxmlformats.org/officeDocument/2006/relationships">
   <p:cSld>
     <p:bg>
@@ -14837,7 +17817,7 @@
                 <a:ea typeface="PingFang TC"/>
                 <a:cs typeface="PingFang TC"/>
               </a:rPr>
-              <a:t>13 / 13</a:t>
+              <a:t>15 / 15</a:t>
             </a:r>
           </a:p>
         </p:txBody>
